--- a/paper/ksaim_poster/poster.pptx
+++ b/paper/ksaim_poster/poster.pptx
@@ -5,9 +5,9 @@
     <p:sldMasterId id="2147483648" r:id="rId1"/>
   </p:sldMasterIdLst>
   <p:sldIdLst>
-    <p:sldId id="256" r:id="rId7"/>
+    <p:sldId id="256" r:id="rId2"/>
   </p:sldIdLst>
-  <p:sldSz cx="30266640" cy="42793920" type="screen4x3"/>
+  <p:sldSz cx="30267275" cy="42794238"/>
   <p:notesSz cx="6858000" cy="9144000"/>
   <p:defaultTextStyle>
     <a:defPPr>
@@ -104,6 +104,22 @@
       </a:defRPr>
     </a:lvl9pPr>
   </p:defaultTextStyle>
+  <p:extLst>
+    <p:ext uri="{EFAFB233-063F-42B5-8137-9DF3F51BA10A}">
+      <p15:sldGuideLst xmlns:p15="http://schemas.microsoft.com/office/powerpoint/2012/main">
+        <p15:guide id="1" orient="horz" pos="2160">
+          <p15:clr>
+            <a:srgbClr val="A4A3A4"/>
+          </p15:clr>
+        </p15:guide>
+        <p15:guide id="2" pos="2880">
+          <p15:clr>
+            <a:srgbClr val="A4A3A4"/>
+          </p15:clr>
+        </p15:guide>
+      </p15:sldGuideLst>
+    </p:ext>
+  </p:extLst>
 </p:presentation>
 </file>
 
@@ -145,10 +161,9 @@
           <a:lstStyle/>
           <a:p>
             <a:r>
-              <a:rPr lang="en-US" smtClean="0"/>
+              <a:rPr lang="en-US"/>
               <a:t>Click to edit Master title style</a:t>
             </a:r>
-            <a:endParaRPr lang="en-US"/>
           </a:p>
         </p:txBody>
       </p:sp>
@@ -264,10 +279,9 @@
           </a:lstStyle>
           <a:p>
             <a:r>
-              <a:rPr lang="en-US" smtClean="0"/>
+              <a:rPr lang="en-US"/>
               <a:t>Click to edit Master subtitle style</a:t>
             </a:r>
-            <a:endParaRPr lang="en-US"/>
           </a:p>
         </p:txBody>
       </p:sp>
@@ -288,7 +302,7 @@
           <a:p>
             <a:fld id="{5BCAD085-E8A6-8845-BD4E-CB4CCA059FC4}" type="datetimeFigureOut">
               <a:rPr lang="en-US" smtClean="0"/>
-              <a:t>1/27/13</a:t>
+              <a:t>10/16/2026</a:t>
             </a:fld>
             <a:endParaRPr lang="en-US"/>
           </a:p>
@@ -382,10 +396,9 @@
           <a:lstStyle/>
           <a:p>
             <a:r>
-              <a:rPr lang="en-US" smtClean="0"/>
+              <a:rPr lang="en-US"/>
               <a:t>Click to edit Master title style</a:t>
             </a:r>
-            <a:endParaRPr lang="en-US"/>
           </a:p>
         </p:txBody>
       </p:sp>
@@ -406,38 +419,37 @@
           <a:p>
             <a:pPr lvl="0"/>
             <a:r>
-              <a:rPr lang="en-US" smtClean="0"/>
+              <a:rPr lang="en-US"/>
               <a:t>Click to edit Master text styles</a:t>
             </a:r>
           </a:p>
           <a:p>
             <a:pPr lvl="1"/>
             <a:r>
-              <a:rPr lang="en-US" smtClean="0"/>
+              <a:rPr lang="en-US"/>
               <a:t>Second level</a:t>
             </a:r>
           </a:p>
           <a:p>
             <a:pPr lvl="2"/>
             <a:r>
-              <a:rPr lang="en-US" smtClean="0"/>
+              <a:rPr lang="en-US"/>
               <a:t>Third level</a:t>
             </a:r>
           </a:p>
           <a:p>
             <a:pPr lvl="3"/>
             <a:r>
-              <a:rPr lang="en-US" smtClean="0"/>
+              <a:rPr lang="en-US"/>
               <a:t>Fourth level</a:t>
             </a:r>
           </a:p>
           <a:p>
             <a:pPr lvl="4"/>
             <a:r>
-              <a:rPr lang="en-US" smtClean="0"/>
+              <a:rPr lang="en-US"/>
               <a:t>Fifth level</a:t>
             </a:r>
-            <a:endParaRPr lang="en-US"/>
           </a:p>
         </p:txBody>
       </p:sp>
@@ -458,7 +470,7 @@
           <a:p>
             <a:fld id="{5BCAD085-E8A6-8845-BD4E-CB4CCA059FC4}" type="datetimeFigureOut">
               <a:rPr lang="en-US" smtClean="0"/>
-              <a:t>1/27/13</a:t>
+              <a:t>10/16/2026</a:t>
             </a:fld>
             <a:endParaRPr lang="en-US"/>
           </a:p>
@@ -557,10 +569,9 @@
           <a:lstStyle/>
           <a:p>
             <a:r>
-              <a:rPr lang="en-US" smtClean="0"/>
+              <a:rPr lang="en-US"/>
               <a:t>Click to edit Master title style</a:t>
             </a:r>
-            <a:endParaRPr lang="en-US"/>
           </a:p>
         </p:txBody>
       </p:sp>
@@ -586,38 +597,37 @@
           <a:p>
             <a:pPr lvl="0"/>
             <a:r>
-              <a:rPr lang="en-US" smtClean="0"/>
+              <a:rPr lang="en-US"/>
               <a:t>Click to edit Master text styles</a:t>
             </a:r>
           </a:p>
           <a:p>
             <a:pPr lvl="1"/>
             <a:r>
-              <a:rPr lang="en-US" smtClean="0"/>
+              <a:rPr lang="en-US"/>
               <a:t>Second level</a:t>
             </a:r>
           </a:p>
           <a:p>
             <a:pPr lvl="2"/>
             <a:r>
-              <a:rPr lang="en-US" smtClean="0"/>
+              <a:rPr lang="en-US"/>
               <a:t>Third level</a:t>
             </a:r>
           </a:p>
           <a:p>
             <a:pPr lvl="3"/>
             <a:r>
-              <a:rPr lang="en-US" smtClean="0"/>
+              <a:rPr lang="en-US"/>
               <a:t>Fourth level</a:t>
             </a:r>
           </a:p>
           <a:p>
             <a:pPr lvl="4"/>
             <a:r>
-              <a:rPr lang="en-US" smtClean="0"/>
+              <a:rPr lang="en-US"/>
               <a:t>Fifth level</a:t>
             </a:r>
-            <a:endParaRPr lang="en-US"/>
           </a:p>
         </p:txBody>
       </p:sp>
@@ -638,7 +648,7 @@
           <a:p>
             <a:fld id="{5BCAD085-E8A6-8845-BD4E-CB4CCA059FC4}" type="datetimeFigureOut">
               <a:rPr lang="en-US" smtClean="0"/>
-              <a:t>1/27/13</a:t>
+              <a:t>10/16/2026</a:t>
             </a:fld>
             <a:endParaRPr lang="en-US"/>
           </a:p>
@@ -732,10 +742,9 @@
           <a:lstStyle/>
           <a:p>
             <a:r>
-              <a:rPr lang="en-US" smtClean="0"/>
+              <a:rPr lang="en-US"/>
               <a:t>Click to edit Master title style</a:t>
             </a:r>
-            <a:endParaRPr lang="en-US"/>
           </a:p>
         </p:txBody>
       </p:sp>
@@ -756,38 +765,37 @@
           <a:p>
             <a:pPr lvl="0"/>
             <a:r>
-              <a:rPr lang="en-US" smtClean="0"/>
+              <a:rPr lang="en-US"/>
               <a:t>Click to edit Master text styles</a:t>
             </a:r>
           </a:p>
           <a:p>
             <a:pPr lvl="1"/>
             <a:r>
-              <a:rPr lang="en-US" smtClean="0"/>
+              <a:rPr lang="en-US"/>
               <a:t>Second level</a:t>
             </a:r>
           </a:p>
           <a:p>
             <a:pPr lvl="2"/>
             <a:r>
-              <a:rPr lang="en-US" smtClean="0"/>
+              <a:rPr lang="en-US"/>
               <a:t>Third level</a:t>
             </a:r>
           </a:p>
           <a:p>
             <a:pPr lvl="3"/>
             <a:r>
-              <a:rPr lang="en-US" smtClean="0"/>
+              <a:rPr lang="en-US"/>
               <a:t>Fourth level</a:t>
             </a:r>
           </a:p>
           <a:p>
             <a:pPr lvl="4"/>
             <a:r>
-              <a:rPr lang="en-US" smtClean="0"/>
+              <a:rPr lang="en-US"/>
               <a:t>Fifth level</a:t>
             </a:r>
-            <a:endParaRPr lang="en-US"/>
           </a:p>
         </p:txBody>
       </p:sp>
@@ -808,7 +816,7 @@
           <a:p>
             <a:fld id="{5BCAD085-E8A6-8845-BD4E-CB4CCA059FC4}" type="datetimeFigureOut">
               <a:rPr lang="en-US" smtClean="0"/>
-              <a:t>1/27/13</a:t>
+              <a:t>10/16/2026</a:t>
             </a:fld>
             <a:endParaRPr lang="en-US"/>
           </a:p>
@@ -911,10 +919,9 @@
           </a:lstStyle>
           <a:p>
             <a:r>
-              <a:rPr lang="en-US" smtClean="0"/>
+              <a:rPr lang="en-US"/>
               <a:t>Click to edit Master title style</a:t>
             </a:r>
-            <a:endParaRPr lang="en-US"/>
           </a:p>
         </p:txBody>
       </p:sp>
@@ -1031,7 +1038,7 @@
           <a:p>
             <a:pPr lvl="0"/>
             <a:r>
-              <a:rPr lang="en-US" smtClean="0"/>
+              <a:rPr lang="en-US"/>
               <a:t>Click to edit Master text styles</a:t>
             </a:r>
           </a:p>
@@ -1054,7 +1061,7 @@
           <a:p>
             <a:fld id="{5BCAD085-E8A6-8845-BD4E-CB4CCA059FC4}" type="datetimeFigureOut">
               <a:rPr lang="en-US" smtClean="0"/>
-              <a:t>1/27/13</a:t>
+              <a:t>10/16/2026</a:t>
             </a:fld>
             <a:endParaRPr lang="en-US"/>
           </a:p>
@@ -1148,10 +1155,9 @@
           <a:lstStyle/>
           <a:p>
             <a:r>
-              <a:rPr lang="en-US" smtClean="0"/>
+              <a:rPr lang="en-US"/>
               <a:t>Click to edit Master title style</a:t>
             </a:r>
-            <a:endParaRPr lang="en-US"/>
           </a:p>
         </p:txBody>
       </p:sp>
@@ -1205,38 +1211,37 @@
           <a:p>
             <a:pPr lvl="0"/>
             <a:r>
-              <a:rPr lang="en-US" smtClean="0"/>
+              <a:rPr lang="en-US"/>
               <a:t>Click to edit Master text styles</a:t>
             </a:r>
           </a:p>
           <a:p>
             <a:pPr lvl="1"/>
             <a:r>
-              <a:rPr lang="en-US" smtClean="0"/>
+              <a:rPr lang="en-US"/>
               <a:t>Second level</a:t>
             </a:r>
           </a:p>
           <a:p>
             <a:pPr lvl="2"/>
             <a:r>
-              <a:rPr lang="en-US" smtClean="0"/>
+              <a:rPr lang="en-US"/>
               <a:t>Third level</a:t>
             </a:r>
           </a:p>
           <a:p>
             <a:pPr lvl="3"/>
             <a:r>
-              <a:rPr lang="en-US" smtClean="0"/>
+              <a:rPr lang="en-US"/>
               <a:t>Fourth level</a:t>
             </a:r>
           </a:p>
           <a:p>
             <a:pPr lvl="4"/>
             <a:r>
-              <a:rPr lang="en-US" smtClean="0"/>
+              <a:rPr lang="en-US"/>
               <a:t>Fifth level</a:t>
             </a:r>
-            <a:endParaRPr lang="en-US"/>
           </a:p>
         </p:txBody>
       </p:sp>
@@ -1290,38 +1295,37 @@
           <a:p>
             <a:pPr lvl="0"/>
             <a:r>
-              <a:rPr lang="en-US" smtClean="0"/>
+              <a:rPr lang="en-US"/>
               <a:t>Click to edit Master text styles</a:t>
             </a:r>
           </a:p>
           <a:p>
             <a:pPr lvl="1"/>
             <a:r>
-              <a:rPr lang="en-US" smtClean="0"/>
+              <a:rPr lang="en-US"/>
               <a:t>Second level</a:t>
             </a:r>
           </a:p>
           <a:p>
             <a:pPr lvl="2"/>
             <a:r>
-              <a:rPr lang="en-US" smtClean="0"/>
+              <a:rPr lang="en-US"/>
               <a:t>Third level</a:t>
             </a:r>
           </a:p>
           <a:p>
             <a:pPr lvl="3"/>
             <a:r>
-              <a:rPr lang="en-US" smtClean="0"/>
+              <a:rPr lang="en-US"/>
               <a:t>Fourth level</a:t>
             </a:r>
           </a:p>
           <a:p>
             <a:pPr lvl="4"/>
             <a:r>
-              <a:rPr lang="en-US" smtClean="0"/>
+              <a:rPr lang="en-US"/>
               <a:t>Fifth level</a:t>
             </a:r>
-            <a:endParaRPr lang="en-US"/>
           </a:p>
         </p:txBody>
       </p:sp>
@@ -1342,7 +1346,7 @@
           <a:p>
             <a:fld id="{5BCAD085-E8A6-8845-BD4E-CB4CCA059FC4}" type="datetimeFigureOut">
               <a:rPr lang="en-US" smtClean="0"/>
-              <a:t>1/27/13</a:t>
+              <a:t>10/16/2026</a:t>
             </a:fld>
             <a:endParaRPr lang="en-US"/>
           </a:p>
@@ -1440,10 +1444,9 @@
           </a:lstStyle>
           <a:p>
             <a:r>
-              <a:rPr lang="en-US" smtClean="0"/>
+              <a:rPr lang="en-US"/>
               <a:t>Click to edit Master title style</a:t>
             </a:r>
-            <a:endParaRPr lang="en-US"/>
           </a:p>
         </p:txBody>
       </p:sp>
@@ -1506,7 +1509,7 @@
           <a:p>
             <a:pPr lvl="0"/>
             <a:r>
-              <a:rPr lang="en-US" smtClean="0"/>
+              <a:rPr lang="en-US"/>
               <a:t>Click to edit Master text styles</a:t>
             </a:r>
           </a:p>
@@ -1562,38 +1565,37 @@
           <a:p>
             <a:pPr lvl="0"/>
             <a:r>
-              <a:rPr lang="en-US" smtClean="0"/>
+              <a:rPr lang="en-US"/>
               <a:t>Click to edit Master text styles</a:t>
             </a:r>
           </a:p>
           <a:p>
             <a:pPr lvl="1"/>
             <a:r>
-              <a:rPr lang="en-US" smtClean="0"/>
+              <a:rPr lang="en-US"/>
               <a:t>Second level</a:t>
             </a:r>
           </a:p>
           <a:p>
             <a:pPr lvl="2"/>
             <a:r>
-              <a:rPr lang="en-US" smtClean="0"/>
+              <a:rPr lang="en-US"/>
               <a:t>Third level</a:t>
             </a:r>
           </a:p>
           <a:p>
             <a:pPr lvl="3"/>
             <a:r>
-              <a:rPr lang="en-US" smtClean="0"/>
+              <a:rPr lang="en-US"/>
               <a:t>Fourth level</a:t>
             </a:r>
           </a:p>
           <a:p>
             <a:pPr lvl="4"/>
             <a:r>
-              <a:rPr lang="en-US" smtClean="0"/>
+              <a:rPr lang="en-US"/>
               <a:t>Fifth level</a:t>
             </a:r>
-            <a:endParaRPr lang="en-US"/>
           </a:p>
         </p:txBody>
       </p:sp>
@@ -1656,7 +1658,7 @@
           <a:p>
             <a:pPr lvl="0"/>
             <a:r>
-              <a:rPr lang="en-US" smtClean="0"/>
+              <a:rPr lang="en-US"/>
               <a:t>Click to edit Master text styles</a:t>
             </a:r>
           </a:p>
@@ -1712,38 +1714,37 @@
           <a:p>
             <a:pPr lvl="0"/>
             <a:r>
-              <a:rPr lang="en-US" smtClean="0"/>
+              <a:rPr lang="en-US"/>
               <a:t>Click to edit Master text styles</a:t>
             </a:r>
           </a:p>
           <a:p>
             <a:pPr lvl="1"/>
             <a:r>
-              <a:rPr lang="en-US" smtClean="0"/>
+              <a:rPr lang="en-US"/>
               <a:t>Second level</a:t>
             </a:r>
           </a:p>
           <a:p>
             <a:pPr lvl="2"/>
             <a:r>
-              <a:rPr lang="en-US" smtClean="0"/>
+              <a:rPr lang="en-US"/>
               <a:t>Third level</a:t>
             </a:r>
           </a:p>
           <a:p>
             <a:pPr lvl="3"/>
             <a:r>
-              <a:rPr lang="en-US" smtClean="0"/>
+              <a:rPr lang="en-US"/>
               <a:t>Fourth level</a:t>
             </a:r>
           </a:p>
           <a:p>
             <a:pPr lvl="4"/>
             <a:r>
-              <a:rPr lang="en-US" smtClean="0"/>
+              <a:rPr lang="en-US"/>
               <a:t>Fifth level</a:t>
             </a:r>
-            <a:endParaRPr lang="en-US"/>
           </a:p>
         </p:txBody>
       </p:sp>
@@ -1764,7 +1765,7 @@
           <a:p>
             <a:fld id="{5BCAD085-E8A6-8845-BD4E-CB4CCA059FC4}" type="datetimeFigureOut">
               <a:rPr lang="en-US" smtClean="0"/>
-              <a:t>1/27/13</a:t>
+              <a:t>10/16/2026</a:t>
             </a:fld>
             <a:endParaRPr lang="en-US"/>
           </a:p>
@@ -1858,10 +1859,9 @@
           <a:lstStyle/>
           <a:p>
             <a:r>
-              <a:rPr lang="en-US" smtClean="0"/>
+              <a:rPr lang="en-US"/>
               <a:t>Click to edit Master title style</a:t>
             </a:r>
-            <a:endParaRPr lang="en-US"/>
           </a:p>
         </p:txBody>
       </p:sp>
@@ -1882,7 +1882,7 @@
           <a:p>
             <a:fld id="{5BCAD085-E8A6-8845-BD4E-CB4CCA059FC4}" type="datetimeFigureOut">
               <a:rPr lang="en-US" smtClean="0"/>
-              <a:t>1/27/13</a:t>
+              <a:t>10/16/2026</a:t>
             </a:fld>
             <a:endParaRPr lang="en-US"/>
           </a:p>
@@ -1977,7 +1977,7 @@
           <a:p>
             <a:fld id="{5BCAD085-E8A6-8845-BD4E-CB4CCA059FC4}" type="datetimeFigureOut">
               <a:rPr lang="en-US" smtClean="0"/>
-              <a:t>1/27/13</a:t>
+              <a:t>10/16/2026</a:t>
             </a:fld>
             <a:endParaRPr lang="en-US"/>
           </a:p>
@@ -2080,10 +2080,9 @@
           </a:lstStyle>
           <a:p>
             <a:r>
-              <a:rPr lang="en-US" smtClean="0"/>
+              <a:rPr lang="en-US"/>
               <a:t>Click to edit Master title style</a:t>
             </a:r>
-            <a:endParaRPr lang="en-US"/>
           </a:p>
         </p:txBody>
       </p:sp>
@@ -2137,38 +2136,37 @@
           <a:p>
             <a:pPr lvl="0"/>
             <a:r>
-              <a:rPr lang="en-US" smtClean="0"/>
+              <a:rPr lang="en-US"/>
               <a:t>Click to edit Master text styles</a:t>
             </a:r>
           </a:p>
           <a:p>
             <a:pPr lvl="1"/>
             <a:r>
-              <a:rPr lang="en-US" smtClean="0"/>
+              <a:rPr lang="en-US"/>
               <a:t>Second level</a:t>
             </a:r>
           </a:p>
           <a:p>
             <a:pPr lvl="2"/>
             <a:r>
-              <a:rPr lang="en-US" smtClean="0"/>
+              <a:rPr lang="en-US"/>
               <a:t>Third level</a:t>
             </a:r>
           </a:p>
           <a:p>
             <a:pPr lvl="3"/>
             <a:r>
-              <a:rPr lang="en-US" smtClean="0"/>
+              <a:rPr lang="en-US"/>
               <a:t>Fourth level</a:t>
             </a:r>
           </a:p>
           <a:p>
             <a:pPr lvl="4"/>
             <a:r>
-              <a:rPr lang="en-US" smtClean="0"/>
+              <a:rPr lang="en-US"/>
               <a:t>Fifth level</a:t>
             </a:r>
-            <a:endParaRPr lang="en-US"/>
           </a:p>
         </p:txBody>
       </p:sp>
@@ -2231,7 +2229,7 @@
           <a:p>
             <a:pPr lvl="0"/>
             <a:r>
-              <a:rPr lang="en-US" smtClean="0"/>
+              <a:rPr lang="en-US"/>
               <a:t>Click to edit Master text styles</a:t>
             </a:r>
           </a:p>
@@ -2254,7 +2252,7 @@
           <a:p>
             <a:fld id="{5BCAD085-E8A6-8845-BD4E-CB4CCA059FC4}" type="datetimeFigureOut">
               <a:rPr lang="en-US" smtClean="0"/>
-              <a:t>1/27/13</a:t>
+              <a:t>10/16/2026</a:t>
             </a:fld>
             <a:endParaRPr lang="en-US"/>
           </a:p>
@@ -2357,10 +2355,9 @@
           </a:lstStyle>
           <a:p>
             <a:r>
-              <a:rPr lang="en-US" smtClean="0"/>
+              <a:rPr lang="en-US"/>
               <a:t>Click to edit Master title style</a:t>
             </a:r>
-            <a:endParaRPr lang="en-US"/>
           </a:p>
         </p:txBody>
       </p:sp>
@@ -2484,7 +2481,7 @@
           <a:p>
             <a:pPr lvl="0"/>
             <a:r>
-              <a:rPr lang="en-US" smtClean="0"/>
+              <a:rPr lang="en-US"/>
               <a:t>Click to edit Master text styles</a:t>
             </a:r>
           </a:p>
@@ -2507,7 +2504,7 @@
           <a:p>
             <a:fld id="{5BCAD085-E8A6-8845-BD4E-CB4CCA059FC4}" type="datetimeFigureOut">
               <a:rPr lang="en-US" smtClean="0"/>
-              <a:t>1/27/13</a:t>
+              <a:t>10/16/2026</a:t>
             </a:fld>
             <a:endParaRPr lang="en-US"/>
           </a:p>
@@ -2616,10 +2613,9 @@
           <a:lstStyle/>
           <a:p>
             <a:r>
-              <a:rPr lang="en-US" smtClean="0"/>
+              <a:rPr lang="en-US"/>
               <a:t>Click to edit Master title style</a:t>
             </a:r>
-            <a:endParaRPr lang="en-US"/>
           </a:p>
         </p:txBody>
       </p:sp>
@@ -2650,38 +2646,37 @@
           <a:p>
             <a:pPr lvl="0"/>
             <a:r>
-              <a:rPr lang="en-US" smtClean="0"/>
+              <a:rPr lang="en-US"/>
               <a:t>Click to edit Master text styles</a:t>
             </a:r>
           </a:p>
           <a:p>
             <a:pPr lvl="1"/>
             <a:r>
-              <a:rPr lang="en-US" smtClean="0"/>
+              <a:rPr lang="en-US"/>
               <a:t>Second level</a:t>
             </a:r>
           </a:p>
           <a:p>
             <a:pPr lvl="2"/>
             <a:r>
-              <a:rPr lang="en-US" smtClean="0"/>
+              <a:rPr lang="en-US"/>
               <a:t>Third level</a:t>
             </a:r>
           </a:p>
           <a:p>
             <a:pPr lvl="3"/>
             <a:r>
-              <a:rPr lang="en-US" smtClean="0"/>
+              <a:rPr lang="en-US"/>
               <a:t>Fourth level</a:t>
             </a:r>
           </a:p>
           <a:p>
             <a:pPr lvl="4"/>
             <a:r>
-              <a:rPr lang="en-US" smtClean="0"/>
+              <a:rPr lang="en-US"/>
               <a:t>Fifth level</a:t>
             </a:r>
-            <a:endParaRPr lang="en-US"/>
           </a:p>
         </p:txBody>
       </p:sp>
@@ -2720,7 +2715,7 @@
           <a:p>
             <a:fld id="{5BCAD085-E8A6-8845-BD4E-CB4CCA059FC4}" type="datetimeFigureOut">
               <a:rPr lang="en-US" smtClean="0"/>
-              <a:t>1/27/13</a:t>
+              <a:t>10/16/2026</a:t>
             </a:fld>
             <a:endParaRPr lang="en-US"/>
           </a:p>
@@ -3079,7 +3074,7 @@
 </file>
 
 <file path=ppt/slides/slide1.xml><?xml version="1.0" encoding="utf-8"?>
-<p:sld xmlns:a="http://schemas.openxmlformats.org/drawingml/2006/main" xmlns:p="http://schemas.openxmlformats.org/presentationml/2006/main" xmlns:r="http://schemas.openxmlformats.org/officeDocument/2006/relationships">
+<p:sld xmlns:a="http://schemas.openxmlformats.org/drawingml/2006/main" xmlns:r="http://schemas.openxmlformats.org/officeDocument/2006/relationships" xmlns:p="http://schemas.openxmlformats.org/presentationml/2006/main">
   <p:cSld>
     <p:spTree>
       <p:nvGrpSpPr>
@@ -3087,7 +3082,14 @@
         <p:cNvGrpSpPr/>
         <p:nvPr/>
       </p:nvGrpSpPr>
-      <p:grpSpPr/>
+      <p:grpSpPr>
+        <a:xfrm>
+          <a:off x="0" y="0"/>
+          <a:ext cx="0" cy="0"/>
+          <a:chOff x="0" y="0"/>
+          <a:chExt cx="0" cy="0"/>
+        </a:xfrm>
+      </p:grpSpPr>
       <p:sp>
         <p:nvSpPr>
           <p:cNvPr id="2" name="Rounded Rectangle 1"/>
@@ -3096,8 +3098,8 @@
         </p:nvSpPr>
         <p:spPr>
           <a:xfrm>
-            <a:off x="420927" y="418988"/>
-            <a:ext cx="29424707" cy="6652626"/>
+            <a:off x="422430" y="419007"/>
+            <a:ext cx="29425702" cy="4672163"/>
           </a:xfrm>
           <a:prstGeom prst="roundRect">
             <a:avLst>
@@ -3130,6 +3132,7 @@
           <a:lstStyle/>
           <a:p>
             <a:pPr algn="ctr"/>
+            <a:endParaRPr/>
           </a:p>
         </p:txBody>
       </p:sp>
@@ -3141,8 +3144,8 @@
         </p:nvSpPr>
         <p:spPr>
           <a:xfrm>
-            <a:off x="420927" y="12165831"/>
-            <a:ext cx="29424707" cy="7389129"/>
+            <a:off x="420927" y="10886343"/>
+            <a:ext cx="29424707" cy="7389130"/>
           </a:xfrm>
           <a:prstGeom prst="roundRect">
             <a:avLst>
@@ -3184,6 +3187,45 @@
           <a:lstStyle/>
           <a:p>
             <a:pPr algn="ctr"/>
+            <a:endParaRPr/>
+          </a:p>
+        </p:txBody>
+      </p:sp>
+      <p:sp>
+        <p:nvSpPr>
+          <p:cNvPr id="280" name="Top stripe method"/>
+          <p:cNvSpPr/>
+          <p:nvPr/>
+        </p:nvSpPr>
+        <p:spPr>
+          <a:xfrm>
+            <a:off x="431955" y="10896409"/>
+            <a:ext cx="29406652" cy="38100"/>
+          </a:xfrm>
+          <a:prstGeom prst="rect">
+            <a:avLst/>
+          </a:prstGeom>
+          <a:gradFill rotWithShape="1">
+            <a:gsLst>
+              <a:gs pos="0">
+                <a:srgbClr val="0F6070"/>
+              </a:gs>
+              <a:gs pos="100000">
+                <a:srgbClr val="57909B"/>
+              </a:gs>
+            </a:gsLst>
+            <a:lin ang="0" scaled="0"/>
+          </a:gradFill>
+          <a:ln>
+            <a:noFill/>
+          </a:ln>
+        </p:spPr>
+        <p:txBody>
+          <a:bodyPr rtlCol="0" anchor="ctr"/>
+          <a:lstStyle/>
+          <a:p>
+            <a:pPr algn="ctr"/>
+            <a:endParaRPr/>
           </a:p>
         </p:txBody>
       </p:sp>
@@ -3238,6 +3280,7 @@
           <a:lstStyle/>
           <a:p>
             <a:pPr algn="ctr"/>
+            <a:endParaRPr/>
           </a:p>
         </p:txBody>
       </p:sp>
@@ -3267,6 +3310,113 @@
           <a:lstStyle/>
           <a:p>
             <a:pPr algn="ctr"/>
+            <a:endParaRPr/>
+          </a:p>
+        </p:txBody>
+      </p:sp>
+      <p:sp>
+        <p:nvSpPr>
+          <p:cNvPr id="288" name="Rectangle right bar"/>
+          <p:cNvSpPr/>
+          <p:nvPr/>
+        </p:nvSpPr>
+        <p:spPr>
+          <a:xfrm>
+            <a:off x="29790981" y="37725488"/>
+            <a:ext cx="57150" cy="4651330"/>
+          </a:xfrm>
+          <a:prstGeom prst="rect">
+            <a:avLst/>
+          </a:prstGeom>
+          <a:solidFill>
+            <a:srgbClr val="0F6070"/>
+          </a:solidFill>
+          <a:ln>
+            <a:noFill/>
+          </a:ln>
+        </p:spPr>
+        <p:txBody>
+          <a:bodyPr rtlCol="0" anchor="ctr"/>
+          <a:lstStyle/>
+          <a:p>
+            <a:pPr algn="ctr"/>
+            <a:endParaRPr/>
+          </a:p>
+        </p:txBody>
+      </p:sp>
+      <p:sp>
+        <p:nvSpPr>
+          <p:cNvPr id="286" name="Bottom stripe takeaway"/>
+          <p:cNvSpPr/>
+          <p:nvPr/>
+        </p:nvSpPr>
+        <p:spPr>
+          <a:xfrm>
+            <a:off x="479580" y="42329193"/>
+            <a:ext cx="29311402" cy="38100"/>
+          </a:xfrm>
+          <a:prstGeom prst="rect">
+            <a:avLst/>
+          </a:prstGeom>
+          <a:gradFill rotWithShape="1">
+            <a:gsLst>
+              <a:gs pos="0">
+                <a:srgbClr val="0F6070"/>
+              </a:gs>
+              <a:gs pos="100000">
+                <a:srgbClr val="57909B"/>
+              </a:gs>
+            </a:gsLst>
+            <a:lin ang="0" scaled="0"/>
+          </a:gradFill>
+          <a:ln>
+            <a:noFill/>
+          </a:ln>
+        </p:spPr>
+        <p:txBody>
+          <a:bodyPr rtlCol="0" anchor="ctr"/>
+          <a:lstStyle/>
+          <a:p>
+            <a:pPr algn="ctr"/>
+            <a:endParaRPr/>
+          </a:p>
+        </p:txBody>
+      </p:sp>
+      <p:sp>
+        <p:nvSpPr>
+          <p:cNvPr id="287" name="Top stripe takeaway"/>
+          <p:cNvSpPr/>
+          <p:nvPr/>
+        </p:nvSpPr>
+        <p:spPr>
+          <a:xfrm>
+            <a:off x="479580" y="37735013"/>
+            <a:ext cx="29311402" cy="38100"/>
+          </a:xfrm>
+          <a:prstGeom prst="rect">
+            <a:avLst/>
+          </a:prstGeom>
+          <a:gradFill rotWithShape="1">
+            <a:gsLst>
+              <a:gs pos="0">
+                <a:srgbClr val="0F6070"/>
+              </a:gs>
+              <a:gs pos="100000">
+                <a:srgbClr val="57909B"/>
+              </a:gs>
+            </a:gsLst>
+            <a:lin ang="0" scaled="0"/>
+          </a:gradFill>
+          <a:ln>
+            <a:noFill/>
+          </a:ln>
+        </p:spPr>
+        <p:txBody>
+          <a:bodyPr rtlCol="0" anchor="ctr"/>
+          <a:lstStyle/>
+          <a:p>
+            <a:pPr algn="ctr"/>
+            <a:endParaRPr/>
           </a:p>
         </p:txBody>
       </p:sp>
@@ -3278,8 +3428,8 @@
         </p:nvSpPr>
         <p:spPr>
           <a:xfrm>
-            <a:off x="420927" y="7300153"/>
-            <a:ext cx="14559993" cy="4637139"/>
+            <a:off x="420927" y="5319394"/>
+            <a:ext cx="14559993" cy="5338410"/>
           </a:xfrm>
           <a:prstGeom prst="roundRect">
             <a:avLst>
@@ -3321,6 +3471,45 @@
           <a:lstStyle/>
           <a:p>
             <a:pPr algn="ctr"/>
+            <a:endParaRPr/>
+          </a:p>
+        </p:txBody>
+      </p:sp>
+      <p:sp>
+        <p:nvSpPr>
+          <p:cNvPr id="278" name="Top stripe problem"/>
+          <p:cNvSpPr/>
+          <p:nvPr/>
+        </p:nvSpPr>
+        <p:spPr>
+          <a:xfrm>
+            <a:off x="431955" y="5329244"/>
+            <a:ext cx="14541435" cy="38100"/>
+          </a:xfrm>
+          <a:prstGeom prst="rect">
+            <a:avLst/>
+          </a:prstGeom>
+          <a:gradFill rotWithShape="1">
+            <a:gsLst>
+              <a:gs pos="0">
+                <a:srgbClr val="0F6070"/>
+              </a:gs>
+              <a:gs pos="100000">
+                <a:srgbClr val="57909B"/>
+              </a:gs>
+            </a:gsLst>
+            <a:lin ang="0" scaled="0"/>
+          </a:gradFill>
+          <a:ln>
+            <a:noFill/>
+          </a:ln>
+        </p:spPr>
+        <p:txBody>
+          <a:bodyPr rtlCol="0" anchor="ctr"/>
+          <a:lstStyle/>
+          <a:p>
+            <a:pPr algn="ctr"/>
+            <a:endParaRPr/>
           </a:p>
         </p:txBody>
       </p:sp>
@@ -3332,8 +3521,8 @@
         </p:nvSpPr>
         <p:spPr>
           <a:xfrm>
-            <a:off x="15285642" y="7300153"/>
-            <a:ext cx="14559993" cy="4637139"/>
+            <a:off x="15285642" y="5319394"/>
+            <a:ext cx="14559993" cy="5338410"/>
           </a:xfrm>
           <a:prstGeom prst="roundRect">
             <a:avLst>
@@ -3375,6 +3564,45 @@
           <a:lstStyle/>
           <a:p>
             <a:pPr algn="ctr"/>
+            <a:endParaRPr/>
+          </a:p>
+        </p:txBody>
+      </p:sp>
+      <p:sp>
+        <p:nvSpPr>
+          <p:cNvPr id="279" name="Top stripe motivation"/>
+          <p:cNvSpPr/>
+          <p:nvPr/>
+        </p:nvSpPr>
+        <p:spPr>
+          <a:xfrm>
+            <a:off x="15297171" y="5329244"/>
+            <a:ext cx="14541436" cy="38100"/>
+          </a:xfrm>
+          <a:prstGeom prst="rect">
+            <a:avLst/>
+          </a:prstGeom>
+          <a:gradFill rotWithShape="1">
+            <a:gsLst>
+              <a:gs pos="0">
+                <a:srgbClr val="0F6070"/>
+              </a:gs>
+              <a:gs pos="100000">
+                <a:srgbClr val="57909B"/>
+              </a:gs>
+            </a:gsLst>
+            <a:lin ang="0" scaled="0"/>
+          </a:gradFill>
+          <a:ln>
+            <a:noFill/>
+          </a:ln>
+        </p:spPr>
+        <p:txBody>
+          <a:bodyPr rtlCol="0" anchor="ctr"/>
+          <a:lstStyle/>
+          <a:p>
+            <a:pPr algn="ctr"/>
+            <a:endParaRPr/>
           </a:p>
         </p:txBody>
       </p:sp>
@@ -3386,7 +3614,7 @@
         </p:nvSpPr>
         <p:spPr>
           <a:xfrm>
-            <a:off x="709729" y="12302270"/>
+            <a:off x="709729" y="11022782"/>
             <a:ext cx="2011640" cy="7116251"/>
           </a:xfrm>
           <a:prstGeom prst="roundRect">
@@ -3420,6 +3648,7 @@
           <a:lstStyle/>
           <a:p>
             <a:pPr algn="ctr"/>
+            <a:endParaRPr/>
           </a:p>
         </p:txBody>
       </p:sp>
@@ -3431,8 +3660,8 @@
         </p:nvSpPr>
         <p:spPr>
           <a:xfrm>
-            <a:off x="420927" y="19783499"/>
-            <a:ext cx="12349271" cy="9865266"/>
+            <a:off x="420927" y="18504010"/>
+            <a:ext cx="12349271" cy="10724858"/>
           </a:xfrm>
           <a:prstGeom prst="roundRect">
             <a:avLst>
@@ -3474,6 +3703,45 @@
           <a:lstStyle/>
           <a:p>
             <a:pPr algn="ctr"/>
+            <a:endParaRPr/>
+          </a:p>
+        </p:txBody>
+      </p:sp>
+      <p:sp>
+        <p:nvSpPr>
+          <p:cNvPr id="281" name="Top stripe key-result"/>
+          <p:cNvSpPr/>
+          <p:nvPr/>
+        </p:nvSpPr>
+        <p:spPr>
+          <a:xfrm>
+            <a:off x="431955" y="18514416"/>
+            <a:ext cx="12330638" cy="38100"/>
+          </a:xfrm>
+          <a:prstGeom prst="rect">
+            <a:avLst/>
+          </a:prstGeom>
+          <a:gradFill rotWithShape="1">
+            <a:gsLst>
+              <a:gs pos="0">
+                <a:srgbClr val="0F6070"/>
+              </a:gs>
+              <a:gs pos="100000">
+                <a:srgbClr val="57909B"/>
+              </a:gs>
+            </a:gsLst>
+            <a:lin ang="0" scaled="0"/>
+          </a:gradFill>
+          <a:ln>
+            <a:noFill/>
+          </a:ln>
+        </p:spPr>
+        <p:txBody>
+          <a:bodyPr rtlCol="0" anchor="ctr"/>
+          <a:lstStyle/>
+          <a:p>
+            <a:pPr algn="ctr"/>
+            <a:endParaRPr/>
           </a:p>
         </p:txBody>
       </p:sp>
@@ -3485,8 +3753,8 @@
         </p:nvSpPr>
         <p:spPr>
           <a:xfrm>
-            <a:off x="13074920" y="19783499"/>
-            <a:ext cx="8232998" cy="9865266"/>
+            <a:off x="13074920" y="18504010"/>
+            <a:ext cx="8232998" cy="10724858"/>
           </a:xfrm>
           <a:prstGeom prst="roundRect">
             <a:avLst>
@@ -3528,6 +3796,45 @@
           <a:lstStyle/>
           <a:p>
             <a:pPr algn="ctr"/>
+            <a:endParaRPr/>
+          </a:p>
+        </p:txBody>
+      </p:sp>
+      <p:sp>
+        <p:nvSpPr>
+          <p:cNvPr id="282" name="Top stripe ablation-study"/>
+          <p:cNvSpPr/>
+          <p:nvPr/>
+        </p:nvSpPr>
+        <p:spPr>
+          <a:xfrm>
+            <a:off x="13086376" y="18514416"/>
+            <a:ext cx="8214224" cy="38100"/>
+          </a:xfrm>
+          <a:prstGeom prst="rect">
+            <a:avLst/>
+          </a:prstGeom>
+          <a:gradFill rotWithShape="1">
+            <a:gsLst>
+              <a:gs pos="0">
+                <a:srgbClr val="0F6070"/>
+              </a:gs>
+              <a:gs pos="100000">
+                <a:srgbClr val="57909B"/>
+              </a:gs>
+            </a:gsLst>
+            <a:lin ang="0" scaled="0"/>
+          </a:gradFill>
+          <a:ln>
+            <a:noFill/>
+          </a:ln>
+        </p:spPr>
+        <p:txBody>
+          <a:bodyPr rtlCol="0" anchor="ctr"/>
+          <a:lstStyle/>
+          <a:p>
+            <a:pPr algn="ctr"/>
+            <a:endParaRPr/>
           </a:p>
         </p:txBody>
       </p:sp>
@@ -3539,8 +3846,8 @@
         </p:nvSpPr>
         <p:spPr>
           <a:xfrm>
-            <a:off x="21612638" y="19783499"/>
-            <a:ext cx="8232997" cy="9865266"/>
+            <a:off x="21612638" y="18504010"/>
+            <a:ext cx="8232997" cy="10724858"/>
           </a:xfrm>
           <a:prstGeom prst="roundRect">
             <a:avLst>
@@ -3582,6 +3889,45 @@
           <a:lstStyle/>
           <a:p>
             <a:pPr algn="ctr"/>
+            <a:endParaRPr/>
+          </a:p>
+        </p:txBody>
+      </p:sp>
+      <p:sp>
+        <p:nvSpPr>
+          <p:cNvPr id="283" name="Top stripe headline-numbers"/>
+          <p:cNvSpPr/>
+          <p:nvPr/>
+        </p:nvSpPr>
+        <p:spPr>
+          <a:xfrm>
+            <a:off x="21624382" y="18514416"/>
+            <a:ext cx="8214224" cy="38100"/>
+          </a:xfrm>
+          <a:prstGeom prst="rect">
+            <a:avLst/>
+          </a:prstGeom>
+          <a:gradFill rotWithShape="1">
+            <a:gsLst>
+              <a:gs pos="0">
+                <a:srgbClr val="0F6070"/>
+              </a:gs>
+              <a:gs pos="100000">
+                <a:srgbClr val="57909B"/>
+              </a:gs>
+            </a:gsLst>
+            <a:lin ang="0" scaled="0"/>
+          </a:gradFill>
+          <a:ln>
+            <a:noFill/>
+          </a:ln>
+        </p:spPr>
+        <p:txBody>
+          <a:bodyPr rtlCol="0" anchor="ctr"/>
+          <a:lstStyle/>
+          <a:p>
+            <a:pPr algn="ctr"/>
+            <a:endParaRPr/>
           </a:p>
         </p:txBody>
       </p:sp>
@@ -3593,8 +3939,8 @@
         </p:nvSpPr>
         <p:spPr>
           <a:xfrm>
-            <a:off x="420927" y="29877303"/>
-            <a:ext cx="14559993" cy="7617966"/>
+            <a:off x="420927" y="29457405"/>
+            <a:ext cx="14559993" cy="8037864"/>
           </a:xfrm>
           <a:prstGeom prst="roundRect">
             <a:avLst>
@@ -3636,6 +3982,45 @@
           <a:lstStyle/>
           <a:p>
             <a:pPr algn="ctr"/>
+            <a:endParaRPr/>
+          </a:p>
+        </p:txBody>
+      </p:sp>
+      <p:sp>
+        <p:nvSpPr>
+          <p:cNvPr id="284" name="Top stripe what-the-policy-does"/>
+          <p:cNvSpPr/>
+          <p:nvPr/>
+        </p:nvSpPr>
+        <p:spPr>
+          <a:xfrm>
+            <a:off x="431955" y="29468259"/>
+            <a:ext cx="14541435" cy="38100"/>
+          </a:xfrm>
+          <a:prstGeom prst="rect">
+            <a:avLst/>
+          </a:prstGeom>
+          <a:gradFill rotWithShape="1">
+            <a:gsLst>
+              <a:gs pos="0">
+                <a:srgbClr val="0F6070"/>
+              </a:gs>
+              <a:gs pos="100000">
+                <a:srgbClr val="57909B"/>
+              </a:gs>
+            </a:gsLst>
+            <a:lin ang="0" scaled="0"/>
+          </a:gradFill>
+          <a:ln>
+            <a:noFill/>
+          </a:ln>
+        </p:spPr>
+        <p:txBody>
+          <a:bodyPr rtlCol="0" anchor="ctr"/>
+          <a:lstStyle/>
+          <a:p>
+            <a:pPr algn="ctr"/>
+            <a:endParaRPr/>
           </a:p>
         </p:txBody>
       </p:sp>
@@ -3647,8 +4032,8 @@
         </p:nvSpPr>
         <p:spPr>
           <a:xfrm>
-            <a:off x="15285642" y="29877303"/>
-            <a:ext cx="14559993" cy="7617966"/>
+            <a:off x="15285642" y="29457405"/>
+            <a:ext cx="14559993" cy="8037864"/>
           </a:xfrm>
           <a:prstGeom prst="roundRect">
             <a:avLst>
@@ -3690,6 +4075,45 @@
           <a:lstStyle/>
           <a:p>
             <a:pPr algn="ctr"/>
+            <a:endParaRPr/>
+          </a:p>
+        </p:txBody>
+      </p:sp>
+      <p:sp>
+        <p:nvSpPr>
+          <p:cNvPr id="285" name="Top stripe risk-information-vs-adaptivity"/>
+          <p:cNvSpPr/>
+          <p:nvPr/>
+        </p:nvSpPr>
+        <p:spPr>
+          <a:xfrm>
+            <a:off x="15297171" y="29468259"/>
+            <a:ext cx="14541436" cy="38100"/>
+          </a:xfrm>
+          <a:prstGeom prst="rect">
+            <a:avLst/>
+          </a:prstGeom>
+          <a:gradFill rotWithShape="1">
+            <a:gsLst>
+              <a:gs pos="0">
+                <a:srgbClr val="0F6070"/>
+              </a:gs>
+              <a:gs pos="100000">
+                <a:srgbClr val="57909B"/>
+              </a:gs>
+            </a:gsLst>
+            <a:lin ang="0" scaled="0"/>
+          </a:gradFill>
+          <a:ln>
+            <a:noFill/>
+          </a:ln>
+        </p:spPr>
+        <p:txBody>
+          <a:bodyPr rtlCol="0" anchor="ctr"/>
+          <a:lstStyle/>
+          <a:p>
+            <a:pPr algn="ctr"/>
+            <a:endParaRPr/>
           </a:p>
         </p:txBody>
       </p:sp>
@@ -3702,7 +4126,7 @@
         <p:spPr>
           <a:xfrm>
             <a:off x="757341" y="38012606"/>
-            <a:ext cx="28799495" cy="1047472"/>
+            <a:ext cx="28751882" cy="1047472"/>
           </a:xfrm>
           <a:prstGeom prst="rect">
             <a:avLst/>
@@ -3731,6 +4155,7 @@
           <a:lstStyle/>
           <a:p>
             <a:pPr algn="ctr"/>
+            <a:endParaRPr/>
           </a:p>
         </p:txBody>
       </p:sp>
@@ -3743,7 +4168,7 @@
         <p:spPr>
           <a:xfrm>
             <a:off x="757341" y="39041024"/>
-            <a:ext cx="28799495" cy="19054"/>
+            <a:ext cx="28751882" cy="19054"/>
           </a:xfrm>
           <a:prstGeom prst="rect">
             <a:avLst/>
@@ -3760,6 +4185,7 @@
           <a:lstStyle/>
           <a:p>
             <a:pPr algn="ctr"/>
+            <a:endParaRPr/>
           </a:p>
         </p:txBody>
       </p:sp>
@@ -3772,7 +4198,7 @@
         <p:spPr>
           <a:xfrm>
             <a:off x="757341" y="39402885"/>
-            <a:ext cx="28799495" cy="1137040"/>
+            <a:ext cx="28751882" cy="1137040"/>
           </a:xfrm>
           <a:prstGeom prst="roundRect">
             <a:avLst>
@@ -3805,6 +4231,7 @@
           <a:lstStyle/>
           <a:p>
             <a:pPr algn="ctr"/>
+            <a:endParaRPr/>
           </a:p>
         </p:txBody>
       </p:sp>
@@ -3840,7 +4267,7 @@
         </p:nvSpPr>
         <p:spPr>
           <a:xfrm>
-            <a:off x="709729" y="7588951"/>
+            <a:off x="709729" y="5608192"/>
             <a:ext cx="13982390" cy="1047470"/>
           </a:xfrm>
           <a:prstGeom prst="rect">
@@ -3870,6 +4297,7 @@
           <a:lstStyle/>
           <a:p>
             <a:pPr algn="ctr"/>
+            <a:endParaRPr/>
           </a:p>
         </p:txBody>
       </p:sp>
@@ -3881,8 +4309,8 @@
         </p:nvSpPr>
         <p:spPr>
           <a:xfrm>
-            <a:off x="709729" y="8617368"/>
-            <a:ext cx="13982390" cy="19053"/>
+            <a:off x="709729" y="6636609"/>
+            <a:ext cx="13982390" cy="19052"/>
           </a:xfrm>
           <a:prstGeom prst="rect">
             <a:avLst/>
@@ -3899,6 +4327,7 @@
           <a:lstStyle/>
           <a:p>
             <a:pPr algn="ctr"/>
+            <a:endParaRPr/>
           </a:p>
         </p:txBody>
       </p:sp>
@@ -3910,7 +4339,7 @@
         </p:nvSpPr>
         <p:spPr>
           <a:xfrm>
-            <a:off x="15574443" y="7588951"/>
+            <a:off x="15574443" y="5608192"/>
             <a:ext cx="13982392" cy="1047470"/>
           </a:xfrm>
           <a:prstGeom prst="rect">
@@ -3940,6 +4369,7 @@
           <a:lstStyle/>
           <a:p>
             <a:pPr algn="ctr"/>
+            <a:endParaRPr/>
           </a:p>
         </p:txBody>
       </p:sp>
@@ -3951,7 +4381,7 @@
         </p:nvSpPr>
         <p:spPr>
           <a:xfrm>
-            <a:off x="15574443" y="8617368"/>
+            <a:off x="15574443" y="6636609"/>
             <a:ext cx="13982392" cy="19053"/>
           </a:xfrm>
           <a:prstGeom prst="rect">
@@ -3969,6 +4399,7 @@
           <a:lstStyle/>
           <a:p>
             <a:pPr algn="ctr"/>
+            <a:endParaRPr/>
           </a:p>
         </p:txBody>
       </p:sp>
@@ -3980,8 +4411,8 @@
         </p:nvSpPr>
         <p:spPr>
           <a:xfrm>
-            <a:off x="709729" y="8979230"/>
-            <a:ext cx="13982390" cy="1151325"/>
+            <a:off x="709729" y="6998471"/>
+            <a:ext cx="13982390" cy="1151324"/>
           </a:xfrm>
           <a:prstGeom prst="rect">
             <a:avLst/>
@@ -4010,6 +4441,7 @@
           <a:lstStyle/>
           <a:p>
             <a:pPr algn="ctr"/>
+            <a:endParaRPr/>
           </a:p>
         </p:txBody>
       </p:sp>
@@ -4021,8 +4453,8 @@
         </p:nvSpPr>
         <p:spPr>
           <a:xfrm>
-            <a:off x="709729" y="8979230"/>
-            <a:ext cx="85741" cy="1151325"/>
+            <a:off x="709729" y="6998471"/>
+            <a:ext cx="85741" cy="1151324"/>
           </a:xfrm>
           <a:prstGeom prst="rect">
             <a:avLst/>
@@ -4039,6 +4471,7 @@
           <a:lstStyle/>
           <a:p>
             <a:pPr algn="ctr"/>
+            <a:endParaRPr/>
           </a:p>
         </p:txBody>
       </p:sp>
@@ -4050,8 +4483,8 @@
         </p:nvSpPr>
         <p:spPr>
           <a:xfrm>
-            <a:off x="709729" y="20072297"/>
-            <a:ext cx="11771669" cy="1047470"/>
+            <a:off x="709729" y="18792809"/>
+            <a:ext cx="11771669" cy="1047469"/>
           </a:xfrm>
           <a:prstGeom prst="rect">
             <a:avLst/>
@@ -4080,6 +4513,7 @@
           <a:lstStyle/>
           <a:p>
             <a:pPr algn="ctr"/>
+            <a:endParaRPr/>
           </a:p>
         </p:txBody>
       </p:sp>
@@ -4091,7 +4525,7 @@
         </p:nvSpPr>
         <p:spPr>
           <a:xfrm>
-            <a:off x="709729" y="21100713"/>
+            <a:off x="709729" y="19821224"/>
             <a:ext cx="11771669" cy="19054"/>
           </a:xfrm>
           <a:prstGeom prst="rect">
@@ -4109,6 +4543,7 @@
           <a:lstStyle/>
           <a:p>
             <a:pPr algn="ctr"/>
+            <a:endParaRPr/>
           </a:p>
         </p:txBody>
       </p:sp>
@@ -4120,8 +4555,8 @@
         </p:nvSpPr>
         <p:spPr>
           <a:xfrm>
-            <a:off x="13363722" y="20072297"/>
-            <a:ext cx="7655394" cy="1047470"/>
+            <a:off x="13363722" y="18792809"/>
+            <a:ext cx="7655394" cy="1047469"/>
           </a:xfrm>
           <a:prstGeom prst="rect">
             <a:avLst/>
@@ -4150,6 +4585,7 @@
           <a:lstStyle/>
           <a:p>
             <a:pPr algn="ctr"/>
+            <a:endParaRPr/>
           </a:p>
         </p:txBody>
       </p:sp>
@@ -4161,7 +4597,7 @@
         </p:nvSpPr>
         <p:spPr>
           <a:xfrm>
-            <a:off x="13363722" y="21100713"/>
+            <a:off x="13363722" y="19821224"/>
             <a:ext cx="7655394" cy="19054"/>
           </a:xfrm>
           <a:prstGeom prst="rect">
@@ -4179,6 +4615,7 @@
           <a:lstStyle/>
           <a:p>
             <a:pPr algn="ctr"/>
+            <a:endParaRPr/>
           </a:p>
         </p:txBody>
       </p:sp>
@@ -4190,8 +4627,8 @@
         </p:nvSpPr>
         <p:spPr>
           <a:xfrm>
-            <a:off x="21901440" y="20072297"/>
-            <a:ext cx="7655395" cy="1047470"/>
+            <a:off x="21901440" y="18792809"/>
+            <a:ext cx="7655395" cy="1047469"/>
           </a:xfrm>
           <a:prstGeom prst="rect">
             <a:avLst/>
@@ -4220,6 +4657,7 @@
           <a:lstStyle/>
           <a:p>
             <a:pPr algn="ctr"/>
+            <a:endParaRPr/>
           </a:p>
         </p:txBody>
       </p:sp>
@@ -4231,8 +4669,8 @@
         </p:nvSpPr>
         <p:spPr>
           <a:xfrm>
-            <a:off x="21901440" y="21100713"/>
-            <a:ext cx="7655395" cy="19054"/>
+            <a:off x="21901440" y="19821225"/>
+            <a:ext cx="7655395" cy="19053"/>
           </a:xfrm>
           <a:prstGeom prst="rect">
             <a:avLst/>
@@ -4249,6 +4687,7 @@
           <a:lstStyle/>
           <a:p>
             <a:pPr algn="ctr"/>
+            <a:endParaRPr/>
           </a:p>
         </p:txBody>
       </p:sp>
@@ -4260,7 +4699,7 @@
         </p:nvSpPr>
         <p:spPr>
           <a:xfrm>
-            <a:off x="21901440" y="21462576"/>
+            <a:off x="21901440" y="20183087"/>
             <a:ext cx="7655395" cy="7835494"/>
           </a:xfrm>
           <a:prstGeom prst="roundRect">
@@ -4268,7 +4707,7 @@
               <a:gd name="adj" fmla="val 995"/>
             </a:avLst>
           </a:prstGeom>
-          <a:gradFill rotWithShape="1" flip="none">
+          <a:gradFill flip="none" rotWithShape="1">
             <a:gsLst>
               <a:gs pos="0">
                 <a:srgbClr val="E2ECEE"/>
@@ -4311,6 +4750,7 @@
           <a:lstStyle/>
           <a:p>
             <a:pPr algn="ctr"/>
+            <a:endParaRPr/>
           </a:p>
         </p:txBody>
       </p:sp>
@@ -4322,7 +4762,7 @@
         </p:nvSpPr>
         <p:spPr>
           <a:xfrm>
-            <a:off x="709729" y="30166102"/>
+            <a:off x="709729" y="29746202"/>
             <a:ext cx="13982390" cy="1047469"/>
           </a:xfrm>
           <a:prstGeom prst="rect">
@@ -4352,6 +4792,7 @@
           <a:lstStyle/>
           <a:p>
             <a:pPr algn="ctr"/>
+            <a:endParaRPr/>
           </a:p>
         </p:txBody>
       </p:sp>
@@ -4363,7 +4804,7 @@
         </p:nvSpPr>
         <p:spPr>
           <a:xfrm>
-            <a:off x="709729" y="31194518"/>
+            <a:off x="709729" y="30774618"/>
             <a:ext cx="13982390" cy="19053"/>
           </a:xfrm>
           <a:prstGeom prst="rect">
@@ -4381,6 +4822,7 @@
           <a:lstStyle/>
           <a:p>
             <a:pPr algn="ctr"/>
+            <a:endParaRPr/>
           </a:p>
         </p:txBody>
       </p:sp>
@@ -4392,7 +4834,7 @@
         </p:nvSpPr>
         <p:spPr>
           <a:xfrm>
-            <a:off x="15574443" y="30166102"/>
+            <a:off x="15574443" y="29746202"/>
             <a:ext cx="13982392" cy="1047469"/>
           </a:xfrm>
           <a:prstGeom prst="rect">
@@ -4422,6 +4864,7 @@
           <a:lstStyle/>
           <a:p>
             <a:pPr algn="ctr"/>
+            <a:endParaRPr/>
           </a:p>
         </p:txBody>
       </p:sp>
@@ -4433,7 +4876,7 @@
         </p:nvSpPr>
         <p:spPr>
           <a:xfrm>
-            <a:off x="15574443" y="31194518"/>
+            <a:off x="15574443" y="30774618"/>
             <a:ext cx="13982392" cy="19053"/>
           </a:xfrm>
           <a:prstGeom prst="rect">
@@ -4451,6 +4894,7 @@
           <a:lstStyle/>
           <a:p>
             <a:pPr algn="ctr"/>
+            <a:endParaRPr/>
           </a:p>
         </p:txBody>
       </p:sp>
@@ -4462,7 +4906,7 @@
         </p:nvSpPr>
         <p:spPr>
           <a:xfrm>
-            <a:off x="709729" y="36076422"/>
+            <a:off x="709729" y="35656522"/>
             <a:ext cx="13982390" cy="1072318"/>
           </a:xfrm>
           <a:prstGeom prst="rect">
@@ -4492,6 +4936,7 @@
           <a:lstStyle/>
           <a:p>
             <a:pPr algn="ctr"/>
+            <a:endParaRPr/>
           </a:p>
         </p:txBody>
       </p:sp>
@@ -4503,7 +4948,7 @@
         </p:nvSpPr>
         <p:spPr>
           <a:xfrm>
-            <a:off x="709729" y="36076422"/>
+            <a:off x="709729" y="35656522"/>
             <a:ext cx="13982390" cy="12384"/>
           </a:xfrm>
           <a:prstGeom prst="rect">
@@ -4521,6 +4966,7 @@
           <a:lstStyle/>
           <a:p>
             <a:pPr algn="ctr"/>
+            <a:endParaRPr/>
           </a:p>
         </p:txBody>
       </p:sp>
@@ -4532,8 +4978,8 @@
         </p:nvSpPr>
         <p:spPr>
           <a:xfrm>
-            <a:off x="15964273" y="4960307"/>
-            <a:ext cx="1421987" cy="1421970"/>
+            <a:off x="4291601" y="2979548"/>
+            <a:ext cx="1421988" cy="1421970"/>
           </a:xfrm>
           <a:prstGeom prst="roundRect">
             <a:avLst>
@@ -4568,6 +5014,7 @@
           <a:lstStyle/>
           <a:p>
             <a:pPr algn="ctr"/>
+            <a:endParaRPr/>
           </a:p>
         </p:txBody>
       </p:sp>
@@ -4587,8 +5034,8 @@
         </p:blipFill>
         <p:spPr>
           <a:xfrm>
-            <a:off x="16078595" y="5074627"/>
-            <a:ext cx="1193343" cy="1193330"/>
+            <a:off x="4405923" y="3093868"/>
+            <a:ext cx="1193344" cy="1193330"/>
           </a:xfrm>
           <a:prstGeom prst="rect">
             <a:avLst/>
@@ -4603,7 +5050,7 @@
         </p:nvSpPr>
         <p:spPr>
           <a:xfrm>
-            <a:off x="3076828" y="12302270"/>
+            <a:off x="3076828" y="11022782"/>
             <a:ext cx="16107855" cy="6711398"/>
           </a:xfrm>
           <a:prstGeom prst="roundRect">
@@ -4639,6 +5086,7 @@
           <a:lstStyle/>
           <a:p>
             <a:pPr algn="ctr"/>
+            <a:endParaRPr/>
           </a:p>
         </p:txBody>
       </p:sp>
@@ -4658,7 +5106,7 @@
         </p:blipFill>
         <p:spPr>
           <a:xfrm>
-            <a:off x="3076991" y="12302270"/>
+            <a:off x="3076991" y="11022782"/>
             <a:ext cx="16107530" cy="6711398"/>
           </a:xfrm>
           <a:prstGeom prst="rect">
@@ -4674,7 +5122,7 @@
         </p:nvSpPr>
         <p:spPr>
           <a:xfrm>
-            <a:off x="13363722" y="21640230"/>
+            <a:off x="13363722" y="20360741"/>
             <a:ext cx="7655394" cy="3062065"/>
           </a:xfrm>
           <a:prstGeom prst="roundRect">
@@ -4710,6 +5158,7 @@
           <a:lstStyle/>
           <a:p>
             <a:pPr algn="ctr"/>
+            <a:endParaRPr/>
           </a:p>
         </p:txBody>
       </p:sp>
@@ -4729,7 +5178,7 @@
         </p:blipFill>
         <p:spPr>
           <a:xfrm>
-            <a:off x="13363796" y="21640230"/>
+            <a:off x="13363796" y="20360741"/>
             <a:ext cx="7655246" cy="3062065"/>
           </a:xfrm>
           <a:prstGeom prst="rect">
@@ -4745,8 +5194,8 @@
         </p:nvSpPr>
         <p:spPr>
           <a:xfrm>
-            <a:off x="911488" y="24106100"/>
-            <a:ext cx="11368150" cy="4753789"/>
+            <a:off x="709722" y="22826611"/>
+            <a:ext cx="11771681" cy="4922523"/>
           </a:xfrm>
           <a:prstGeom prst="roundRect">
             <a:avLst>
@@ -4781,6 +5230,7 @@
           <a:lstStyle/>
           <a:p>
             <a:pPr algn="ctr"/>
+            <a:endParaRPr/>
           </a:p>
         </p:txBody>
       </p:sp>
@@ -4800,8 +5250,8 @@
         </p:blipFill>
         <p:spPr>
           <a:xfrm>
-            <a:off x="911624" y="24106100"/>
-            <a:ext cx="11367878" cy="4753789"/>
+            <a:off x="709858" y="22826611"/>
+            <a:ext cx="11771409" cy="4922523"/>
           </a:xfrm>
           <a:prstGeom prst="rect">
             <a:avLst/>
@@ -4816,8 +5266,8 @@
         </p:nvSpPr>
         <p:spPr>
           <a:xfrm>
-            <a:off x="22164799" y="24552017"/>
-            <a:ext cx="7128677" cy="4558878"/>
+            <a:off x="22164799" y="23272530"/>
+            <a:ext cx="7128677" cy="4558876"/>
           </a:xfrm>
           <a:prstGeom prst="rect">
             <a:avLst/>
@@ -4846,6 +5296,7 @@
           <a:lstStyle/>
           <a:p>
             <a:pPr algn="ctr"/>
+            <a:endParaRPr/>
           </a:p>
         </p:txBody>
       </p:sp>
@@ -4857,8 +5308,8 @@
         </p:nvSpPr>
         <p:spPr>
           <a:xfrm>
-            <a:off x="22164799" y="24552017"/>
-            <a:ext cx="7128677" cy="12385"/>
+            <a:off x="22164799" y="23272530"/>
+            <a:ext cx="7128677" cy="12383"/>
           </a:xfrm>
           <a:prstGeom prst="rect">
             <a:avLst/>
@@ -4875,6 +5326,7 @@
           <a:lstStyle/>
           <a:p>
             <a:pPr algn="ctr"/>
+            <a:endParaRPr/>
           </a:p>
         </p:txBody>
       </p:sp>
@@ -4886,8 +5338,8 @@
         </p:nvSpPr>
         <p:spPr>
           <a:xfrm>
-            <a:off x="709729" y="22755546"/>
-            <a:ext cx="11771669" cy="389381"/>
+            <a:off x="709729" y="21476059"/>
+            <a:ext cx="11771669" cy="389379"/>
           </a:xfrm>
           <a:prstGeom prst="rect">
             <a:avLst/>
@@ -4918,6 +5370,7 @@
           <a:lstStyle/>
           <a:p>
             <a:pPr algn="ctr"/>
+            <a:endParaRPr/>
           </a:p>
         </p:txBody>
       </p:sp>
@@ -4929,8 +5382,8 @@
         </p:nvSpPr>
         <p:spPr>
           <a:xfrm>
-            <a:off x="15574443" y="34272811"/>
-            <a:ext cx="13982392" cy="546647"/>
+            <a:off x="15574443" y="33852911"/>
+            <a:ext cx="13982392" cy="546649"/>
           </a:xfrm>
           <a:prstGeom prst="rect">
             <a:avLst/>
@@ -4961,6 +5414,7 @@
           <a:lstStyle/>
           <a:p>
             <a:pPr algn="ctr"/>
+            <a:endParaRPr/>
           </a:p>
         </p:txBody>
       </p:sp>
@@ -4972,7 +5426,7 @@
         </p:nvSpPr>
         <p:spPr>
           <a:xfrm>
-            <a:off x="19489406" y="12302270"/>
+            <a:off x="19489406" y="11022782"/>
             <a:ext cx="480062" cy="480055"/>
           </a:xfrm>
           <a:prstGeom prst="roundRect">
@@ -5002,7 +5456,7 @@
           </a:fontRef>
         </p:style>
         <p:txBody>
-          <a:bodyPr rtlCol="0" anchor="ctr" lIns="0" rIns="0" tIns="0" bIns="0" wrap="none"/>
+          <a:bodyPr wrap="none" lIns="0" tIns="0" rIns="0" bIns="0" rtlCol="0" anchor="ctr"/>
           <a:lstStyle/>
           <a:p>
             <a:pPr algn="ctr"/>
@@ -5026,7 +5480,7 @@
         </p:nvSpPr>
         <p:spPr>
           <a:xfrm>
-            <a:off x="19489406" y="14646878"/>
+            <a:off x="19489406" y="13367390"/>
             <a:ext cx="480062" cy="480056"/>
           </a:xfrm>
           <a:prstGeom prst="roundRect">
@@ -5056,7 +5510,7 @@
           </a:fontRef>
         </p:style>
         <p:txBody>
-          <a:bodyPr rtlCol="0" anchor="ctr" lIns="0" rIns="0" tIns="0" bIns="0" wrap="none"/>
+          <a:bodyPr wrap="none" lIns="0" tIns="0" rIns="0" bIns="0" rtlCol="0" anchor="ctr"/>
           <a:lstStyle/>
           <a:p>
             <a:pPr algn="ctr"/>
@@ -5080,7 +5534,7 @@
         </p:nvSpPr>
         <p:spPr>
           <a:xfrm>
-            <a:off x="19489406" y="16493937"/>
+            <a:off x="19489406" y="15214449"/>
             <a:ext cx="480062" cy="480056"/>
           </a:xfrm>
           <a:prstGeom prst="roundRect">
@@ -5110,7 +5564,7 @@
           </a:fontRef>
         </p:style>
         <p:txBody>
-          <a:bodyPr rtlCol="0" anchor="ctr" lIns="0" rIns="0" tIns="0" bIns="0" wrap="none"/>
+          <a:bodyPr wrap="none" lIns="0" tIns="0" rIns="0" bIns="0" rtlCol="0" anchor="ctr"/>
           <a:lstStyle/>
           <a:p>
             <a:pPr algn="ctr"/>
@@ -5134,7 +5588,7 @@
         </p:nvSpPr>
         <p:spPr>
           <a:xfrm>
-            <a:off x="709729" y="21462576"/>
+            <a:off x="709729" y="20183087"/>
             <a:ext cx="3672286" cy="514212"/>
           </a:xfrm>
           <a:prstGeom prst="rect">
@@ -5166,6 +5620,7 @@
           <a:lstStyle/>
           <a:p>
             <a:pPr algn="ctr"/>
+            <a:endParaRPr/>
           </a:p>
         </p:txBody>
       </p:sp>
@@ -5177,8 +5632,8 @@
         </p:nvSpPr>
         <p:spPr>
           <a:xfrm>
-            <a:off x="709729" y="21967261"/>
-            <a:ext cx="3672286" cy="12385"/>
+            <a:off x="709729" y="20687772"/>
+            <a:ext cx="3672286" cy="12387"/>
           </a:xfrm>
           <a:prstGeom prst="rect">
             <a:avLst/>
@@ -5195,6 +5650,7 @@
           <a:lstStyle/>
           <a:p>
             <a:pPr algn="ctr"/>
+            <a:endParaRPr/>
           </a:p>
         </p:txBody>
       </p:sp>
@@ -5206,7 +5662,7 @@
         </p:nvSpPr>
         <p:spPr>
           <a:xfrm>
-            <a:off x="4382014" y="21462576"/>
+            <a:off x="4382014" y="20183087"/>
             <a:ext cx="2373349" cy="514212"/>
           </a:xfrm>
           <a:prstGeom prst="rect">
@@ -5238,6 +5694,7 @@
           <a:lstStyle/>
           <a:p>
             <a:pPr algn="ctr"/>
+            <a:endParaRPr/>
           </a:p>
         </p:txBody>
       </p:sp>
@@ -5249,8 +5706,8 @@
         </p:nvSpPr>
         <p:spPr>
           <a:xfrm>
-            <a:off x="4382014" y="21967261"/>
-            <a:ext cx="2373349" cy="12385"/>
+            <a:off x="4382014" y="20687772"/>
+            <a:ext cx="2373349" cy="12387"/>
           </a:xfrm>
           <a:prstGeom prst="rect">
             <a:avLst/>
@@ -5267,6 +5724,7 @@
           <a:lstStyle/>
           <a:p>
             <a:pPr algn="ctr"/>
+            <a:endParaRPr/>
           </a:p>
         </p:txBody>
       </p:sp>
@@ -5278,7 +5736,7 @@
         </p:nvSpPr>
         <p:spPr>
           <a:xfrm>
-            <a:off x="6755363" y="21462576"/>
+            <a:off x="6755363" y="20183087"/>
             <a:ext cx="1700075" cy="514212"/>
           </a:xfrm>
           <a:prstGeom prst="rect">
@@ -5310,6 +5768,7 @@
           <a:lstStyle/>
           <a:p>
             <a:pPr algn="ctr"/>
+            <a:endParaRPr/>
           </a:p>
         </p:txBody>
       </p:sp>
@@ -5321,8 +5780,8 @@
         </p:nvSpPr>
         <p:spPr>
           <a:xfrm>
-            <a:off x="6755363" y="21967261"/>
-            <a:ext cx="1700075" cy="12385"/>
+            <a:off x="6755363" y="20687772"/>
+            <a:ext cx="1700075" cy="12387"/>
           </a:xfrm>
           <a:prstGeom prst="rect">
             <a:avLst/>
@@ -5339,6 +5798,7 @@
           <a:lstStyle/>
           <a:p>
             <a:pPr algn="ctr"/>
+            <a:endParaRPr/>
           </a:p>
         </p:txBody>
       </p:sp>
@@ -5350,7 +5810,7 @@
         </p:nvSpPr>
         <p:spPr>
           <a:xfrm>
-            <a:off x="8455438" y="21462576"/>
+            <a:off x="8455438" y="20183087"/>
             <a:ext cx="4025960" cy="514212"/>
           </a:xfrm>
           <a:prstGeom prst="rect">
@@ -5382,6 +5842,7 @@
           <a:lstStyle/>
           <a:p>
             <a:pPr algn="ctr"/>
+            <a:endParaRPr/>
           </a:p>
         </p:txBody>
       </p:sp>
@@ -5393,8 +5854,8 @@
         </p:nvSpPr>
         <p:spPr>
           <a:xfrm>
-            <a:off x="8455438" y="21967261"/>
-            <a:ext cx="4025960" cy="12385"/>
+            <a:off x="8455438" y="20687772"/>
+            <a:ext cx="4025960" cy="12387"/>
           </a:xfrm>
           <a:prstGeom prst="rect">
             <a:avLst/>
@@ -5411,6 +5872,7 @@
           <a:lstStyle/>
           <a:p>
             <a:pPr algn="ctr"/>
+            <a:endParaRPr/>
           </a:p>
         </p:txBody>
       </p:sp>
@@ -5422,8 +5884,8 @@
         </p:nvSpPr>
         <p:spPr>
           <a:xfrm>
-            <a:off x="709729" y="21976788"/>
-            <a:ext cx="3672286" cy="389380"/>
+            <a:off x="709729" y="20697299"/>
+            <a:ext cx="3672286" cy="389382"/>
           </a:xfrm>
           <a:prstGeom prst="rect">
             <a:avLst/>
@@ -5452,6 +5914,7 @@
           <a:lstStyle/>
           <a:p>
             <a:pPr algn="ctr"/>
+            <a:endParaRPr/>
           </a:p>
         </p:txBody>
       </p:sp>
@@ -5463,7 +5926,7 @@
         </p:nvSpPr>
         <p:spPr>
           <a:xfrm>
-            <a:off x="709729" y="22356642"/>
+            <a:off x="709729" y="21077155"/>
             <a:ext cx="3672286" cy="12384"/>
           </a:xfrm>
           <a:prstGeom prst="rect">
@@ -5481,6 +5944,7 @@
           <a:lstStyle/>
           <a:p>
             <a:pPr algn="ctr"/>
+            <a:endParaRPr/>
           </a:p>
         </p:txBody>
       </p:sp>
@@ -5492,8 +5956,8 @@
         </p:nvSpPr>
         <p:spPr>
           <a:xfrm>
-            <a:off x="4382014" y="21976788"/>
-            <a:ext cx="2373349" cy="389380"/>
+            <a:off x="4382014" y="20697299"/>
+            <a:ext cx="2373349" cy="389382"/>
           </a:xfrm>
           <a:prstGeom prst="rect">
             <a:avLst/>
@@ -5522,6 +5986,7 @@
           <a:lstStyle/>
           <a:p>
             <a:pPr algn="ctr"/>
+            <a:endParaRPr/>
           </a:p>
         </p:txBody>
       </p:sp>
@@ -5533,7 +5998,7 @@
         </p:nvSpPr>
         <p:spPr>
           <a:xfrm>
-            <a:off x="4382014" y="22356642"/>
+            <a:off x="4382014" y="21077155"/>
             <a:ext cx="2373349" cy="12384"/>
           </a:xfrm>
           <a:prstGeom prst="rect">
@@ -5551,6 +6016,7 @@
           <a:lstStyle/>
           <a:p>
             <a:pPr algn="ctr"/>
+            <a:endParaRPr/>
           </a:p>
         </p:txBody>
       </p:sp>
@@ -5562,8 +6028,8 @@
         </p:nvSpPr>
         <p:spPr>
           <a:xfrm>
-            <a:off x="6755363" y="21976788"/>
-            <a:ext cx="1700075" cy="389380"/>
+            <a:off x="6755363" y="20697299"/>
+            <a:ext cx="1700075" cy="389382"/>
           </a:xfrm>
           <a:prstGeom prst="rect">
             <a:avLst/>
@@ -5592,6 +6058,7 @@
           <a:lstStyle/>
           <a:p>
             <a:pPr algn="ctr"/>
+            <a:endParaRPr/>
           </a:p>
         </p:txBody>
       </p:sp>
@@ -5603,7 +6070,7 @@
         </p:nvSpPr>
         <p:spPr>
           <a:xfrm>
-            <a:off x="6755363" y="22356642"/>
+            <a:off x="6755363" y="21077155"/>
             <a:ext cx="1700075" cy="12384"/>
           </a:xfrm>
           <a:prstGeom prst="rect">
@@ -5621,6 +6088,7 @@
           <a:lstStyle/>
           <a:p>
             <a:pPr algn="ctr"/>
+            <a:endParaRPr/>
           </a:p>
         </p:txBody>
       </p:sp>
@@ -5632,8 +6100,8 @@
         </p:nvSpPr>
         <p:spPr>
           <a:xfrm>
-            <a:off x="8455438" y="21976788"/>
-            <a:ext cx="4025960" cy="389380"/>
+            <a:off x="8455438" y="20697299"/>
+            <a:ext cx="4025960" cy="389382"/>
           </a:xfrm>
           <a:prstGeom prst="rect">
             <a:avLst/>
@@ -5662,6 +6130,7 @@
           <a:lstStyle/>
           <a:p>
             <a:pPr algn="ctr"/>
+            <a:endParaRPr/>
           </a:p>
         </p:txBody>
       </p:sp>
@@ -5673,7 +6142,7 @@
         </p:nvSpPr>
         <p:spPr>
           <a:xfrm>
-            <a:off x="8455438" y="22356642"/>
+            <a:off x="8455438" y="21077155"/>
             <a:ext cx="4025960" cy="12384"/>
           </a:xfrm>
           <a:prstGeom prst="rect">
@@ -5691,6 +6160,7 @@
           <a:lstStyle/>
           <a:p>
             <a:pPr algn="ctr"/>
+            <a:endParaRPr/>
           </a:p>
         </p:txBody>
       </p:sp>
@@ -5702,7 +6172,7 @@
         </p:nvSpPr>
         <p:spPr>
           <a:xfrm>
-            <a:off x="709729" y="22366168"/>
+            <a:off x="709729" y="21086681"/>
             <a:ext cx="3672286" cy="389378"/>
           </a:xfrm>
           <a:prstGeom prst="rect">
@@ -5732,6 +6202,7 @@
           <a:lstStyle/>
           <a:p>
             <a:pPr algn="ctr"/>
+            <a:endParaRPr/>
           </a:p>
         </p:txBody>
       </p:sp>
@@ -5743,8 +6214,8 @@
         </p:nvSpPr>
         <p:spPr>
           <a:xfrm>
-            <a:off x="709729" y="22746020"/>
-            <a:ext cx="3672286" cy="12384"/>
+            <a:off x="709729" y="21466533"/>
+            <a:ext cx="3672286" cy="12382"/>
           </a:xfrm>
           <a:prstGeom prst="rect">
             <a:avLst/>
@@ -5761,6 +6232,7 @@
           <a:lstStyle/>
           <a:p>
             <a:pPr algn="ctr"/>
+            <a:endParaRPr/>
           </a:p>
         </p:txBody>
       </p:sp>
@@ -5772,7 +6244,7 @@
         </p:nvSpPr>
         <p:spPr>
           <a:xfrm>
-            <a:off x="4382014" y="22366168"/>
+            <a:off x="4382014" y="21086681"/>
             <a:ext cx="2373349" cy="389378"/>
           </a:xfrm>
           <a:prstGeom prst="rect">
@@ -5802,6 +6274,7 @@
           <a:lstStyle/>
           <a:p>
             <a:pPr algn="ctr"/>
+            <a:endParaRPr/>
           </a:p>
         </p:txBody>
       </p:sp>
@@ -5813,8 +6286,8 @@
         </p:nvSpPr>
         <p:spPr>
           <a:xfrm>
-            <a:off x="4382014" y="22746020"/>
-            <a:ext cx="2373349" cy="12384"/>
+            <a:off x="4382014" y="21466533"/>
+            <a:ext cx="2373349" cy="12382"/>
           </a:xfrm>
           <a:prstGeom prst="rect">
             <a:avLst/>
@@ -5831,6 +6304,7 @@
           <a:lstStyle/>
           <a:p>
             <a:pPr algn="ctr"/>
+            <a:endParaRPr/>
           </a:p>
         </p:txBody>
       </p:sp>
@@ -5842,7 +6316,7 @@
         </p:nvSpPr>
         <p:spPr>
           <a:xfrm>
-            <a:off x="6755363" y="22366168"/>
+            <a:off x="6755363" y="21086681"/>
             <a:ext cx="1700075" cy="389378"/>
           </a:xfrm>
           <a:prstGeom prst="rect">
@@ -5872,6 +6346,7 @@
           <a:lstStyle/>
           <a:p>
             <a:pPr algn="ctr"/>
+            <a:endParaRPr/>
           </a:p>
         </p:txBody>
       </p:sp>
@@ -5883,8 +6358,8 @@
         </p:nvSpPr>
         <p:spPr>
           <a:xfrm>
-            <a:off x="6755363" y="22746020"/>
-            <a:ext cx="1700075" cy="12384"/>
+            <a:off x="6755363" y="21466533"/>
+            <a:ext cx="1700075" cy="12382"/>
           </a:xfrm>
           <a:prstGeom prst="rect">
             <a:avLst/>
@@ -5901,6 +6376,7 @@
           <a:lstStyle/>
           <a:p>
             <a:pPr algn="ctr"/>
+            <a:endParaRPr/>
           </a:p>
         </p:txBody>
       </p:sp>
@@ -5912,7 +6388,7 @@
         </p:nvSpPr>
         <p:spPr>
           <a:xfrm>
-            <a:off x="8455438" y="22366168"/>
+            <a:off x="8455438" y="21086681"/>
             <a:ext cx="4025960" cy="389378"/>
           </a:xfrm>
           <a:prstGeom prst="rect">
@@ -5942,6 +6418,7 @@
           <a:lstStyle/>
           <a:p>
             <a:pPr algn="ctr"/>
+            <a:endParaRPr/>
           </a:p>
         </p:txBody>
       </p:sp>
@@ -5953,8 +6430,8 @@
         </p:nvSpPr>
         <p:spPr>
           <a:xfrm>
-            <a:off x="8455438" y="22746020"/>
-            <a:ext cx="4025960" cy="12384"/>
+            <a:off x="8455438" y="21466533"/>
+            <a:ext cx="4025960" cy="12382"/>
           </a:xfrm>
           <a:prstGeom prst="rect">
             <a:avLst/>
@@ -5971,6 +6448,7 @@
           <a:lstStyle/>
           <a:p>
             <a:pPr algn="ctr"/>
+            <a:endParaRPr/>
           </a:p>
         </p:txBody>
       </p:sp>
@@ -5982,8 +6460,8 @@
         </p:nvSpPr>
         <p:spPr>
           <a:xfrm>
-            <a:off x="709729" y="22755546"/>
-            <a:ext cx="3672286" cy="389381"/>
+            <a:off x="709729" y="21476059"/>
+            <a:ext cx="3672286" cy="389379"/>
           </a:xfrm>
           <a:prstGeom prst="rect">
             <a:avLst/>
@@ -6014,6 +6492,7 @@
           <a:lstStyle/>
           <a:p>
             <a:pPr algn="ctr"/>
+            <a:endParaRPr/>
           </a:p>
         </p:txBody>
       </p:sp>
@@ -6025,7 +6504,7 @@
         </p:nvSpPr>
         <p:spPr>
           <a:xfrm>
-            <a:off x="709729" y="23135400"/>
+            <a:off x="709729" y="21855911"/>
             <a:ext cx="3672286" cy="12385"/>
           </a:xfrm>
           <a:prstGeom prst="rect">
@@ -6043,6 +6522,7 @@
           <a:lstStyle/>
           <a:p>
             <a:pPr algn="ctr"/>
+            <a:endParaRPr/>
           </a:p>
         </p:txBody>
       </p:sp>
@@ -6054,8 +6534,8 @@
         </p:nvSpPr>
         <p:spPr>
           <a:xfrm>
-            <a:off x="4382014" y="22755546"/>
-            <a:ext cx="2373349" cy="389381"/>
+            <a:off x="4382014" y="21476059"/>
+            <a:ext cx="2373349" cy="389379"/>
           </a:xfrm>
           <a:prstGeom prst="rect">
             <a:avLst/>
@@ -6086,6 +6566,7 @@
           <a:lstStyle/>
           <a:p>
             <a:pPr algn="ctr"/>
+            <a:endParaRPr/>
           </a:p>
         </p:txBody>
       </p:sp>
@@ -6097,7 +6578,7 @@
         </p:nvSpPr>
         <p:spPr>
           <a:xfrm>
-            <a:off x="4382014" y="23135400"/>
+            <a:off x="4382014" y="21855911"/>
             <a:ext cx="2373349" cy="12385"/>
           </a:xfrm>
           <a:prstGeom prst="rect">
@@ -6115,6 +6596,7 @@
           <a:lstStyle/>
           <a:p>
             <a:pPr algn="ctr"/>
+            <a:endParaRPr/>
           </a:p>
         </p:txBody>
       </p:sp>
@@ -6126,8 +6608,8 @@
         </p:nvSpPr>
         <p:spPr>
           <a:xfrm>
-            <a:off x="6755363" y="22755546"/>
-            <a:ext cx="1700075" cy="389381"/>
+            <a:off x="6755363" y="21476059"/>
+            <a:ext cx="1700075" cy="389379"/>
           </a:xfrm>
           <a:prstGeom prst="rect">
             <a:avLst/>
@@ -6158,6 +6640,7 @@
           <a:lstStyle/>
           <a:p>
             <a:pPr algn="ctr"/>
+            <a:endParaRPr/>
           </a:p>
         </p:txBody>
       </p:sp>
@@ -6169,7 +6652,7 @@
         </p:nvSpPr>
         <p:spPr>
           <a:xfrm>
-            <a:off x="6755363" y="23135400"/>
+            <a:off x="6755363" y="21855911"/>
             <a:ext cx="1700075" cy="12385"/>
           </a:xfrm>
           <a:prstGeom prst="rect">
@@ -6187,6 +6670,7 @@
           <a:lstStyle/>
           <a:p>
             <a:pPr algn="ctr"/>
+            <a:endParaRPr/>
           </a:p>
         </p:txBody>
       </p:sp>
@@ -6198,8 +6682,8 @@
         </p:nvSpPr>
         <p:spPr>
           <a:xfrm>
-            <a:off x="8455438" y="22755546"/>
-            <a:ext cx="4025960" cy="389381"/>
+            <a:off x="8455438" y="21476059"/>
+            <a:ext cx="4025960" cy="389379"/>
           </a:xfrm>
           <a:prstGeom prst="rect">
             <a:avLst/>
@@ -6230,6 +6714,7 @@
           <a:lstStyle/>
           <a:p>
             <a:pPr algn="ctr"/>
+            <a:endParaRPr/>
           </a:p>
         </p:txBody>
       </p:sp>
@@ -6241,7 +6726,7 @@
         </p:nvSpPr>
         <p:spPr>
           <a:xfrm>
-            <a:off x="8455438" y="23135400"/>
+            <a:off x="8455438" y="21855911"/>
             <a:ext cx="4025960" cy="12385"/>
           </a:xfrm>
           <a:prstGeom prst="rect">
@@ -6259,6 +6744,7 @@
           <a:lstStyle/>
           <a:p>
             <a:pPr algn="ctr"/>
+            <a:endParaRPr/>
           </a:p>
         </p:txBody>
       </p:sp>
@@ -6270,7 +6756,7 @@
         </p:nvSpPr>
         <p:spPr>
           <a:xfrm>
-            <a:off x="709729" y="23144927"/>
+            <a:off x="709729" y="21865438"/>
             <a:ext cx="3672286" cy="389378"/>
           </a:xfrm>
           <a:prstGeom prst="rect">
@@ -6300,6 +6786,7 @@
           <a:lstStyle/>
           <a:p>
             <a:pPr algn="ctr"/>
+            <a:endParaRPr/>
           </a:p>
         </p:txBody>
       </p:sp>
@@ -6311,8 +6798,8 @@
         </p:nvSpPr>
         <p:spPr>
           <a:xfrm>
-            <a:off x="709729" y="23524778"/>
-            <a:ext cx="3672286" cy="12385"/>
+            <a:off x="709729" y="22245289"/>
+            <a:ext cx="3672286" cy="12387"/>
           </a:xfrm>
           <a:prstGeom prst="rect">
             <a:avLst/>
@@ -6329,6 +6816,7 @@
           <a:lstStyle/>
           <a:p>
             <a:pPr algn="ctr"/>
+            <a:endParaRPr/>
           </a:p>
         </p:txBody>
       </p:sp>
@@ -6340,7 +6828,7 @@
         </p:nvSpPr>
         <p:spPr>
           <a:xfrm>
-            <a:off x="4382014" y="23144927"/>
+            <a:off x="4382014" y="21865438"/>
             <a:ext cx="2373349" cy="389378"/>
           </a:xfrm>
           <a:prstGeom prst="rect">
@@ -6370,6 +6858,7 @@
           <a:lstStyle/>
           <a:p>
             <a:pPr algn="ctr"/>
+            <a:endParaRPr/>
           </a:p>
         </p:txBody>
       </p:sp>
@@ -6381,8 +6870,8 @@
         </p:nvSpPr>
         <p:spPr>
           <a:xfrm>
-            <a:off x="4382014" y="23524778"/>
-            <a:ext cx="2373349" cy="12385"/>
+            <a:off x="4382014" y="22245289"/>
+            <a:ext cx="2373349" cy="12387"/>
           </a:xfrm>
           <a:prstGeom prst="rect">
             <a:avLst/>
@@ -6399,6 +6888,7 @@
           <a:lstStyle/>
           <a:p>
             <a:pPr algn="ctr"/>
+            <a:endParaRPr/>
           </a:p>
         </p:txBody>
       </p:sp>
@@ -6410,7 +6900,7 @@
         </p:nvSpPr>
         <p:spPr>
           <a:xfrm>
-            <a:off x="6755363" y="23144927"/>
+            <a:off x="6755363" y="21865438"/>
             <a:ext cx="1700075" cy="389378"/>
           </a:xfrm>
           <a:prstGeom prst="rect">
@@ -6440,6 +6930,7 @@
           <a:lstStyle/>
           <a:p>
             <a:pPr algn="ctr"/>
+            <a:endParaRPr/>
           </a:p>
         </p:txBody>
       </p:sp>
@@ -6451,8 +6942,8 @@
         </p:nvSpPr>
         <p:spPr>
           <a:xfrm>
-            <a:off x="6755363" y="23524778"/>
-            <a:ext cx="1700075" cy="12385"/>
+            <a:off x="6755363" y="22245289"/>
+            <a:ext cx="1700075" cy="12387"/>
           </a:xfrm>
           <a:prstGeom prst="rect">
             <a:avLst/>
@@ -6469,6 +6960,7 @@
           <a:lstStyle/>
           <a:p>
             <a:pPr algn="ctr"/>
+            <a:endParaRPr/>
           </a:p>
         </p:txBody>
       </p:sp>
@@ -6480,7 +6972,7 @@
         </p:nvSpPr>
         <p:spPr>
           <a:xfrm>
-            <a:off x="8455438" y="23144927"/>
+            <a:off x="8455438" y="21865438"/>
             <a:ext cx="4025960" cy="389378"/>
           </a:xfrm>
           <a:prstGeom prst="rect">
@@ -6510,6 +7002,7 @@
           <a:lstStyle/>
           <a:p>
             <a:pPr algn="ctr"/>
+            <a:endParaRPr/>
           </a:p>
         </p:txBody>
       </p:sp>
@@ -6521,8 +7014,8 @@
         </p:nvSpPr>
         <p:spPr>
           <a:xfrm>
-            <a:off x="8455438" y="23524778"/>
-            <a:ext cx="4025960" cy="12385"/>
+            <a:off x="8455438" y="22245289"/>
+            <a:ext cx="4025960" cy="12387"/>
           </a:xfrm>
           <a:prstGeom prst="rect">
             <a:avLst/>
@@ -6539,6 +7032,7 @@
           <a:lstStyle/>
           <a:p>
             <a:pPr algn="ctr"/>
+            <a:endParaRPr/>
           </a:p>
         </p:txBody>
       </p:sp>
@@ -6550,8 +7044,8 @@
         </p:nvSpPr>
         <p:spPr>
           <a:xfrm>
-            <a:off x="709729" y="23534305"/>
-            <a:ext cx="3672286" cy="389380"/>
+            <a:off x="709729" y="22254816"/>
+            <a:ext cx="3672286" cy="389382"/>
           </a:xfrm>
           <a:prstGeom prst="rect">
             <a:avLst/>
@@ -6580,6 +7074,7 @@
           <a:lstStyle/>
           <a:p>
             <a:pPr algn="ctr"/>
+            <a:endParaRPr/>
           </a:p>
         </p:txBody>
       </p:sp>
@@ -6591,8 +7086,8 @@
         </p:nvSpPr>
         <p:spPr>
           <a:xfrm>
-            <a:off x="709729" y="23914159"/>
-            <a:ext cx="3672286" cy="12384"/>
+            <a:off x="709729" y="22634670"/>
+            <a:ext cx="3672286" cy="12386"/>
           </a:xfrm>
           <a:prstGeom prst="rect">
             <a:avLst/>
@@ -6609,6 +7104,7 @@
           <a:lstStyle/>
           <a:p>
             <a:pPr algn="ctr"/>
+            <a:endParaRPr/>
           </a:p>
         </p:txBody>
       </p:sp>
@@ -6620,8 +7116,8 @@
         </p:nvSpPr>
         <p:spPr>
           <a:xfrm>
-            <a:off x="4382014" y="23534305"/>
-            <a:ext cx="2373349" cy="389380"/>
+            <a:off x="4382014" y="22254816"/>
+            <a:ext cx="2373349" cy="389382"/>
           </a:xfrm>
           <a:prstGeom prst="rect">
             <a:avLst/>
@@ -6650,6 +7146,7 @@
           <a:lstStyle/>
           <a:p>
             <a:pPr algn="ctr"/>
+            <a:endParaRPr/>
           </a:p>
         </p:txBody>
       </p:sp>
@@ -6661,8 +7158,8 @@
         </p:nvSpPr>
         <p:spPr>
           <a:xfrm>
-            <a:off x="4382014" y="23914159"/>
-            <a:ext cx="2373349" cy="12384"/>
+            <a:off x="4382014" y="22634670"/>
+            <a:ext cx="2373349" cy="12386"/>
           </a:xfrm>
           <a:prstGeom prst="rect">
             <a:avLst/>
@@ -6679,6 +7176,7 @@
           <a:lstStyle/>
           <a:p>
             <a:pPr algn="ctr"/>
+            <a:endParaRPr/>
           </a:p>
         </p:txBody>
       </p:sp>
@@ -6690,8 +7188,8 @@
         </p:nvSpPr>
         <p:spPr>
           <a:xfrm>
-            <a:off x="6755363" y="23534305"/>
-            <a:ext cx="1700075" cy="389380"/>
+            <a:off x="6755363" y="22254816"/>
+            <a:ext cx="1700075" cy="389382"/>
           </a:xfrm>
           <a:prstGeom prst="rect">
             <a:avLst/>
@@ -6720,6 +7218,7 @@
           <a:lstStyle/>
           <a:p>
             <a:pPr algn="ctr"/>
+            <a:endParaRPr/>
           </a:p>
         </p:txBody>
       </p:sp>
@@ -6731,8 +7230,8 @@
         </p:nvSpPr>
         <p:spPr>
           <a:xfrm>
-            <a:off x="6755363" y="23914159"/>
-            <a:ext cx="1700075" cy="12384"/>
+            <a:off x="6755363" y="22634670"/>
+            <a:ext cx="1700075" cy="12386"/>
           </a:xfrm>
           <a:prstGeom prst="rect">
             <a:avLst/>
@@ -6749,6 +7248,7 @@
           <a:lstStyle/>
           <a:p>
             <a:pPr algn="ctr"/>
+            <a:endParaRPr/>
           </a:p>
         </p:txBody>
       </p:sp>
@@ -6760,8 +7260,8 @@
         </p:nvSpPr>
         <p:spPr>
           <a:xfrm>
-            <a:off x="8455438" y="23534305"/>
-            <a:ext cx="4025960" cy="389380"/>
+            <a:off x="8455438" y="22254816"/>
+            <a:ext cx="4025960" cy="389382"/>
           </a:xfrm>
           <a:prstGeom prst="rect">
             <a:avLst/>
@@ -6790,6 +7290,7 @@
           <a:lstStyle/>
           <a:p>
             <a:pPr algn="ctr"/>
+            <a:endParaRPr/>
           </a:p>
         </p:txBody>
       </p:sp>
@@ -6801,8 +7302,8 @@
         </p:nvSpPr>
         <p:spPr>
           <a:xfrm>
-            <a:off x="8455438" y="23914159"/>
-            <a:ext cx="4025960" cy="12384"/>
+            <a:off x="8455438" y="22634670"/>
+            <a:ext cx="4025960" cy="12386"/>
           </a:xfrm>
           <a:prstGeom prst="rect">
             <a:avLst/>
@@ -6819,6 +7320,7 @@
           <a:lstStyle/>
           <a:p>
             <a:pPr algn="ctr"/>
+            <a:endParaRPr/>
           </a:p>
         </p:txBody>
       </p:sp>
@@ -6830,7 +7332,7 @@
         </p:nvSpPr>
         <p:spPr>
           <a:xfrm>
-            <a:off x="709729" y="31556381"/>
+            <a:off x="709729" y="31136481"/>
             <a:ext cx="5872592" cy="708232"/>
           </a:xfrm>
           <a:prstGeom prst="rect">
@@ -6862,6 +7364,7 @@
           <a:lstStyle/>
           <a:p>
             <a:pPr algn="ctr"/>
+            <a:endParaRPr/>
           </a:p>
         </p:txBody>
       </p:sp>
@@ -6873,7 +7376,7 @@
         </p:nvSpPr>
         <p:spPr>
           <a:xfrm>
-            <a:off x="709729" y="32255086"/>
+            <a:off x="709729" y="31835186"/>
             <a:ext cx="5872592" cy="12385"/>
           </a:xfrm>
           <a:prstGeom prst="rect">
@@ -6891,6 +7394,7 @@
           <a:lstStyle/>
           <a:p>
             <a:pPr algn="ctr"/>
+            <a:endParaRPr/>
           </a:p>
         </p:txBody>
       </p:sp>
@@ -6902,7 +7406,7 @@
         </p:nvSpPr>
         <p:spPr>
           <a:xfrm>
-            <a:off x="6582321" y="31556381"/>
+            <a:off x="6582321" y="31136481"/>
             <a:ext cx="4054825" cy="708232"/>
           </a:xfrm>
           <a:prstGeom prst="rect">
@@ -6934,6 +7438,7 @@
           <a:lstStyle/>
           <a:p>
             <a:pPr algn="ctr"/>
+            <a:endParaRPr/>
           </a:p>
         </p:txBody>
       </p:sp>
@@ -6945,7 +7450,7 @@
         </p:nvSpPr>
         <p:spPr>
           <a:xfrm>
-            <a:off x="6582321" y="32255086"/>
+            <a:off x="6582321" y="31835186"/>
             <a:ext cx="4054825" cy="12385"/>
           </a:xfrm>
           <a:prstGeom prst="rect">
@@ -6963,6 +7468,7 @@
           <a:lstStyle/>
           <a:p>
             <a:pPr algn="ctr"/>
+            <a:endParaRPr/>
           </a:p>
         </p:txBody>
       </p:sp>
@@ -6974,7 +7480,7 @@
         </p:nvSpPr>
         <p:spPr>
           <a:xfrm>
-            <a:off x="10637146" y="31556381"/>
+            <a:off x="10637146" y="31136481"/>
             <a:ext cx="4054973" cy="708232"/>
           </a:xfrm>
           <a:prstGeom prst="rect">
@@ -7006,6 +7512,7 @@
           <a:lstStyle/>
           <a:p>
             <a:pPr algn="ctr"/>
+            <a:endParaRPr/>
           </a:p>
         </p:txBody>
       </p:sp>
@@ -7017,7 +7524,7 @@
         </p:nvSpPr>
         <p:spPr>
           <a:xfrm>
-            <a:off x="10637146" y="32255086"/>
+            <a:off x="10637146" y="31835186"/>
             <a:ext cx="4054973" cy="12385"/>
           </a:xfrm>
           <a:prstGeom prst="rect">
@@ -7035,6 +7542,7 @@
           <a:lstStyle/>
           <a:p>
             <a:pPr algn="ctr"/>
+            <a:endParaRPr/>
           </a:p>
         </p:txBody>
       </p:sp>
@@ -7046,7 +7554,7 @@
         </p:nvSpPr>
         <p:spPr>
           <a:xfrm>
-            <a:off x="709729" y="32264613"/>
+            <a:off x="709729" y="31844713"/>
             <a:ext cx="5872592" cy="519719"/>
           </a:xfrm>
           <a:prstGeom prst="rect">
@@ -7076,6 +7584,7 @@
           <a:lstStyle/>
           <a:p>
             <a:pPr algn="ctr"/>
+            <a:endParaRPr/>
           </a:p>
         </p:txBody>
       </p:sp>
@@ -7087,7 +7596,7 @@
         </p:nvSpPr>
         <p:spPr>
           <a:xfrm>
-            <a:off x="709729" y="32774805"/>
+            <a:off x="709729" y="32354905"/>
             <a:ext cx="5872592" cy="12385"/>
           </a:xfrm>
           <a:prstGeom prst="rect">
@@ -7105,6 +7614,7 @@
           <a:lstStyle/>
           <a:p>
             <a:pPr algn="ctr"/>
+            <a:endParaRPr/>
           </a:p>
         </p:txBody>
       </p:sp>
@@ -7116,7 +7626,7 @@
         </p:nvSpPr>
         <p:spPr>
           <a:xfrm>
-            <a:off x="6582321" y="32264613"/>
+            <a:off x="6582321" y="31844713"/>
             <a:ext cx="4054825" cy="519719"/>
           </a:xfrm>
           <a:prstGeom prst="rect">
@@ -7146,6 +7656,7 @@
           <a:lstStyle/>
           <a:p>
             <a:pPr algn="ctr"/>
+            <a:endParaRPr/>
           </a:p>
         </p:txBody>
       </p:sp>
@@ -7157,7 +7668,7 @@
         </p:nvSpPr>
         <p:spPr>
           <a:xfrm>
-            <a:off x="6582321" y="32774805"/>
+            <a:off x="6582321" y="32354905"/>
             <a:ext cx="4054825" cy="12385"/>
           </a:xfrm>
           <a:prstGeom prst="rect">
@@ -7175,6 +7686,7 @@
           <a:lstStyle/>
           <a:p>
             <a:pPr algn="ctr"/>
+            <a:endParaRPr/>
           </a:p>
         </p:txBody>
       </p:sp>
@@ -7186,7 +7698,7 @@
         </p:nvSpPr>
         <p:spPr>
           <a:xfrm>
-            <a:off x="10637146" y="32264613"/>
+            <a:off x="10637146" y="31844713"/>
             <a:ext cx="4054973" cy="519719"/>
           </a:xfrm>
           <a:prstGeom prst="rect">
@@ -7216,6 +7728,7 @@
           <a:lstStyle/>
           <a:p>
             <a:pPr algn="ctr"/>
+            <a:endParaRPr/>
           </a:p>
         </p:txBody>
       </p:sp>
@@ -7227,7 +7740,7 @@
         </p:nvSpPr>
         <p:spPr>
           <a:xfrm>
-            <a:off x="10637146" y="32774805"/>
+            <a:off x="10637146" y="32354905"/>
             <a:ext cx="4054973" cy="12385"/>
           </a:xfrm>
           <a:prstGeom prst="rect">
@@ -7245,6 +7758,7 @@
           <a:lstStyle/>
           <a:p>
             <a:pPr algn="ctr"/>
+            <a:endParaRPr/>
           </a:p>
         </p:txBody>
       </p:sp>
@@ -7256,7 +7770,7 @@
         </p:nvSpPr>
         <p:spPr>
           <a:xfrm>
-            <a:off x="709729" y="32784332"/>
+            <a:off x="709729" y="32364432"/>
             <a:ext cx="5872592" cy="519716"/>
           </a:xfrm>
           <a:prstGeom prst="rect">
@@ -7286,6 +7800,7 @@
           <a:lstStyle/>
           <a:p>
             <a:pPr algn="ctr"/>
+            <a:endParaRPr/>
           </a:p>
         </p:txBody>
       </p:sp>
@@ -7297,7 +7812,7 @@
         </p:nvSpPr>
         <p:spPr>
           <a:xfrm>
-            <a:off x="709729" y="33294522"/>
+            <a:off x="709729" y="32874622"/>
             <a:ext cx="5872592" cy="12384"/>
           </a:xfrm>
           <a:prstGeom prst="rect">
@@ -7315,6 +7830,7 @@
           <a:lstStyle/>
           <a:p>
             <a:pPr algn="ctr"/>
+            <a:endParaRPr/>
           </a:p>
         </p:txBody>
       </p:sp>
@@ -7326,7 +7842,7 @@
         </p:nvSpPr>
         <p:spPr>
           <a:xfrm>
-            <a:off x="6582321" y="32784332"/>
+            <a:off x="6582321" y="32364432"/>
             <a:ext cx="4054825" cy="519716"/>
           </a:xfrm>
           <a:prstGeom prst="rect">
@@ -7356,6 +7872,7 @@
           <a:lstStyle/>
           <a:p>
             <a:pPr algn="ctr"/>
+            <a:endParaRPr/>
           </a:p>
         </p:txBody>
       </p:sp>
@@ -7367,7 +7884,7 @@
         </p:nvSpPr>
         <p:spPr>
           <a:xfrm>
-            <a:off x="6582321" y="33294522"/>
+            <a:off x="6582321" y="32874622"/>
             <a:ext cx="4054825" cy="12384"/>
           </a:xfrm>
           <a:prstGeom prst="rect">
@@ -7385,6 +7902,7 @@
           <a:lstStyle/>
           <a:p>
             <a:pPr algn="ctr"/>
+            <a:endParaRPr/>
           </a:p>
         </p:txBody>
       </p:sp>
@@ -7396,7 +7914,7 @@
         </p:nvSpPr>
         <p:spPr>
           <a:xfrm>
-            <a:off x="10637146" y="32784332"/>
+            <a:off x="10637146" y="32364432"/>
             <a:ext cx="4054973" cy="519716"/>
           </a:xfrm>
           <a:prstGeom prst="rect">
@@ -7426,6 +7944,7 @@
           <a:lstStyle/>
           <a:p>
             <a:pPr algn="ctr"/>
+            <a:endParaRPr/>
           </a:p>
         </p:txBody>
       </p:sp>
@@ -7437,7 +7956,7 @@
         </p:nvSpPr>
         <p:spPr>
           <a:xfrm>
-            <a:off x="10637146" y="33294522"/>
+            <a:off x="10637146" y="32874622"/>
             <a:ext cx="4054973" cy="12384"/>
           </a:xfrm>
           <a:prstGeom prst="rect">
@@ -7455,6 +7974,7 @@
           <a:lstStyle/>
           <a:p>
             <a:pPr algn="ctr"/>
+            <a:endParaRPr/>
           </a:p>
         </p:txBody>
       </p:sp>
@@ -7466,7 +7986,7 @@
         </p:nvSpPr>
         <p:spPr>
           <a:xfrm>
-            <a:off x="709729" y="33304048"/>
+            <a:off x="709729" y="32884148"/>
             <a:ext cx="5872592" cy="519719"/>
           </a:xfrm>
           <a:prstGeom prst="rect">
@@ -7496,6 +8016,7 @@
           <a:lstStyle/>
           <a:p>
             <a:pPr algn="ctr"/>
+            <a:endParaRPr/>
           </a:p>
         </p:txBody>
       </p:sp>
@@ -7507,7 +8028,7 @@
         </p:nvSpPr>
         <p:spPr>
           <a:xfrm>
-            <a:off x="709729" y="33814241"/>
+            <a:off x="709729" y="33394341"/>
             <a:ext cx="5872592" cy="12384"/>
           </a:xfrm>
           <a:prstGeom prst="rect">
@@ -7525,6 +8046,7 @@
           <a:lstStyle/>
           <a:p>
             <a:pPr algn="ctr"/>
+            <a:endParaRPr/>
           </a:p>
         </p:txBody>
       </p:sp>
@@ -7536,7 +8058,7 @@
         </p:nvSpPr>
         <p:spPr>
           <a:xfrm>
-            <a:off x="6582321" y="33304048"/>
+            <a:off x="6582321" y="32884148"/>
             <a:ext cx="4054825" cy="519719"/>
           </a:xfrm>
           <a:prstGeom prst="rect">
@@ -7566,6 +8088,7 @@
           <a:lstStyle/>
           <a:p>
             <a:pPr algn="ctr"/>
+            <a:endParaRPr/>
           </a:p>
         </p:txBody>
       </p:sp>
@@ -7577,7 +8100,7 @@
         </p:nvSpPr>
         <p:spPr>
           <a:xfrm>
-            <a:off x="6582321" y="33814241"/>
+            <a:off x="6582321" y="33394341"/>
             <a:ext cx="4054825" cy="12384"/>
           </a:xfrm>
           <a:prstGeom prst="rect">
@@ -7595,6 +8118,7 @@
           <a:lstStyle/>
           <a:p>
             <a:pPr algn="ctr"/>
+            <a:endParaRPr/>
           </a:p>
         </p:txBody>
       </p:sp>
@@ -7606,7 +8130,7 @@
         </p:nvSpPr>
         <p:spPr>
           <a:xfrm>
-            <a:off x="10637146" y="33304048"/>
+            <a:off x="10637146" y="32884148"/>
             <a:ext cx="4054973" cy="519719"/>
           </a:xfrm>
           <a:prstGeom prst="rect">
@@ -7636,6 +8160,7 @@
           <a:lstStyle/>
           <a:p>
             <a:pPr algn="ctr"/>
+            <a:endParaRPr/>
           </a:p>
         </p:txBody>
       </p:sp>
@@ -7647,7 +8172,7 @@
         </p:nvSpPr>
         <p:spPr>
           <a:xfrm>
-            <a:off x="10637146" y="33814241"/>
+            <a:off x="10637146" y="33394341"/>
             <a:ext cx="4054973" cy="12384"/>
           </a:xfrm>
           <a:prstGeom prst="rect">
@@ -7665,6 +8190,7 @@
           <a:lstStyle/>
           <a:p>
             <a:pPr algn="ctr"/>
+            <a:endParaRPr/>
           </a:p>
         </p:txBody>
       </p:sp>
@@ -7676,7 +8202,7 @@
         </p:nvSpPr>
         <p:spPr>
           <a:xfrm>
-            <a:off x="15574443" y="33318331"/>
+            <a:off x="15574443" y="32898431"/>
             <a:ext cx="6030757" cy="407830"/>
           </a:xfrm>
           <a:prstGeom prst="rect">
@@ -7708,6 +8234,7 @@
           <a:lstStyle/>
           <a:p>
             <a:pPr algn="ctr"/>
+            <a:endParaRPr/>
           </a:p>
         </p:txBody>
       </p:sp>
@@ -7719,7 +8246,7 @@
         </p:nvSpPr>
         <p:spPr>
           <a:xfrm>
-            <a:off x="15574443" y="33716634"/>
+            <a:off x="15574443" y="33296734"/>
             <a:ext cx="6030757" cy="12385"/>
           </a:xfrm>
           <a:prstGeom prst="rect">
@@ -7737,6 +8264,7 @@
           <a:lstStyle/>
           <a:p>
             <a:pPr algn="ctr"/>
+            <a:endParaRPr/>
           </a:p>
         </p:txBody>
       </p:sp>
@@ -7748,7 +8276,7 @@
         </p:nvSpPr>
         <p:spPr>
           <a:xfrm>
-            <a:off x="21605200" y="33318331"/>
+            <a:off x="21605200" y="32898431"/>
             <a:ext cx="2096747" cy="407830"/>
           </a:xfrm>
           <a:prstGeom prst="rect">
@@ -7780,6 +8308,7 @@
           <a:lstStyle/>
           <a:p>
             <a:pPr algn="ctr"/>
+            <a:endParaRPr/>
           </a:p>
         </p:txBody>
       </p:sp>
@@ -7791,7 +8320,7 @@
         </p:nvSpPr>
         <p:spPr>
           <a:xfrm>
-            <a:off x="21605200" y="33716634"/>
+            <a:off x="21605200" y="33296734"/>
             <a:ext cx="2096747" cy="12385"/>
           </a:xfrm>
           <a:prstGeom prst="rect">
@@ -7809,6 +8338,7 @@
           <a:lstStyle/>
           <a:p>
             <a:pPr algn="ctr"/>
+            <a:endParaRPr/>
           </a:p>
         </p:txBody>
       </p:sp>
@@ -7820,7 +8350,7 @@
         </p:nvSpPr>
         <p:spPr>
           <a:xfrm>
-            <a:off x="23701947" y="33318331"/>
+            <a:off x="23701947" y="32898431"/>
             <a:ext cx="3328730" cy="407830"/>
           </a:xfrm>
           <a:prstGeom prst="rect">
@@ -7852,6 +8382,7 @@
           <a:lstStyle/>
           <a:p>
             <a:pPr algn="ctr"/>
+            <a:endParaRPr/>
           </a:p>
         </p:txBody>
       </p:sp>
@@ -7863,7 +8394,7 @@
         </p:nvSpPr>
         <p:spPr>
           <a:xfrm>
-            <a:off x="23701947" y="33716634"/>
+            <a:off x="23701947" y="33296734"/>
             <a:ext cx="3328730" cy="12385"/>
           </a:xfrm>
           <a:prstGeom prst="rect">
@@ -7881,6 +8412,7 @@
           <a:lstStyle/>
           <a:p>
             <a:pPr algn="ctr"/>
+            <a:endParaRPr/>
           </a:p>
         </p:txBody>
       </p:sp>
@@ -7892,7 +8424,7 @@
         </p:nvSpPr>
         <p:spPr>
           <a:xfrm>
-            <a:off x="27030677" y="33318331"/>
+            <a:off x="27030677" y="32898431"/>
             <a:ext cx="2526158" cy="407830"/>
           </a:xfrm>
           <a:prstGeom prst="rect">
@@ -7924,6 +8456,7 @@
           <a:lstStyle/>
           <a:p>
             <a:pPr algn="ctr"/>
+            <a:endParaRPr/>
           </a:p>
         </p:txBody>
       </p:sp>
@@ -7935,7 +8468,7 @@
         </p:nvSpPr>
         <p:spPr>
           <a:xfrm>
-            <a:off x="27030677" y="33716634"/>
+            <a:off x="27030677" y="33296734"/>
             <a:ext cx="2526158" cy="12385"/>
           </a:xfrm>
           <a:prstGeom prst="rect">
@@ -7953,6 +8486,7 @@
           <a:lstStyle/>
           <a:p>
             <a:pPr algn="ctr"/>
+            <a:endParaRPr/>
           </a:p>
         </p:txBody>
       </p:sp>
@@ -7964,7 +8498,7 @@
         </p:nvSpPr>
         <p:spPr>
           <a:xfrm>
-            <a:off x="15574443" y="33726161"/>
+            <a:off x="15574443" y="33306261"/>
             <a:ext cx="6030757" cy="546650"/>
           </a:xfrm>
           <a:prstGeom prst="rect">
@@ -7994,6 +8528,7 @@
           <a:lstStyle/>
           <a:p>
             <a:pPr algn="ctr"/>
+            <a:endParaRPr/>
           </a:p>
         </p:txBody>
       </p:sp>
@@ -8005,8 +8540,8 @@
         </p:nvSpPr>
         <p:spPr>
           <a:xfrm>
-            <a:off x="15574443" y="34263284"/>
-            <a:ext cx="6030757" cy="12385"/>
+            <a:off x="15574443" y="33843384"/>
+            <a:ext cx="6030757" cy="12387"/>
           </a:xfrm>
           <a:prstGeom prst="rect">
             <a:avLst/>
@@ -8023,6 +8558,7 @@
           <a:lstStyle/>
           <a:p>
             <a:pPr algn="ctr"/>
+            <a:endParaRPr/>
           </a:p>
         </p:txBody>
       </p:sp>
@@ -8034,7 +8570,7 @@
         </p:nvSpPr>
         <p:spPr>
           <a:xfrm>
-            <a:off x="21605200" y="33726161"/>
+            <a:off x="21605200" y="33306261"/>
             <a:ext cx="2096747" cy="546650"/>
           </a:xfrm>
           <a:prstGeom prst="rect">
@@ -8064,6 +8600,7 @@
           <a:lstStyle/>
           <a:p>
             <a:pPr algn="ctr"/>
+            <a:endParaRPr/>
           </a:p>
         </p:txBody>
       </p:sp>
@@ -8075,8 +8612,8 @@
         </p:nvSpPr>
         <p:spPr>
           <a:xfrm>
-            <a:off x="21605200" y="34263284"/>
-            <a:ext cx="2096747" cy="12385"/>
+            <a:off x="21605200" y="33843384"/>
+            <a:ext cx="2096747" cy="12387"/>
           </a:xfrm>
           <a:prstGeom prst="rect">
             <a:avLst/>
@@ -8093,6 +8630,7 @@
           <a:lstStyle/>
           <a:p>
             <a:pPr algn="ctr"/>
+            <a:endParaRPr/>
           </a:p>
         </p:txBody>
       </p:sp>
@@ -8104,7 +8642,7 @@
         </p:nvSpPr>
         <p:spPr>
           <a:xfrm>
-            <a:off x="23701947" y="33726161"/>
+            <a:off x="23701947" y="33306261"/>
             <a:ext cx="3328730" cy="546650"/>
           </a:xfrm>
           <a:prstGeom prst="rect">
@@ -8134,6 +8672,7 @@
           <a:lstStyle/>
           <a:p>
             <a:pPr algn="ctr"/>
+            <a:endParaRPr/>
           </a:p>
         </p:txBody>
       </p:sp>
@@ -8145,8 +8684,8 @@
         </p:nvSpPr>
         <p:spPr>
           <a:xfrm>
-            <a:off x="23701947" y="34263284"/>
-            <a:ext cx="3328730" cy="12385"/>
+            <a:off x="23701947" y="33843384"/>
+            <a:ext cx="3328730" cy="12387"/>
           </a:xfrm>
           <a:prstGeom prst="rect">
             <a:avLst/>
@@ -8163,6 +8702,7 @@
           <a:lstStyle/>
           <a:p>
             <a:pPr algn="ctr"/>
+            <a:endParaRPr/>
           </a:p>
         </p:txBody>
       </p:sp>
@@ -8174,7 +8714,7 @@
         </p:nvSpPr>
         <p:spPr>
           <a:xfrm>
-            <a:off x="27030677" y="33726161"/>
+            <a:off x="27030677" y="33306261"/>
             <a:ext cx="2526158" cy="546650"/>
           </a:xfrm>
           <a:prstGeom prst="rect">
@@ -8204,6 +8744,7 @@
           <a:lstStyle/>
           <a:p>
             <a:pPr algn="ctr"/>
+            <a:endParaRPr/>
           </a:p>
         </p:txBody>
       </p:sp>
@@ -8215,8 +8756,8 @@
         </p:nvSpPr>
         <p:spPr>
           <a:xfrm>
-            <a:off x="27030677" y="34263284"/>
-            <a:ext cx="2526158" cy="12385"/>
+            <a:off x="27030677" y="33843384"/>
+            <a:ext cx="2526158" cy="12387"/>
           </a:xfrm>
           <a:prstGeom prst="rect">
             <a:avLst/>
@@ -8233,6 +8774,7 @@
           <a:lstStyle/>
           <a:p>
             <a:pPr algn="ctr"/>
+            <a:endParaRPr/>
           </a:p>
         </p:txBody>
       </p:sp>
@@ -8244,7 +8786,7 @@
         </p:nvSpPr>
         <p:spPr>
           <a:xfrm>
-            <a:off x="709729" y="33823767"/>
+            <a:off x="709729" y="33403867"/>
             <a:ext cx="5872592" cy="519717"/>
           </a:xfrm>
           <a:prstGeom prst="rect">
@@ -8274,6 +8816,7 @@
           <a:lstStyle/>
           <a:p>
             <a:pPr algn="ctr"/>
+            <a:endParaRPr/>
           </a:p>
         </p:txBody>
       </p:sp>
@@ -8285,7 +8828,7 @@
         </p:nvSpPr>
         <p:spPr>
           <a:xfrm>
-            <a:off x="709729" y="34333957"/>
+            <a:off x="709729" y="33914057"/>
             <a:ext cx="5872592" cy="12385"/>
           </a:xfrm>
           <a:prstGeom prst="rect">
@@ -8303,6 +8846,7 @@
           <a:lstStyle/>
           <a:p>
             <a:pPr algn="ctr"/>
+            <a:endParaRPr/>
           </a:p>
         </p:txBody>
       </p:sp>
@@ -8314,7 +8858,7 @@
         </p:nvSpPr>
         <p:spPr>
           <a:xfrm>
-            <a:off x="6582321" y="33823767"/>
+            <a:off x="6582321" y="33403867"/>
             <a:ext cx="4054825" cy="519717"/>
           </a:xfrm>
           <a:prstGeom prst="rect">
@@ -8344,6 +8888,7 @@
           <a:lstStyle/>
           <a:p>
             <a:pPr algn="ctr"/>
+            <a:endParaRPr/>
           </a:p>
         </p:txBody>
       </p:sp>
@@ -8355,7 +8900,7 @@
         </p:nvSpPr>
         <p:spPr>
           <a:xfrm>
-            <a:off x="6582321" y="34333957"/>
+            <a:off x="6582321" y="33914057"/>
             <a:ext cx="4054825" cy="12385"/>
           </a:xfrm>
           <a:prstGeom prst="rect">
@@ -8373,6 +8918,7 @@
           <a:lstStyle/>
           <a:p>
             <a:pPr algn="ctr"/>
+            <a:endParaRPr/>
           </a:p>
         </p:txBody>
       </p:sp>
@@ -8384,7 +8930,7 @@
         </p:nvSpPr>
         <p:spPr>
           <a:xfrm>
-            <a:off x="10637146" y="33823767"/>
+            <a:off x="10637146" y="33403867"/>
             <a:ext cx="4054973" cy="519717"/>
           </a:xfrm>
           <a:prstGeom prst="rect">
@@ -8414,6 +8960,7 @@
           <a:lstStyle/>
           <a:p>
             <a:pPr algn="ctr"/>
+            <a:endParaRPr/>
           </a:p>
         </p:txBody>
       </p:sp>
@@ -8425,7 +8972,7 @@
         </p:nvSpPr>
         <p:spPr>
           <a:xfrm>
-            <a:off x="10637146" y="34333957"/>
+            <a:off x="10637146" y="33914057"/>
             <a:ext cx="4054973" cy="12385"/>
           </a:xfrm>
           <a:prstGeom prst="rect">
@@ -8443,6 +8990,7 @@
           <a:lstStyle/>
           <a:p>
             <a:pPr algn="ctr"/>
+            <a:endParaRPr/>
           </a:p>
         </p:txBody>
       </p:sp>
@@ -8454,8 +9002,8 @@
         </p:nvSpPr>
         <p:spPr>
           <a:xfrm>
-            <a:off x="15574443" y="34272811"/>
-            <a:ext cx="6030757" cy="546647"/>
+            <a:off x="15574443" y="33852911"/>
+            <a:ext cx="6030757" cy="546649"/>
           </a:xfrm>
           <a:prstGeom prst="rect">
             <a:avLst/>
@@ -8484,6 +9032,7 @@
           <a:lstStyle/>
           <a:p>
             <a:pPr algn="ctr"/>
+            <a:endParaRPr/>
           </a:p>
         </p:txBody>
       </p:sp>
@@ -8495,8 +9044,8 @@
         </p:nvSpPr>
         <p:spPr>
           <a:xfrm>
-            <a:off x="15574443" y="34809932"/>
-            <a:ext cx="6030757" cy="12384"/>
+            <a:off x="15574443" y="34390034"/>
+            <a:ext cx="6030757" cy="12382"/>
           </a:xfrm>
           <a:prstGeom prst="rect">
             <a:avLst/>
@@ -8513,6 +9062,7 @@
           <a:lstStyle/>
           <a:p>
             <a:pPr algn="ctr"/>
+            <a:endParaRPr/>
           </a:p>
         </p:txBody>
       </p:sp>
@@ -8524,8 +9074,8 @@
         </p:nvSpPr>
         <p:spPr>
           <a:xfrm>
-            <a:off x="21605200" y="34272811"/>
-            <a:ext cx="2096747" cy="546647"/>
+            <a:off x="21605200" y="33852911"/>
+            <a:ext cx="2096747" cy="546649"/>
           </a:xfrm>
           <a:prstGeom prst="rect">
             <a:avLst/>
@@ -8554,6 +9104,7 @@
           <a:lstStyle/>
           <a:p>
             <a:pPr algn="ctr"/>
+            <a:endParaRPr/>
           </a:p>
         </p:txBody>
       </p:sp>
@@ -8565,8 +9116,8 @@
         </p:nvSpPr>
         <p:spPr>
           <a:xfrm>
-            <a:off x="21605200" y="34809932"/>
-            <a:ext cx="2096747" cy="12384"/>
+            <a:off x="21605200" y="34390034"/>
+            <a:ext cx="2096747" cy="12382"/>
           </a:xfrm>
           <a:prstGeom prst="rect">
             <a:avLst/>
@@ -8583,6 +9134,7 @@
           <a:lstStyle/>
           <a:p>
             <a:pPr algn="ctr"/>
+            <a:endParaRPr/>
           </a:p>
         </p:txBody>
       </p:sp>
@@ -8594,8 +9146,8 @@
         </p:nvSpPr>
         <p:spPr>
           <a:xfrm>
-            <a:off x="23701947" y="34272811"/>
-            <a:ext cx="3328730" cy="546647"/>
+            <a:off x="23701947" y="33852911"/>
+            <a:ext cx="3328730" cy="546649"/>
           </a:xfrm>
           <a:prstGeom prst="rect">
             <a:avLst/>
@@ -8624,6 +9176,7 @@
           <a:lstStyle/>
           <a:p>
             <a:pPr algn="ctr"/>
+            <a:endParaRPr/>
           </a:p>
         </p:txBody>
       </p:sp>
@@ -8635,8 +9188,8 @@
         </p:nvSpPr>
         <p:spPr>
           <a:xfrm>
-            <a:off x="23701947" y="34809932"/>
-            <a:ext cx="3328730" cy="12384"/>
+            <a:off x="23701947" y="34390034"/>
+            <a:ext cx="3328730" cy="12382"/>
           </a:xfrm>
           <a:prstGeom prst="rect">
             <a:avLst/>
@@ -8653,6 +9206,7 @@
           <a:lstStyle/>
           <a:p>
             <a:pPr algn="ctr"/>
+            <a:endParaRPr/>
           </a:p>
         </p:txBody>
       </p:sp>
@@ -8664,8 +9218,8 @@
         </p:nvSpPr>
         <p:spPr>
           <a:xfrm>
-            <a:off x="27030677" y="34272811"/>
-            <a:ext cx="2526158" cy="546647"/>
+            <a:off x="27030677" y="33852911"/>
+            <a:ext cx="2526158" cy="546649"/>
           </a:xfrm>
           <a:prstGeom prst="rect">
             <a:avLst/>
@@ -8694,6 +9248,7 @@
           <a:lstStyle/>
           <a:p>
             <a:pPr algn="ctr"/>
+            <a:endParaRPr/>
           </a:p>
         </p:txBody>
       </p:sp>
@@ -8705,8 +9260,8 @@
         </p:nvSpPr>
         <p:spPr>
           <a:xfrm>
-            <a:off x="27030677" y="34809932"/>
-            <a:ext cx="2526158" cy="12384"/>
+            <a:off x="27030677" y="34390034"/>
+            <a:ext cx="2526158" cy="12382"/>
           </a:xfrm>
           <a:prstGeom prst="rect">
             <a:avLst/>
@@ -8723,6 +9278,7 @@
           <a:lstStyle/>
           <a:p>
             <a:pPr algn="ctr"/>
+            <a:endParaRPr/>
           </a:p>
         </p:txBody>
       </p:sp>
@@ -8734,7 +9290,7 @@
         </p:nvSpPr>
         <p:spPr>
           <a:xfrm>
-            <a:off x="709729" y="34343484"/>
+            <a:off x="709729" y="33923584"/>
             <a:ext cx="5872592" cy="519719"/>
           </a:xfrm>
           <a:prstGeom prst="rect">
@@ -8764,6 +9320,7 @@
           <a:lstStyle/>
           <a:p>
             <a:pPr algn="ctr"/>
+            <a:endParaRPr/>
           </a:p>
         </p:txBody>
       </p:sp>
@@ -8775,7 +9332,7 @@
         </p:nvSpPr>
         <p:spPr>
           <a:xfrm>
-            <a:off x="709729" y="34853676"/>
+            <a:off x="709729" y="34433776"/>
             <a:ext cx="5872592" cy="12385"/>
           </a:xfrm>
           <a:prstGeom prst="rect">
@@ -8793,6 +9350,7 @@
           <a:lstStyle/>
           <a:p>
             <a:pPr algn="ctr"/>
+            <a:endParaRPr/>
           </a:p>
         </p:txBody>
       </p:sp>
@@ -8804,7 +9362,7 @@
         </p:nvSpPr>
         <p:spPr>
           <a:xfrm>
-            <a:off x="6582321" y="34343484"/>
+            <a:off x="6582321" y="33923584"/>
             <a:ext cx="4054825" cy="519719"/>
           </a:xfrm>
           <a:prstGeom prst="rect">
@@ -8834,6 +9392,7 @@
           <a:lstStyle/>
           <a:p>
             <a:pPr algn="ctr"/>
+            <a:endParaRPr/>
           </a:p>
         </p:txBody>
       </p:sp>
@@ -8845,7 +9404,7 @@
         </p:nvSpPr>
         <p:spPr>
           <a:xfrm>
-            <a:off x="6582321" y="34853676"/>
+            <a:off x="6582321" y="34433776"/>
             <a:ext cx="4054825" cy="12385"/>
           </a:xfrm>
           <a:prstGeom prst="rect">
@@ -8863,6 +9422,7 @@
           <a:lstStyle/>
           <a:p>
             <a:pPr algn="ctr"/>
+            <a:endParaRPr/>
           </a:p>
         </p:txBody>
       </p:sp>
@@ -8874,7 +9434,7 @@
         </p:nvSpPr>
         <p:spPr>
           <a:xfrm>
-            <a:off x="10637146" y="34343484"/>
+            <a:off x="10637146" y="33923584"/>
             <a:ext cx="4054973" cy="519719"/>
           </a:xfrm>
           <a:prstGeom prst="rect">
@@ -8904,6 +9464,7 @@
           <a:lstStyle/>
           <a:p>
             <a:pPr algn="ctr"/>
+            <a:endParaRPr/>
           </a:p>
         </p:txBody>
       </p:sp>
@@ -8915,7 +9476,7 @@
         </p:nvSpPr>
         <p:spPr>
           <a:xfrm>
-            <a:off x="10637146" y="34853676"/>
+            <a:off x="10637146" y="34433776"/>
             <a:ext cx="4054973" cy="12385"/>
           </a:xfrm>
           <a:prstGeom prst="rect">
@@ -8933,6 +9494,7 @@
           <a:lstStyle/>
           <a:p>
             <a:pPr algn="ctr"/>
+            <a:endParaRPr/>
           </a:p>
         </p:txBody>
       </p:sp>
@@ -8944,8 +9506,8 @@
         </p:nvSpPr>
         <p:spPr>
           <a:xfrm>
-            <a:off x="15574443" y="34819458"/>
-            <a:ext cx="6030757" cy="546648"/>
+            <a:off x="15574443" y="34399560"/>
+            <a:ext cx="6030757" cy="546646"/>
           </a:xfrm>
           <a:prstGeom prst="rect">
             <a:avLst/>
@@ -8974,6 +9536,7 @@
           <a:lstStyle/>
           <a:p>
             <a:pPr algn="ctr"/>
+            <a:endParaRPr/>
           </a:p>
         </p:txBody>
       </p:sp>
@@ -8985,8 +9548,8 @@
         </p:nvSpPr>
         <p:spPr>
           <a:xfrm>
-            <a:off x="15574443" y="35356579"/>
-            <a:ext cx="6030757" cy="12385"/>
+            <a:off x="15574443" y="34936681"/>
+            <a:ext cx="6030757" cy="12383"/>
           </a:xfrm>
           <a:prstGeom prst="rect">
             <a:avLst/>
@@ -9003,6 +9566,7 @@
           <a:lstStyle/>
           <a:p>
             <a:pPr algn="ctr"/>
+            <a:endParaRPr/>
           </a:p>
         </p:txBody>
       </p:sp>
@@ -9014,8 +9578,8 @@
         </p:nvSpPr>
         <p:spPr>
           <a:xfrm>
-            <a:off x="21605200" y="34819458"/>
-            <a:ext cx="2096747" cy="546648"/>
+            <a:off x="21605200" y="34399560"/>
+            <a:ext cx="2096747" cy="546646"/>
           </a:xfrm>
           <a:prstGeom prst="rect">
             <a:avLst/>
@@ -9044,6 +9608,7 @@
           <a:lstStyle/>
           <a:p>
             <a:pPr algn="ctr"/>
+            <a:endParaRPr/>
           </a:p>
         </p:txBody>
       </p:sp>
@@ -9055,8 +9620,8 @@
         </p:nvSpPr>
         <p:spPr>
           <a:xfrm>
-            <a:off x="21605200" y="35356579"/>
-            <a:ext cx="2096747" cy="12385"/>
+            <a:off x="21605200" y="34936681"/>
+            <a:ext cx="2096747" cy="12383"/>
           </a:xfrm>
           <a:prstGeom prst="rect">
             <a:avLst/>
@@ -9073,6 +9638,7 @@
           <a:lstStyle/>
           <a:p>
             <a:pPr algn="ctr"/>
+            <a:endParaRPr/>
           </a:p>
         </p:txBody>
       </p:sp>
@@ -9084,8 +9650,8 @@
         </p:nvSpPr>
         <p:spPr>
           <a:xfrm>
-            <a:off x="23701947" y="34819458"/>
-            <a:ext cx="3328730" cy="546648"/>
+            <a:off x="23701947" y="34399560"/>
+            <a:ext cx="3328730" cy="546646"/>
           </a:xfrm>
           <a:prstGeom prst="rect">
             <a:avLst/>
@@ -9114,6 +9680,7 @@
           <a:lstStyle/>
           <a:p>
             <a:pPr algn="ctr"/>
+            <a:endParaRPr/>
           </a:p>
         </p:txBody>
       </p:sp>
@@ -9125,8 +9692,8 @@
         </p:nvSpPr>
         <p:spPr>
           <a:xfrm>
-            <a:off x="23701947" y="35356579"/>
-            <a:ext cx="3328730" cy="12385"/>
+            <a:off x="23701947" y="34936681"/>
+            <a:ext cx="3328730" cy="12383"/>
           </a:xfrm>
           <a:prstGeom prst="rect">
             <a:avLst/>
@@ -9143,6 +9710,7 @@
           <a:lstStyle/>
           <a:p>
             <a:pPr algn="ctr"/>
+            <a:endParaRPr/>
           </a:p>
         </p:txBody>
       </p:sp>
@@ -9154,8 +9722,8 @@
         </p:nvSpPr>
         <p:spPr>
           <a:xfrm>
-            <a:off x="27030677" y="34819458"/>
-            <a:ext cx="2526158" cy="546648"/>
+            <a:off x="27030677" y="34399560"/>
+            <a:ext cx="2526158" cy="546646"/>
           </a:xfrm>
           <a:prstGeom prst="rect">
             <a:avLst/>
@@ -9184,6 +9752,7 @@
           <a:lstStyle/>
           <a:p>
             <a:pPr algn="ctr"/>
+            <a:endParaRPr/>
           </a:p>
         </p:txBody>
       </p:sp>
@@ -9195,8 +9764,8 @@
         </p:nvSpPr>
         <p:spPr>
           <a:xfrm>
-            <a:off x="27030677" y="35356579"/>
-            <a:ext cx="2526158" cy="12385"/>
+            <a:off x="27030677" y="34936681"/>
+            <a:ext cx="2526158" cy="12383"/>
           </a:xfrm>
           <a:prstGeom prst="rect">
             <a:avLst/>
@@ -9213,6 +9782,7 @@
           <a:lstStyle/>
           <a:p>
             <a:pPr algn="ctr"/>
+            <a:endParaRPr/>
           </a:p>
         </p:txBody>
       </p:sp>
@@ -9233,7 +9803,7 @@
           <a:noFill/>
         </p:spPr>
         <p:txBody>
-          <a:bodyPr wrap="none" lIns="0" rIns="0" tIns="0" bIns="0">
+          <a:bodyPr wrap="none" lIns="0" tIns="0" rIns="0" bIns="0">
             <a:spAutoFit/>
           </a:bodyPr>
           <a:lstStyle/>
@@ -9313,7 +9883,7 @@
         </p:nvSpPr>
         <p:spPr>
           <a:xfrm rot="16200000">
-            <a:off x="-2346121" y="15358120"/>
+            <a:off x="-2346121" y="14078632"/>
             <a:ext cx="8183688" cy="2071989"/>
           </a:xfrm>
           <a:prstGeom prst="rect">
@@ -9322,7 +9892,7 @@
           <a:noFill/>
         </p:spPr>
         <p:txBody>
-          <a:bodyPr wrap="none" lIns="177833" rIns="177833" tIns="101618" bIns="101618" anchor="ctr">
+          <a:bodyPr wrap="none" lIns="177833" tIns="101618" rIns="177833" bIns="101618" anchor="ctr">
             <a:spAutoFit/>
           </a:bodyPr>
           <a:lstStyle/>
@@ -9359,7 +9929,7 @@
         <p:spPr>
           <a:xfrm>
             <a:off x="757341" y="38012606"/>
-            <a:ext cx="29256781" cy="1204592"/>
+            <a:ext cx="29209168" cy="1204592"/>
           </a:xfrm>
           <a:prstGeom prst="rect">
             <a:avLst/>
@@ -9367,7 +9937,7 @@
           <a:noFill/>
         </p:spPr>
         <p:txBody>
-          <a:bodyPr wrap="square" lIns="0" rIns="228643" tIns="0" bIns="190533">
+          <a:bodyPr wrap="square" lIns="0" tIns="0" rIns="228643" bIns="190533">
             <a:spAutoFit/>
           </a:bodyPr>
           <a:lstStyle/>
@@ -9404,7 +9974,7 @@
         <p:spPr>
           <a:xfrm>
             <a:off x="757341" y="39402885"/>
-            <a:ext cx="29256781" cy="1307596"/>
+            <a:ext cx="29209168" cy="1307596"/>
           </a:xfrm>
           <a:prstGeom prst="rect">
             <a:avLst/>
@@ -9412,7 +9982,7 @@
           <a:noFill/>
         </p:spPr>
         <p:txBody>
-          <a:bodyPr wrap="none" lIns="248966" rIns="248966" tIns="106698" bIns="106698">
+          <a:bodyPr wrap="none" lIns="248966" tIns="106698" rIns="248966" bIns="106698">
             <a:spAutoFit/>
           </a:bodyPr>
           <a:lstStyle/>
@@ -9471,7 +10041,7 @@
         <p:spPr>
           <a:xfrm>
             <a:off x="757341" y="40539925"/>
-            <a:ext cx="29256781" cy="1778140"/>
+            <a:ext cx="29209168" cy="1778140"/>
           </a:xfrm>
           <a:prstGeom prst="rect">
             <a:avLst/>
@@ -9479,7 +10049,7 @@
           <a:noFill/>
         </p:spPr>
         <p:txBody>
-          <a:bodyPr wrap="none" lIns="0" rIns="0" tIns="0" bIns="0">
+          <a:bodyPr wrap="none" lIns="0" tIns="0" rIns="0" bIns="0">
             <a:spAutoFit/>
           </a:bodyPr>
           <a:lstStyle/>
@@ -9559,7 +10129,7 @@
         </p:nvSpPr>
         <p:spPr>
           <a:xfrm>
-            <a:off x="709729" y="7588951"/>
+            <a:off x="709729" y="5608192"/>
             <a:ext cx="14401861" cy="1204590"/>
           </a:xfrm>
           <a:prstGeom prst="rect">
@@ -9568,7 +10138,7 @@
           <a:noFill/>
         </p:spPr>
         <p:txBody>
-          <a:bodyPr wrap="square" lIns="0" rIns="228643" tIns="0" bIns="190533">
+          <a:bodyPr wrap="square" lIns="0" tIns="0" rIns="228643" bIns="190533">
             <a:spAutoFit/>
           </a:bodyPr>
           <a:lstStyle/>
@@ -9604,7 +10174,7 @@
         </p:nvSpPr>
         <p:spPr>
           <a:xfrm>
-            <a:off x="15574443" y="7588951"/>
+            <a:off x="15574443" y="5608192"/>
             <a:ext cx="14401863" cy="1204590"/>
           </a:xfrm>
           <a:prstGeom prst="rect">
@@ -9613,7 +10183,7 @@
           <a:noFill/>
         </p:spPr>
         <p:txBody>
-          <a:bodyPr wrap="square" lIns="0" rIns="228643" tIns="0" bIns="190533">
+          <a:bodyPr wrap="square" lIns="0" tIns="0" rIns="228643" bIns="190533">
             <a:spAutoFit/>
           </a:bodyPr>
           <a:lstStyle/>
@@ -9649,8 +10219,8 @@
         </p:nvSpPr>
         <p:spPr>
           <a:xfrm>
-            <a:off x="709729" y="8979230"/>
-            <a:ext cx="14401861" cy="1324023"/>
+            <a:off x="709729" y="6998471"/>
+            <a:ext cx="14401861" cy="1324022"/>
           </a:xfrm>
           <a:prstGeom prst="rect">
             <a:avLst/>
@@ -9658,7 +10228,7 @@
           <a:noFill/>
         </p:spPr>
         <p:txBody>
-          <a:bodyPr wrap="none" lIns="248966" rIns="248966" tIns="42679" bIns="42679">
+          <a:bodyPr wrap="none" lIns="248966" tIns="42679" rIns="248966" bIns="42679">
             <a:spAutoFit/>
           </a:bodyPr>
           <a:lstStyle/>
@@ -9716,7 +10286,7 @@
         </p:nvSpPr>
         <p:spPr>
           <a:xfrm>
-            <a:off x="709729" y="10130555"/>
+            <a:off x="709729" y="8149796"/>
             <a:ext cx="14401861" cy="1986546"/>
           </a:xfrm>
           <a:prstGeom prst="rect">
@@ -9725,7 +10295,7 @@
           <a:noFill/>
         </p:spPr>
         <p:txBody>
-          <a:bodyPr wrap="none" lIns="0" rIns="0" tIns="0" bIns="0">
+          <a:bodyPr wrap="none" lIns="0" tIns="0" rIns="0" bIns="0">
             <a:spAutoFit/>
           </a:bodyPr>
           <a:lstStyle/>
@@ -9883,8 +10453,8 @@
         </p:nvSpPr>
         <p:spPr>
           <a:xfrm>
-            <a:off x="709729" y="20072297"/>
-            <a:ext cx="12124819" cy="1204590"/>
+            <a:off x="709729" y="18792809"/>
+            <a:ext cx="12124819" cy="1204589"/>
           </a:xfrm>
           <a:prstGeom prst="rect">
             <a:avLst/>
@@ -9892,7 +10462,7 @@
           <a:noFill/>
         </p:spPr>
         <p:txBody>
-          <a:bodyPr wrap="square" lIns="0" rIns="228643" tIns="0" bIns="190533">
+          <a:bodyPr wrap="square" lIns="0" tIns="0" rIns="228643" bIns="190533">
             <a:spAutoFit/>
           </a:bodyPr>
           <a:lstStyle/>
@@ -9928,8 +10498,8 @@
         </p:nvSpPr>
         <p:spPr>
           <a:xfrm>
-            <a:off x="13363722" y="20072297"/>
-            <a:ext cx="7885055" cy="1204590"/>
+            <a:off x="13363722" y="18792809"/>
+            <a:ext cx="7885055" cy="1204589"/>
           </a:xfrm>
           <a:prstGeom prst="rect">
             <a:avLst/>
@@ -9937,7 +10507,7 @@
           <a:noFill/>
         </p:spPr>
         <p:txBody>
-          <a:bodyPr wrap="square" lIns="0" rIns="228643" tIns="0" bIns="190533">
+          <a:bodyPr wrap="square" lIns="0" tIns="0" rIns="228643" bIns="190533">
             <a:spAutoFit/>
           </a:bodyPr>
           <a:lstStyle/>
@@ -9973,8 +10543,8 @@
         </p:nvSpPr>
         <p:spPr>
           <a:xfrm>
-            <a:off x="21901440" y="20072297"/>
-            <a:ext cx="7885056" cy="1204590"/>
+            <a:off x="21901440" y="18792809"/>
+            <a:ext cx="7885056" cy="1204589"/>
           </a:xfrm>
           <a:prstGeom prst="rect">
             <a:avLst/>
@@ -9982,7 +10552,7 @@
           <a:noFill/>
         </p:spPr>
         <p:txBody>
-          <a:bodyPr wrap="square" lIns="0" rIns="228643" tIns="0" bIns="190533">
+          <a:bodyPr wrap="square" lIns="0" tIns="0" rIns="228643" bIns="190533">
             <a:spAutoFit/>
           </a:bodyPr>
           <a:lstStyle/>
@@ -10018,7 +10588,7 @@
         </p:nvSpPr>
         <p:spPr>
           <a:xfrm>
-            <a:off x="13363722" y="27595932"/>
+            <a:off x="13363722" y="26316443"/>
             <a:ext cx="7885055" cy="1778139"/>
           </a:xfrm>
           <a:prstGeom prst="rect">
@@ -10027,7 +10597,7 @@
           <a:noFill/>
         </p:spPr>
         <p:txBody>
-          <a:bodyPr wrap="none" lIns="0" rIns="0" tIns="0" bIns="0">
+          <a:bodyPr wrap="none" lIns="0" tIns="0" rIns="0" bIns="0">
             <a:spAutoFit/>
           </a:bodyPr>
           <a:lstStyle/>
@@ -10116,7 +10686,7 @@
         </p:nvSpPr>
         <p:spPr>
           <a:xfrm>
-            <a:off x="709729" y="30166102"/>
+            <a:off x="709729" y="29746202"/>
             <a:ext cx="14401861" cy="1204589"/>
           </a:xfrm>
           <a:prstGeom prst="rect">
@@ -10125,7 +10695,7 @@
           <a:noFill/>
         </p:spPr>
         <p:txBody>
-          <a:bodyPr wrap="square" lIns="0" rIns="228643" tIns="0" bIns="190533">
+          <a:bodyPr wrap="square" lIns="0" tIns="0" rIns="228643" bIns="190533">
             <a:spAutoFit/>
           </a:bodyPr>
           <a:lstStyle/>
@@ -10161,7 +10731,7 @@
         </p:nvSpPr>
         <p:spPr>
           <a:xfrm>
-            <a:off x="15574443" y="30166102"/>
+            <a:off x="15574443" y="29746202"/>
             <a:ext cx="14401863" cy="1204589"/>
           </a:xfrm>
           <a:prstGeom prst="rect">
@@ -10170,7 +10740,7 @@
           <a:noFill/>
         </p:spPr>
         <p:txBody>
-          <a:bodyPr wrap="square" lIns="0" rIns="228643" tIns="0" bIns="190533">
+          <a:bodyPr wrap="square" lIns="0" tIns="0" rIns="228643" bIns="190533">
             <a:spAutoFit/>
           </a:bodyPr>
           <a:lstStyle/>
@@ -10206,7 +10776,7 @@
         </p:nvSpPr>
         <p:spPr>
           <a:xfrm>
-            <a:off x="15574443" y="31556381"/>
+            <a:off x="15574443" y="31136481"/>
             <a:ext cx="14401863" cy="1821941"/>
           </a:xfrm>
           <a:prstGeom prst="rect">
@@ -10215,7 +10785,7 @@
           <a:noFill/>
         </p:spPr>
         <p:txBody>
-          <a:bodyPr wrap="none" lIns="0" rIns="0" tIns="0" bIns="0">
+          <a:bodyPr wrap="none" lIns="0" tIns="0" rIns="0" bIns="0">
             <a:spAutoFit/>
           </a:bodyPr>
           <a:lstStyle/>
@@ -10355,7 +10925,7 @@
         </p:nvSpPr>
         <p:spPr>
           <a:xfrm>
-            <a:off x="709729" y="34867964"/>
+            <a:off x="709729" y="34448064"/>
             <a:ext cx="14401861" cy="1185424"/>
           </a:xfrm>
           <a:prstGeom prst="rect">
@@ -10364,7 +10934,7 @@
           <a:noFill/>
         </p:spPr>
         <p:txBody>
-          <a:bodyPr wrap="none" lIns="0" rIns="0" tIns="0" bIns="0">
+          <a:bodyPr wrap="none" lIns="0" tIns="0" rIns="0" bIns="0">
             <a:spAutoFit/>
           </a:bodyPr>
           <a:lstStyle/>
@@ -10431,7 +11001,7 @@
         </p:nvSpPr>
         <p:spPr>
           <a:xfrm>
-            <a:off x="709729" y="36076422"/>
+            <a:off x="709729" y="35656522"/>
             <a:ext cx="14401861" cy="1233165"/>
           </a:xfrm>
           <a:prstGeom prst="rect">
@@ -10440,7 +11010,7 @@
           <a:noFill/>
         </p:spPr>
         <p:txBody>
-          <a:bodyPr wrap="square" lIns="0" rIns="0" tIns="147244" bIns="0">
+          <a:bodyPr wrap="square" lIns="0" tIns="147244" rIns="0" bIns="0">
             <a:spAutoFit/>
           </a:bodyPr>
           <a:lstStyle/>
@@ -10485,8 +11055,8 @@
         </p:nvSpPr>
         <p:spPr>
           <a:xfrm>
-            <a:off x="15574443" y="36458213"/>
-            <a:ext cx="14401863" cy="592714"/>
+            <a:off x="15574443" y="36038313"/>
+            <a:ext cx="14401863" cy="592716"/>
           </a:xfrm>
           <a:prstGeom prst="rect">
             <a:avLst/>
@@ -10494,7 +11064,7 @@
           <a:noFill/>
         </p:spPr>
         <p:txBody>
-          <a:bodyPr wrap="square" lIns="0" rIns="0" tIns="0" bIns="0">
+          <a:bodyPr wrap="square" lIns="0" tIns="0" rIns="0" bIns="0">
             <a:spAutoFit/>
           </a:bodyPr>
           <a:lstStyle/>
@@ -10539,7 +11109,7 @@
           <a:noFill/>
         </p:spPr>
         <p:txBody>
-          <a:bodyPr wrap="square" lIns="0" rIns="0" tIns="0" bIns="0">
+          <a:bodyPr wrap="square" lIns="0" tIns="0" rIns="0" bIns="0">
             <a:spAutoFit/>
           </a:bodyPr>
           <a:lstStyle/>
@@ -10629,7 +11199,7 @@
           <a:noFill/>
         </p:spPr>
         <p:txBody>
-          <a:bodyPr wrap="square" lIns="0" rIns="0" tIns="0" bIns="0">
+          <a:bodyPr wrap="square" lIns="0" tIns="0" rIns="0" bIns="0">
             <a:spAutoFit/>
           </a:bodyPr>
           <a:lstStyle/>
@@ -10665,8 +11235,8 @@
         </p:nvSpPr>
         <p:spPr>
           <a:xfrm>
-            <a:off x="12880304" y="5071303"/>
-            <a:ext cx="2993503" cy="788459"/>
+            <a:off x="1207633" y="3090544"/>
+            <a:ext cx="2993502" cy="788459"/>
           </a:xfrm>
           <a:prstGeom prst="rect">
             <a:avLst/>
@@ -10674,7 +11244,7 @@
           <a:noFill/>
         </p:spPr>
         <p:txBody>
-          <a:bodyPr wrap="none" lIns="0" rIns="0" tIns="0" bIns="0">
+          <a:bodyPr wrap="none" lIns="0" tIns="0" rIns="0" bIns="0">
             <a:spAutoFit/>
           </a:bodyPr>
           <a:lstStyle/>
@@ -10710,7 +11280,7 @@
         </p:nvSpPr>
         <p:spPr>
           <a:xfrm>
-            <a:off x="13881065" y="5810186"/>
+            <a:off x="2208394" y="3829427"/>
             <a:ext cx="931782" cy="592713"/>
           </a:xfrm>
           <a:prstGeom prst="rect">
@@ -10719,7 +11289,7 @@
           <a:noFill/>
         </p:spPr>
         <p:txBody>
-          <a:bodyPr wrap="none" lIns="0" rIns="0" tIns="0" bIns="0">
+          <a:bodyPr wrap="none" lIns="0" tIns="0" rIns="0" bIns="0">
             <a:spAutoFit/>
           </a:bodyPr>
           <a:lstStyle/>
@@ -10755,7 +11325,7 @@
         </p:nvSpPr>
         <p:spPr>
           <a:xfrm>
-            <a:off x="13674396" y="6439858"/>
+            <a:off x="2001725" y="4459099"/>
             <a:ext cx="1357673" cy="423489"/>
           </a:xfrm>
           <a:prstGeom prst="rect">
@@ -10764,7 +11334,7 @@
           <a:noFill/>
         </p:spPr>
         <p:txBody>
-          <a:bodyPr wrap="none" lIns="0" rIns="0" tIns="0" bIns="0">
+          <a:bodyPr wrap="none" lIns="0" tIns="0" rIns="0" bIns="0">
             <a:spAutoFit/>
           </a:bodyPr>
           <a:lstStyle/>
@@ -10800,8 +11370,8 @@
         </p:nvSpPr>
         <p:spPr>
           <a:xfrm>
-            <a:off x="16303663" y="6556211"/>
-            <a:ext cx="765349" cy="417500"/>
+            <a:off x="4630991" y="4575452"/>
+            <a:ext cx="765350" cy="417500"/>
           </a:xfrm>
           <a:prstGeom prst="rect">
             <a:avLst/>
@@ -10809,7 +11379,7 @@
           <a:noFill/>
         </p:spPr>
         <p:txBody>
-          <a:bodyPr wrap="none" lIns="0" rIns="0" tIns="0" bIns="0">
+          <a:bodyPr wrap="none" lIns="0" tIns="0" rIns="0" bIns="0">
             <a:spAutoFit/>
           </a:bodyPr>
           <a:lstStyle/>
@@ -10845,7 +11415,7 @@
         </p:nvSpPr>
         <p:spPr>
           <a:xfrm>
-            <a:off x="15574230" y="8979230"/>
+            <a:off x="15574230" y="6998471"/>
             <a:ext cx="14402083" cy="1821943"/>
           </a:xfrm>
           <a:prstGeom prst="rect">
@@ -10854,12 +11424,12 @@
           <a:noFill/>
         </p:spPr>
         <p:txBody>
-          <a:bodyPr wrap="none" lIns="0" rIns="0" tIns="0" bIns="0">
+          <a:bodyPr wrap="none" lIns="0" tIns="0" rIns="0" bIns="0">
             <a:spAutoFit/>
           </a:bodyPr>
           <a:lstStyle/>
           <a:p>
-            <a:pPr algn="l" marL="391234" indent="-391234">
+            <a:pPr marL="391234" indent="-391234" algn="l">
               <a:lnSpc>
                 <a:spcPts val="4060"/>
               </a:lnSpc>
@@ -10895,7 +11465,7 @@
             </a:r>
           </a:p>
           <a:p>
-            <a:pPr algn="l" marL="391234" indent="0">
+            <a:pPr marL="391234" indent="0" algn="l">
               <a:lnSpc>
                 <a:spcPts val="4060"/>
               </a:lnSpc>
@@ -10954,7 +11524,7 @@
             </a:r>
           </a:p>
           <a:p>
-            <a:pPr algn="l" marL="391234" indent="0">
+            <a:pPr marL="391234" indent="0" algn="l">
               <a:lnSpc>
                 <a:spcPts val="4060"/>
               </a:lnSpc>
@@ -10986,7 +11556,7 @@
         </p:nvSpPr>
         <p:spPr>
           <a:xfrm>
-            <a:off x="15574443" y="10767816"/>
+            <a:off x="15574443" y="8787057"/>
             <a:ext cx="1458975" cy="955630"/>
           </a:xfrm>
           <a:prstGeom prst="rect">
@@ -10995,7 +11565,7 @@
           <a:noFill/>
         </p:spPr>
         <p:txBody>
-          <a:bodyPr wrap="none" lIns="0" rIns="0" tIns="0" bIns="0">
+          <a:bodyPr wrap="none" lIns="0" tIns="0" rIns="0" bIns="0">
             <a:spAutoFit/>
           </a:bodyPr>
           <a:lstStyle/>
@@ -11031,8 +11601,8 @@
         </p:nvSpPr>
         <p:spPr>
           <a:xfrm>
-            <a:off x="17102814" y="10767816"/>
-            <a:ext cx="12827641" cy="1066677"/>
+            <a:off x="17102814" y="8787057"/>
+            <a:ext cx="12827641" cy="1066678"/>
           </a:xfrm>
           <a:prstGeom prst="rect">
             <a:avLst/>
@@ -11040,7 +11610,7 @@
           <a:noFill/>
         </p:spPr>
         <p:txBody>
-          <a:bodyPr wrap="none" lIns="0" rIns="0" tIns="0" bIns="0">
+          <a:bodyPr wrap="none" lIns="0" tIns="0" rIns="0" bIns="0">
             <a:spAutoFit/>
           </a:bodyPr>
           <a:lstStyle/>
@@ -11057,7 +11627,7 @@
               </a:spcAft>
             </a:pPr>
             <a:r>
-              <a:rPr sz="2520" b="0">
+              <a:rPr sz="2520" b="0" dirty="0">
                 <a:solidFill>
                   <a:srgbClr val="555555"/>
                 </a:solidFill>
@@ -11079,7 +11649,7 @@
               </a:spcAft>
             </a:pPr>
             <a:r>
-              <a:rPr sz="2520" b="0">
+              <a:rPr sz="2520" b="0" dirty="0">
                 <a:solidFill>
                   <a:srgbClr val="555555"/>
                 </a:solidFill>
@@ -11098,8 +11668,8 @@
         </p:nvSpPr>
         <p:spPr>
           <a:xfrm>
-            <a:off x="4906945" y="19075861"/>
-            <a:ext cx="12820897" cy="371985"/>
+            <a:off x="4906945" y="17796372"/>
+            <a:ext cx="12820897" cy="371986"/>
           </a:xfrm>
           <a:prstGeom prst="rect">
             <a:avLst/>
@@ -11107,7 +11677,7 @@
           <a:noFill/>
         </p:spPr>
         <p:txBody>
-          <a:bodyPr wrap="square" lIns="0" rIns="0" tIns="0" bIns="0">
+          <a:bodyPr wrap="square" lIns="0" tIns="0" rIns="0" bIns="0">
             <a:spAutoFit/>
           </a:bodyPr>
           <a:lstStyle/>
@@ -11143,8 +11713,8 @@
         </p:nvSpPr>
         <p:spPr>
           <a:xfrm>
-            <a:off x="23879158" y="21700637"/>
-            <a:ext cx="3810957" cy="1386989"/>
+            <a:off x="23879158" y="20421150"/>
+            <a:ext cx="3810957" cy="1386987"/>
           </a:xfrm>
           <a:prstGeom prst="rect">
             <a:avLst/>
@@ -11152,7 +11722,7 @@
           <a:noFill/>
         </p:spPr>
         <p:txBody>
-          <a:bodyPr wrap="none" lIns="0" rIns="0" tIns="0" bIns="0">
+          <a:bodyPr wrap="none" lIns="0" tIns="0" rIns="0" bIns="0">
             <a:spAutoFit/>
           </a:bodyPr>
           <a:lstStyle/>
@@ -11188,8 +11758,8 @@
         </p:nvSpPr>
         <p:spPr>
           <a:xfrm>
-            <a:off x="22164799" y="22980217"/>
-            <a:ext cx="7342537" cy="1542014"/>
+            <a:off x="22164799" y="21700728"/>
+            <a:ext cx="7342537" cy="1542016"/>
           </a:xfrm>
           <a:prstGeom prst="rect">
             <a:avLst/>
@@ -11197,7 +11767,7 @@
           <a:noFill/>
         </p:spPr>
         <p:txBody>
-          <a:bodyPr wrap="none" lIns="0" rIns="0" tIns="0" bIns="0">
+          <a:bodyPr wrap="none" lIns="0" tIns="0" rIns="0" bIns="0">
             <a:spAutoFit/>
           </a:bodyPr>
           <a:lstStyle/>
@@ -11277,7 +11847,7 @@
         </p:nvSpPr>
         <p:spPr>
           <a:xfrm>
-            <a:off x="13669932" y="24804214"/>
+            <a:off x="13669932" y="23524725"/>
             <a:ext cx="7254110" cy="871275"/>
           </a:xfrm>
           <a:prstGeom prst="rect">
@@ -11286,7 +11856,7 @@
           <a:noFill/>
         </p:spPr>
         <p:txBody>
-          <a:bodyPr wrap="none" lIns="0" rIns="0" tIns="0" bIns="0">
+          <a:bodyPr wrap="none" lIns="0" tIns="0" rIns="0" bIns="0">
             <a:spAutoFit/>
           </a:bodyPr>
           <a:lstStyle/>
@@ -11344,7 +11914,7 @@
         </p:nvSpPr>
         <p:spPr>
           <a:xfrm>
-            <a:off x="13363722" y="25660938"/>
+            <a:off x="13363722" y="24381449"/>
             <a:ext cx="1707552" cy="955630"/>
           </a:xfrm>
           <a:prstGeom prst="rect">
@@ -11353,7 +11923,7 @@
           <a:noFill/>
         </p:spPr>
         <p:txBody>
-          <a:bodyPr wrap="none" lIns="0" rIns="0" tIns="0" bIns="0">
+          <a:bodyPr wrap="none" lIns="0" tIns="0" rIns="0" bIns="0">
             <a:spAutoFit/>
           </a:bodyPr>
           <a:lstStyle/>
@@ -11389,8 +11959,8 @@
         </p:nvSpPr>
         <p:spPr>
           <a:xfrm>
-            <a:off x="15133430" y="25660938"/>
-            <a:ext cx="6062256" cy="2133356"/>
+            <a:off x="15133430" y="24381449"/>
+            <a:ext cx="6062256" cy="2133358"/>
           </a:xfrm>
           <a:prstGeom prst="rect">
             <a:avLst/>
@@ -11398,7 +11968,7 @@
           <a:noFill/>
         </p:spPr>
         <p:txBody>
-          <a:bodyPr wrap="none" lIns="0" rIns="0" tIns="0" bIns="0">
+          <a:bodyPr wrap="none" lIns="0" tIns="0" rIns="0" bIns="0">
             <a:spAutoFit/>
           </a:bodyPr>
           <a:lstStyle/>
@@ -11500,7 +12070,7 @@
         </p:nvSpPr>
         <p:spPr>
           <a:xfrm>
-            <a:off x="1872671" y="28961808"/>
+            <a:off x="1872671" y="27851053"/>
             <a:ext cx="9729004" cy="435638"/>
           </a:xfrm>
           <a:prstGeom prst="rect">
@@ -11509,7 +12079,7 @@
           <a:noFill/>
         </p:spPr>
         <p:txBody>
-          <a:bodyPr wrap="square" lIns="0" rIns="0" tIns="0" bIns="0">
+          <a:bodyPr wrap="square" lIns="0" tIns="0" rIns="0" bIns="0">
             <a:spAutoFit/>
           </a:bodyPr>
           <a:lstStyle/>
@@ -11545,7 +12115,7 @@
         </p:nvSpPr>
         <p:spPr>
           <a:xfrm>
-            <a:off x="15574443" y="35450767"/>
+            <a:off x="15574443" y="35030867"/>
             <a:ext cx="971016" cy="955630"/>
           </a:xfrm>
           <a:prstGeom prst="rect">
@@ -11554,7 +12124,7 @@
           <a:noFill/>
         </p:spPr>
         <p:txBody>
-          <a:bodyPr wrap="none" lIns="0" rIns="0" tIns="0" bIns="0">
+          <a:bodyPr wrap="none" lIns="0" tIns="0" rIns="0" bIns="0">
             <a:spAutoFit/>
           </a:bodyPr>
           <a:lstStyle/>
@@ -11590,7 +12160,7 @@
         </p:nvSpPr>
         <p:spPr>
           <a:xfrm>
-            <a:off x="16629068" y="35450767"/>
+            <a:off x="16629068" y="35030867"/>
             <a:ext cx="13315600" cy="1066680"/>
           </a:xfrm>
           <a:prstGeom prst="rect">
@@ -11599,7 +12169,7 @@
           <a:noFill/>
         </p:spPr>
         <p:txBody>
-          <a:bodyPr wrap="none" lIns="0" rIns="0" tIns="0" bIns="0">
+          <a:bodyPr wrap="none" lIns="0" tIns="0" rIns="0" bIns="0">
             <a:spAutoFit/>
           </a:bodyPr>
           <a:lstStyle/>
@@ -11666,7 +12236,7 @@
           <a:noFill/>
         </p:spPr>
         <p:txBody>
-          <a:bodyPr wrap="square" lIns="0" rIns="0" tIns="0" bIns="0">
+          <a:bodyPr wrap="square" lIns="0" tIns="0" rIns="0" bIns="0">
             <a:spAutoFit/>
           </a:bodyPr>
           <a:lstStyle/>
@@ -11747,7 +12317,7 @@
         </p:nvSpPr>
         <p:spPr>
           <a:xfrm>
-            <a:off x="20145523" y="12302270"/>
+            <a:off x="20145523" y="11022782"/>
             <a:ext cx="9693651" cy="2451101"/>
           </a:xfrm>
           <a:prstGeom prst="rect">
@@ -11756,7 +12326,7 @@
           <a:noFill/>
         </p:spPr>
         <p:txBody>
-          <a:bodyPr wrap="none" lIns="0" rIns="0" tIns="0" bIns="0">
+          <a:bodyPr wrap="none" lIns="0" tIns="0" rIns="0" bIns="0">
             <a:spAutoFit/>
           </a:bodyPr>
           <a:lstStyle/>
@@ -11773,7 +12343,7 @@
               </a:spcAft>
             </a:pPr>
             <a:r>
-              <a:rPr sz="2800" b="1">
+              <a:rPr sz="2800" b="1" dirty="0">
                 <a:solidFill>
                   <a:srgbClr val="111111"/>
                 </a:solidFill>
@@ -11782,7 +12352,7 @@
               <a:t>State.</a:t>
             </a:r>
             <a:r>
-              <a:rPr sz="2800" b="0">
+              <a:rPr sz="2800" b="0" dirty="0">
                 <a:solidFill>
                   <a:srgbClr val="1C1C1C"/>
                 </a:solidFill>
@@ -11804,7 +12374,7 @@
               </a:spcAft>
             </a:pPr>
             <a:r>
-              <a:rPr sz="2800" b="0">
+              <a:rPr sz="2800" b="0" dirty="0">
                 <a:solidFill>
                   <a:srgbClr val="1C1C1C"/>
                 </a:solidFill>
@@ -11826,7 +12396,7 @@
               </a:spcAft>
             </a:pPr>
             <a:r>
-              <a:rPr sz="2800" b="0">
+              <a:rPr sz="2800" b="0" dirty="0">
                 <a:solidFill>
                   <a:srgbClr val="1C1C1C"/>
                 </a:solidFill>
@@ -11835,7 +12405,7 @@
               <a:t>Hidden belief: </a:t>
             </a:r>
             <a:r>
-              <a:rPr sz="2968" b="1">
+              <a:rPr sz="2968" b="1" dirty="0">
                 <a:solidFill>
                   <a:srgbClr val="111111"/>
                 </a:solidFill>
@@ -11844,7 +12414,7 @@
               <a:t>6</a:t>
             </a:r>
             <a:r>
-              <a:rPr sz="2800" b="0">
+              <a:rPr sz="2800" b="0" dirty="0">
                 <a:solidFill>
                   <a:srgbClr val="1C1C1C"/>
                 </a:solidFill>
@@ -11853,7 +12423,7 @@
               <a:t> risk classes × </a:t>
             </a:r>
             <a:r>
-              <a:rPr sz="2968" b="1">
+              <a:rPr sz="2968" b="1" dirty="0">
                 <a:solidFill>
                   <a:srgbClr val="111111"/>
                 </a:solidFill>
@@ -11862,7 +12432,7 @@
               <a:t>11</a:t>
             </a:r>
             <a:r>
-              <a:rPr sz="2800" b="0">
+              <a:rPr sz="2800" b="0" dirty="0">
                 <a:solidFill>
                   <a:srgbClr val="1C1C1C"/>
                 </a:solidFill>
@@ -11884,7 +12454,7 @@
               </a:spcAft>
             </a:pPr>
             <a:r>
-              <a:rPr sz="2800" b="0">
+              <a:rPr sz="2800" b="0" dirty="0">
                 <a:solidFill>
                   <a:srgbClr val="1C1C1C"/>
                 </a:solidFill>
@@ -11903,7 +12473,7 @@
         </p:nvSpPr>
         <p:spPr>
           <a:xfrm>
-            <a:off x="20145523" y="14646878"/>
+            <a:off x="20145523" y="13367390"/>
             <a:ext cx="9693651" cy="1878920"/>
           </a:xfrm>
           <a:prstGeom prst="rect">
@@ -11912,7 +12482,7 @@
           <a:noFill/>
         </p:spPr>
         <p:txBody>
-          <a:bodyPr wrap="none" lIns="0" rIns="0" tIns="0" bIns="0">
+          <a:bodyPr wrap="none" lIns="0" tIns="0" rIns="0" bIns="0">
             <a:spAutoFit/>
           </a:bodyPr>
           <a:lstStyle/>
@@ -11929,7 +12499,7 @@
               </a:spcAft>
             </a:pPr>
             <a:r>
-              <a:rPr sz="2800" b="1">
+              <a:rPr sz="2800" b="1" dirty="0">
                 <a:solidFill>
                   <a:srgbClr val="111111"/>
                 </a:solidFill>
@@ -11938,7 +12508,7 @@
               <a:t>Kernels from the engine.</a:t>
             </a:r>
             <a:r>
-              <a:rPr sz="2800" b="0">
+              <a:rPr sz="2800" b="0" dirty="0">
                 <a:solidFill>
                   <a:srgbClr val="1C1C1C"/>
                 </a:solidFill>
@@ -11960,7 +12530,7 @@
               </a:spcAft>
             </a:pPr>
             <a:r>
-              <a:rPr sz="2800" b="0">
+              <a:rPr sz="2800" b="0" dirty="0">
                 <a:solidFill>
                   <a:srgbClr val="1C1C1C"/>
                 </a:solidFill>
@@ -11969,7 +12539,7 @@
               <a:t>from 4,000,000 CMOST lives (</a:t>
             </a:r>
             <a:r>
-              <a:rPr sz="2968" b="1">
+              <a:rPr sz="2968" b="1" dirty="0">
                 <a:solidFill>
                   <a:srgbClr val="111111"/>
                 </a:solidFill>
@@ -11978,7 +12548,7 @@
               <a:t>4,520,648</a:t>
             </a:r>
             <a:r>
-              <a:rPr sz="2800" b="0">
+              <a:rPr sz="2800" b="0" dirty="0">
                 <a:solidFill>
                   <a:srgbClr val="1C1C1C"/>
                 </a:solidFill>
@@ -12000,7 +12570,7 @@
               </a:spcAft>
             </a:pPr>
             <a:r>
-              <a:rPr sz="2800" b="0">
+              <a:rPr sz="2800" b="0" dirty="0">
                 <a:solidFill>
                   <a:srgbClr val="1C1C1C"/>
                 </a:solidFill>
@@ -12019,8 +12589,8 @@
         </p:nvSpPr>
         <p:spPr>
           <a:xfrm>
-            <a:off x="20145523" y="16493937"/>
-            <a:ext cx="9693651" cy="3023282"/>
+            <a:off x="20145523" y="15214449"/>
+            <a:ext cx="9693651" cy="2957541"/>
           </a:xfrm>
           <a:prstGeom prst="rect">
             <a:avLst/>
@@ -12028,7 +12598,7 @@
           <a:noFill/>
         </p:spPr>
         <p:txBody>
-          <a:bodyPr wrap="none" lIns="0" rIns="0" tIns="0" bIns="0">
+          <a:bodyPr wrap="square" lIns="0" tIns="0" rIns="0" bIns="0">
             <a:spAutoFit/>
           </a:bodyPr>
           <a:lstStyle/>
@@ -12045,7 +12615,7 @@
               </a:spcAft>
             </a:pPr>
             <a:r>
-              <a:rPr sz="2800" b="1">
+              <a:rPr sz="2800" b="1" dirty="0">
                 <a:solidFill>
                   <a:srgbClr val="111111"/>
                 </a:solidFill>
@@ -12054,7 +12624,7 @@
               <a:t>Solve, then deploy.</a:t>
             </a:r>
             <a:r>
-              <a:rPr sz="2800" b="0">
+              <a:rPr sz="2800" b="0" dirty="0">
                 <a:solidFill>
                   <a:srgbClr val="1C1C1C"/>
                 </a:solidFill>
@@ -12076,7 +12646,7 @@
               </a:spcAft>
             </a:pPr>
             <a:r>
-              <a:rPr sz="2800" b="0">
+              <a:rPr sz="2800" b="0" dirty="0">
                 <a:solidFill>
                   <a:srgbClr val="1C1C1C"/>
                 </a:solidFill>
@@ -12084,74 +12654,79 @@
               </a:rPr>
               <a:t>shadow price λ sweeps the frontier. Every policy is re-run inside</a:t>
             </a:r>
-          </a:p>
-          <a:p>
-            <a:pPr algn="l">
-              <a:lnSpc>
-                <a:spcPts val="3920"/>
-              </a:lnSpc>
-              <a:spcBef>
-                <a:spcPts val="0"/>
-              </a:spcBef>
-              <a:spcAft>
-                <a:spcPts val="0"/>
-              </a:spcAft>
-            </a:pPr>
-            <a:r>
-              <a:rPr sz="2800" b="0">
+            <a:r>
+              <a:rPr lang="en-US" sz="2800" b="0" dirty="0">
                 <a:solidFill>
                   <a:srgbClr val="1C1C1C"/>
                 </a:solidFill>
                 <a:latin typeface="Arial"/>
               </a:rPr>
+              <a:t> </a:t>
+            </a:r>
+            <a:r>
+              <a:rPr sz="2800" b="0" dirty="0">
+                <a:solidFill>
+                  <a:srgbClr val="1C1C1C"/>
+                </a:solidFill>
+                <a:latin typeface="Arial"/>
+              </a:rPr>
               <a:t>CMOST on its simulated findings against 10-yearly and 5-yearly</a:t>
             </a:r>
-          </a:p>
-          <a:p>
-            <a:pPr algn="l">
-              <a:lnSpc>
-                <a:spcPts val="3920"/>
-              </a:lnSpc>
-              <a:spcBef>
-                <a:spcPts val="0"/>
-              </a:spcBef>
-              <a:spcAft>
-                <a:spcPts val="0"/>
-              </a:spcAft>
-            </a:pPr>
-            <a:r>
-              <a:rPr sz="2800" b="0">
+            <a:r>
+              <a:rPr lang="en-US" sz="2800" b="0" dirty="0">
                 <a:solidFill>
                   <a:srgbClr val="1C1C1C"/>
                 </a:solidFill>
                 <a:latin typeface="Arial"/>
               </a:rPr>
-              <a:t>screening, the best of 2,112 fixed schedules and 10-yearly +</a:t>
-            </a:r>
-          </a:p>
-          <a:p>
-            <a:pPr algn="l">
-              <a:lnSpc>
-                <a:spcPts val="3920"/>
-              </a:lnSpc>
-              <a:spcBef>
-                <a:spcPts val="0"/>
-              </a:spcBef>
-              <a:spcAft>
-                <a:spcPts val="0"/>
-              </a:spcAft>
-            </a:pPr>
-            <a:r>
-              <a:rPr sz="2800" b="0">
+              <a:t> </a:t>
+            </a:r>
+            <a:r>
+              <a:rPr sz="2800" b="0" dirty="0">
                 <a:solidFill>
                   <a:srgbClr val="1C1C1C"/>
                 </a:solidFill>
                 <a:latin typeface="Arial"/>
               </a:rPr>
+              <a:t>screening, the best of 2,112 fixed schedules </a:t>
+            </a:r>
+            <a:br>
+              <a:rPr lang="en-US" sz="2800" dirty="0">
+                <a:solidFill>
+                  <a:srgbClr val="1C1C1C"/>
+                </a:solidFill>
+                <a:latin typeface="Arial"/>
+              </a:rPr>
+            </a:br>
+            <a:r>
+              <a:rPr sz="2800" b="0" dirty="0">
+                <a:solidFill>
+                  <a:srgbClr val="1C1C1C"/>
+                </a:solidFill>
+                <a:latin typeface="Arial"/>
+              </a:rPr>
+              <a:t>and 10-yearly +</a:t>
+            </a:r>
+            <a:r>
+              <a:rPr lang="en-US" sz="2800" b="0" dirty="0">
+                <a:solidFill>
+                  <a:srgbClr val="1C1C1C"/>
+                </a:solidFill>
+                <a:latin typeface="Arial"/>
+              </a:rPr>
+              <a:t> </a:t>
+            </a:r>
+            <a:r>
+              <a:rPr sz="2800" b="0" dirty="0">
+                <a:solidFill>
+                  <a:srgbClr val="1C1C1C"/>
+                </a:solidFill>
+                <a:latin typeface="Arial"/>
+              </a:rPr>
               <a:t>surveillance (headline arms: </a:t>
             </a:r>
             <a:r>
-              <a:rPr sz="2968" b="1">
+              <a:rPr sz="2968" b="1" dirty="0">
                 <a:solidFill>
                   <a:srgbClr val="111111"/>
                 </a:solidFill>
@@ -12160,7 +12735,7 @@
               <a:t>1,000,000</a:t>
             </a:r>
             <a:r>
-              <a:rPr sz="2800" b="0">
+              <a:rPr sz="2800" b="0" dirty="0">
                 <a:solidFill>
                   <a:srgbClr val="1C1C1C"/>
                 </a:solidFill>
@@ -12179,7 +12754,7 @@
         </p:nvSpPr>
         <p:spPr>
           <a:xfrm>
-            <a:off x="709729" y="21462576"/>
+            <a:off x="709729" y="20183087"/>
             <a:ext cx="3782454" cy="591343"/>
           </a:xfrm>
           <a:prstGeom prst="rect">
@@ -12188,7 +12763,7 @@
           <a:noFill/>
         </p:spPr>
         <p:txBody>
-          <a:bodyPr wrap="none" lIns="57160" rIns="57160" tIns="9526" bIns="9526">
+          <a:bodyPr wrap="none" lIns="57160" tIns="9526" rIns="57160" bIns="9526">
             <a:spAutoFit/>
           </a:bodyPr>
           <a:lstStyle/>
@@ -12246,7 +12821,7 @@
         </p:nvSpPr>
         <p:spPr>
           <a:xfrm>
-            <a:off x="4382014" y="21462576"/>
+            <a:off x="4382014" y="20183087"/>
             <a:ext cx="2444549" cy="591343"/>
           </a:xfrm>
           <a:prstGeom prst="rect">
@@ -12255,7 +12830,7 @@
           <a:noFill/>
         </p:spPr>
         <p:txBody>
-          <a:bodyPr wrap="none" lIns="57160" rIns="57160" tIns="9526" bIns="9526">
+          <a:bodyPr wrap="none" lIns="57160" tIns="9526" rIns="57160" bIns="9526">
             <a:spAutoFit/>
           </a:bodyPr>
           <a:lstStyle/>
@@ -12313,7 +12888,7 @@
         </p:nvSpPr>
         <p:spPr>
           <a:xfrm>
-            <a:off x="6755363" y="21462576"/>
+            <a:off x="6755363" y="20183087"/>
             <a:ext cx="1751077" cy="591343"/>
           </a:xfrm>
           <a:prstGeom prst="rect">
@@ -12322,7 +12897,7 @@
           <a:noFill/>
         </p:spPr>
         <p:txBody>
-          <a:bodyPr wrap="none" lIns="57160" rIns="57160" tIns="9526" bIns="9526">
+          <a:bodyPr wrap="none" lIns="57160" tIns="9526" rIns="57160" bIns="9526">
             <a:spAutoFit/>
           </a:bodyPr>
           <a:lstStyle/>
@@ -12380,7 +12955,7 @@
         </p:nvSpPr>
         <p:spPr>
           <a:xfrm>
-            <a:off x="8455438" y="21462576"/>
+            <a:off x="8455438" y="20183087"/>
             <a:ext cx="4146738" cy="591343"/>
           </a:xfrm>
           <a:prstGeom prst="rect">
@@ -12389,7 +12964,7 @@
           <a:noFill/>
         </p:spPr>
         <p:txBody>
-          <a:bodyPr wrap="none" lIns="57160" rIns="57160" tIns="9526" bIns="9526">
+          <a:bodyPr wrap="none" lIns="57160" tIns="9526" rIns="57160" bIns="9526">
             <a:spAutoFit/>
           </a:bodyPr>
           <a:lstStyle/>
@@ -12447,8 +13022,8 @@
         </p:nvSpPr>
         <p:spPr>
           <a:xfrm>
-            <a:off x="709729" y="21976788"/>
-            <a:ext cx="3782454" cy="447786"/>
+            <a:off x="709729" y="20697299"/>
+            <a:ext cx="3782454" cy="447788"/>
           </a:xfrm>
           <a:prstGeom prst="rect">
             <a:avLst/>
@@ -12456,7 +13031,7 @@
           <a:noFill/>
         </p:spPr>
         <p:txBody>
-          <a:bodyPr wrap="square" lIns="57160" rIns="57160" tIns="9526" bIns="9526">
+          <a:bodyPr wrap="square" lIns="57160" tIns="9526" rIns="57160" bIns="9526">
             <a:spAutoFit/>
           </a:bodyPr>
           <a:lstStyle/>
@@ -12492,8 +13067,8 @@
         </p:nvSpPr>
         <p:spPr>
           <a:xfrm>
-            <a:off x="4382014" y="21976788"/>
-            <a:ext cx="2444549" cy="447786"/>
+            <a:off x="4382014" y="20697299"/>
+            <a:ext cx="2444549" cy="447788"/>
           </a:xfrm>
           <a:prstGeom prst="rect">
             <a:avLst/>
@@ -12501,7 +13076,7 @@
           <a:noFill/>
         </p:spPr>
         <p:txBody>
-          <a:bodyPr wrap="none" lIns="57160" rIns="57160" tIns="9526" bIns="9526">
+          <a:bodyPr wrap="none" lIns="57160" tIns="9526" rIns="57160" bIns="9526">
             <a:spAutoFit/>
           </a:bodyPr>
           <a:lstStyle/>
@@ -12537,8 +13112,8 @@
         </p:nvSpPr>
         <p:spPr>
           <a:xfrm>
-            <a:off x="6755363" y="21976788"/>
-            <a:ext cx="1751077" cy="447786"/>
+            <a:off x="6755363" y="20697299"/>
+            <a:ext cx="1751077" cy="447788"/>
           </a:xfrm>
           <a:prstGeom prst="rect">
             <a:avLst/>
@@ -12546,7 +13121,7 @@
           <a:noFill/>
         </p:spPr>
         <p:txBody>
-          <a:bodyPr wrap="none" lIns="57160" rIns="57160" tIns="9526" bIns="9526">
+          <a:bodyPr wrap="none" lIns="57160" tIns="9526" rIns="57160" bIns="9526">
             <a:spAutoFit/>
           </a:bodyPr>
           <a:lstStyle/>
@@ -12582,8 +13157,8 @@
         </p:nvSpPr>
         <p:spPr>
           <a:xfrm>
-            <a:off x="8455438" y="21976788"/>
-            <a:ext cx="4146738" cy="447786"/>
+            <a:off x="8455438" y="20697299"/>
+            <a:ext cx="4146738" cy="447788"/>
           </a:xfrm>
           <a:prstGeom prst="rect">
             <a:avLst/>
@@ -12591,7 +13166,7 @@
           <a:noFill/>
         </p:spPr>
         <p:txBody>
-          <a:bodyPr wrap="none" lIns="57160" rIns="57160" tIns="9526" bIns="9526">
+          <a:bodyPr wrap="none" lIns="57160" tIns="9526" rIns="57160" bIns="9526">
             <a:spAutoFit/>
           </a:bodyPr>
           <a:lstStyle/>
@@ -12627,7 +13202,7 @@
         </p:nvSpPr>
         <p:spPr>
           <a:xfrm>
-            <a:off x="709729" y="22366168"/>
+            <a:off x="709729" y="21086681"/>
             <a:ext cx="3782454" cy="447784"/>
           </a:xfrm>
           <a:prstGeom prst="rect">
@@ -12636,7 +13211,7 @@
           <a:noFill/>
         </p:spPr>
         <p:txBody>
-          <a:bodyPr wrap="square" lIns="57160" rIns="57160" tIns="9526" bIns="9526">
+          <a:bodyPr wrap="square" lIns="57160" tIns="9526" rIns="57160" bIns="9526">
             <a:spAutoFit/>
           </a:bodyPr>
           <a:lstStyle/>
@@ -12672,7 +13247,7 @@
         </p:nvSpPr>
         <p:spPr>
           <a:xfrm>
-            <a:off x="4382014" y="22366168"/>
+            <a:off x="4382014" y="21086681"/>
             <a:ext cx="2444549" cy="447784"/>
           </a:xfrm>
           <a:prstGeom prst="rect">
@@ -12681,7 +13256,7 @@
           <a:noFill/>
         </p:spPr>
         <p:txBody>
-          <a:bodyPr wrap="none" lIns="57160" rIns="57160" tIns="9526" bIns="9526">
+          <a:bodyPr wrap="none" lIns="57160" tIns="9526" rIns="57160" bIns="9526">
             <a:spAutoFit/>
           </a:bodyPr>
           <a:lstStyle/>
@@ -12717,7 +13292,7 @@
         </p:nvSpPr>
         <p:spPr>
           <a:xfrm>
-            <a:off x="6755363" y="22366168"/>
+            <a:off x="6755363" y="21086681"/>
             <a:ext cx="1751077" cy="447784"/>
           </a:xfrm>
           <a:prstGeom prst="rect">
@@ -12726,7 +13301,7 @@
           <a:noFill/>
         </p:spPr>
         <p:txBody>
-          <a:bodyPr wrap="none" lIns="57160" rIns="57160" tIns="9526" bIns="9526">
+          <a:bodyPr wrap="none" lIns="57160" tIns="9526" rIns="57160" bIns="9526">
             <a:spAutoFit/>
           </a:bodyPr>
           <a:lstStyle/>
@@ -12762,7 +13337,7 @@
         </p:nvSpPr>
         <p:spPr>
           <a:xfrm>
-            <a:off x="8455438" y="22366168"/>
+            <a:off x="8455438" y="21086681"/>
             <a:ext cx="4146738" cy="447784"/>
           </a:xfrm>
           <a:prstGeom prst="rect">
@@ -12771,7 +13346,7 @@
           <a:noFill/>
         </p:spPr>
         <p:txBody>
-          <a:bodyPr wrap="none" lIns="57160" rIns="57160" tIns="9526" bIns="9526">
+          <a:bodyPr wrap="none" lIns="57160" tIns="9526" rIns="57160" bIns="9526">
             <a:spAutoFit/>
           </a:bodyPr>
           <a:lstStyle/>
@@ -12807,8 +13382,8 @@
         </p:nvSpPr>
         <p:spPr>
           <a:xfrm>
-            <a:off x="709729" y="22755546"/>
-            <a:ext cx="3782454" cy="447788"/>
+            <a:off x="709729" y="21476059"/>
+            <a:ext cx="3782454" cy="447786"/>
           </a:xfrm>
           <a:prstGeom prst="rect">
             <a:avLst/>
@@ -12816,7 +13391,7 @@
           <a:noFill/>
         </p:spPr>
         <p:txBody>
-          <a:bodyPr wrap="square" lIns="57160" rIns="57160" tIns="9526" bIns="9526">
+          <a:bodyPr wrap="square" lIns="57160" tIns="9526" rIns="57160" bIns="9526">
             <a:spAutoFit/>
           </a:bodyPr>
           <a:lstStyle/>
@@ -12852,8 +13427,8 @@
         </p:nvSpPr>
         <p:spPr>
           <a:xfrm>
-            <a:off x="4382014" y="22755546"/>
-            <a:ext cx="2444549" cy="447788"/>
+            <a:off x="4382014" y="21476059"/>
+            <a:ext cx="2444549" cy="447786"/>
           </a:xfrm>
           <a:prstGeom prst="rect">
             <a:avLst/>
@@ -12861,7 +13436,7 @@
           <a:noFill/>
         </p:spPr>
         <p:txBody>
-          <a:bodyPr wrap="none" lIns="57160" rIns="57160" tIns="9526" bIns="9526">
+          <a:bodyPr wrap="none" lIns="57160" tIns="9526" rIns="57160" bIns="9526">
             <a:spAutoFit/>
           </a:bodyPr>
           <a:lstStyle/>
@@ -12897,8 +13472,8 @@
         </p:nvSpPr>
         <p:spPr>
           <a:xfrm>
-            <a:off x="6755363" y="22755546"/>
-            <a:ext cx="1751077" cy="447788"/>
+            <a:off x="6755363" y="21476059"/>
+            <a:ext cx="1751077" cy="447786"/>
           </a:xfrm>
           <a:prstGeom prst="rect">
             <a:avLst/>
@@ -12906,7 +13481,7 @@
           <a:noFill/>
         </p:spPr>
         <p:txBody>
-          <a:bodyPr wrap="none" lIns="57160" rIns="57160" tIns="9526" bIns="9526">
+          <a:bodyPr wrap="none" lIns="57160" tIns="9526" rIns="57160" bIns="9526">
             <a:spAutoFit/>
           </a:bodyPr>
           <a:lstStyle/>
@@ -12942,8 +13517,8 @@
         </p:nvSpPr>
         <p:spPr>
           <a:xfrm>
-            <a:off x="8455438" y="22755546"/>
-            <a:ext cx="4146738" cy="447788"/>
+            <a:off x="8455438" y="21476059"/>
+            <a:ext cx="4146738" cy="447786"/>
           </a:xfrm>
           <a:prstGeom prst="rect">
             <a:avLst/>
@@ -12951,7 +13526,7 @@
           <a:noFill/>
         </p:spPr>
         <p:txBody>
-          <a:bodyPr wrap="none" lIns="57160" rIns="57160" tIns="9526" bIns="9526">
+          <a:bodyPr wrap="none" lIns="57160" tIns="9526" rIns="57160" bIns="9526">
             <a:spAutoFit/>
           </a:bodyPr>
           <a:lstStyle/>
@@ -12987,7 +13562,7 @@
         </p:nvSpPr>
         <p:spPr>
           <a:xfrm>
-            <a:off x="709729" y="23144927"/>
+            <a:off x="709729" y="21865438"/>
             <a:ext cx="3782454" cy="447784"/>
           </a:xfrm>
           <a:prstGeom prst="rect">
@@ -12996,7 +13571,7 @@
           <a:noFill/>
         </p:spPr>
         <p:txBody>
-          <a:bodyPr wrap="square" lIns="57160" rIns="57160" tIns="9526" bIns="9526">
+          <a:bodyPr wrap="square" lIns="57160" tIns="9526" rIns="57160" bIns="9526">
             <a:spAutoFit/>
           </a:bodyPr>
           <a:lstStyle/>
@@ -13032,7 +13607,7 @@
         </p:nvSpPr>
         <p:spPr>
           <a:xfrm>
-            <a:off x="4382014" y="23144927"/>
+            <a:off x="4382014" y="21865438"/>
             <a:ext cx="2444549" cy="447784"/>
           </a:xfrm>
           <a:prstGeom prst="rect">
@@ -13041,7 +13616,7 @@
           <a:noFill/>
         </p:spPr>
         <p:txBody>
-          <a:bodyPr wrap="none" lIns="57160" rIns="57160" tIns="9526" bIns="9526">
+          <a:bodyPr wrap="none" lIns="57160" tIns="9526" rIns="57160" bIns="9526">
             <a:spAutoFit/>
           </a:bodyPr>
           <a:lstStyle/>
@@ -13077,7 +13652,7 @@
         </p:nvSpPr>
         <p:spPr>
           <a:xfrm>
-            <a:off x="6755363" y="23144927"/>
+            <a:off x="6755363" y="21865438"/>
             <a:ext cx="1751077" cy="447784"/>
           </a:xfrm>
           <a:prstGeom prst="rect">
@@ -13086,7 +13661,7 @@
           <a:noFill/>
         </p:spPr>
         <p:txBody>
-          <a:bodyPr wrap="none" lIns="57160" rIns="57160" tIns="9526" bIns="9526">
+          <a:bodyPr wrap="none" lIns="57160" tIns="9526" rIns="57160" bIns="9526">
             <a:spAutoFit/>
           </a:bodyPr>
           <a:lstStyle/>
@@ -13122,7 +13697,7 @@
         </p:nvSpPr>
         <p:spPr>
           <a:xfrm>
-            <a:off x="8455438" y="23144927"/>
+            <a:off x="8455438" y="21865438"/>
             <a:ext cx="4146738" cy="447784"/>
           </a:xfrm>
           <a:prstGeom prst="rect">
@@ -13131,7 +13706,7 @@
           <a:noFill/>
         </p:spPr>
         <p:txBody>
-          <a:bodyPr wrap="none" lIns="57160" rIns="57160" tIns="9526" bIns="9526">
+          <a:bodyPr wrap="none" lIns="57160" tIns="9526" rIns="57160" bIns="9526">
             <a:spAutoFit/>
           </a:bodyPr>
           <a:lstStyle/>
@@ -13167,8 +13742,8 @@
         </p:nvSpPr>
         <p:spPr>
           <a:xfrm>
-            <a:off x="709729" y="23534305"/>
-            <a:ext cx="3782454" cy="447786"/>
+            <a:off x="709729" y="22254816"/>
+            <a:ext cx="3782454" cy="447788"/>
           </a:xfrm>
           <a:prstGeom prst="rect">
             <a:avLst/>
@@ -13176,7 +13751,7 @@
           <a:noFill/>
         </p:spPr>
         <p:txBody>
-          <a:bodyPr wrap="square" lIns="57160" rIns="57160" tIns="9526" bIns="9526">
+          <a:bodyPr wrap="square" lIns="57160" tIns="9526" rIns="57160" bIns="9526">
             <a:spAutoFit/>
           </a:bodyPr>
           <a:lstStyle/>
@@ -13212,8 +13787,8 @@
         </p:nvSpPr>
         <p:spPr>
           <a:xfrm>
-            <a:off x="4382014" y="23534305"/>
-            <a:ext cx="2444549" cy="447786"/>
+            <a:off x="4382014" y="22254816"/>
+            <a:ext cx="2444549" cy="447788"/>
           </a:xfrm>
           <a:prstGeom prst="rect">
             <a:avLst/>
@@ -13221,7 +13796,7 @@
           <a:noFill/>
         </p:spPr>
         <p:txBody>
-          <a:bodyPr wrap="none" lIns="57160" rIns="57160" tIns="9526" bIns="9526">
+          <a:bodyPr wrap="none" lIns="57160" tIns="9526" rIns="57160" bIns="9526">
             <a:spAutoFit/>
           </a:bodyPr>
           <a:lstStyle/>
@@ -13257,8 +13832,8 @@
         </p:nvSpPr>
         <p:spPr>
           <a:xfrm>
-            <a:off x="6755363" y="23534305"/>
-            <a:ext cx="1751077" cy="447786"/>
+            <a:off x="6755363" y="22254816"/>
+            <a:ext cx="1751077" cy="447788"/>
           </a:xfrm>
           <a:prstGeom prst="rect">
             <a:avLst/>
@@ -13266,7 +13841,7 @@
           <a:noFill/>
         </p:spPr>
         <p:txBody>
-          <a:bodyPr wrap="none" lIns="57160" rIns="57160" tIns="9526" bIns="9526">
+          <a:bodyPr wrap="none" lIns="57160" tIns="9526" rIns="57160" bIns="9526">
             <a:spAutoFit/>
           </a:bodyPr>
           <a:lstStyle/>
@@ -13302,8 +13877,8 @@
         </p:nvSpPr>
         <p:spPr>
           <a:xfrm>
-            <a:off x="8455438" y="23534305"/>
-            <a:ext cx="4146738" cy="447786"/>
+            <a:off x="8455438" y="22254816"/>
+            <a:ext cx="4146738" cy="447788"/>
           </a:xfrm>
           <a:prstGeom prst="rect">
             <a:avLst/>
@@ -13311,7 +13886,7 @@
           <a:noFill/>
         </p:spPr>
         <p:txBody>
-          <a:bodyPr wrap="none" lIns="57160" rIns="57160" tIns="9526" bIns="9526">
+          <a:bodyPr wrap="none" lIns="57160" tIns="9526" rIns="57160" bIns="9526">
             <a:spAutoFit/>
           </a:bodyPr>
           <a:lstStyle/>
@@ -13347,7 +13922,7 @@
         </p:nvSpPr>
         <p:spPr>
           <a:xfrm>
-            <a:off x="23285931" y="24774755"/>
+            <a:off x="23285931" y="23495266"/>
             <a:ext cx="1215301" cy="613246"/>
           </a:xfrm>
           <a:prstGeom prst="rect">
@@ -13356,7 +13931,7 @@
           <a:noFill/>
         </p:spPr>
         <p:txBody>
-          <a:bodyPr wrap="none" lIns="0" rIns="0" tIns="0" bIns="0">
+          <a:bodyPr wrap="none" lIns="0" tIns="0" rIns="0" bIns="0">
             <a:spAutoFit/>
           </a:bodyPr>
           <a:lstStyle/>
@@ -13392,7 +13967,7 @@
         </p:nvSpPr>
         <p:spPr>
           <a:xfrm>
-            <a:off x="26992440" y="24774755"/>
+            <a:off x="26992440" y="23495266"/>
             <a:ext cx="1215301" cy="613246"/>
           </a:xfrm>
           <a:prstGeom prst="rect">
@@ -13401,7 +13976,7 @@
           <a:noFill/>
         </p:spPr>
         <p:txBody>
-          <a:bodyPr wrap="none" lIns="0" rIns="0" tIns="0" bIns="0">
+          <a:bodyPr wrap="none" lIns="0" tIns="0" rIns="0" bIns="0">
             <a:spAutoFit/>
           </a:bodyPr>
           <a:lstStyle/>
@@ -13437,7 +14012,7 @@
         </p:nvSpPr>
         <p:spPr>
           <a:xfrm>
-            <a:off x="22164799" y="25378984"/>
+            <a:off x="22164799" y="24099495"/>
             <a:ext cx="3524835" cy="735759"/>
           </a:xfrm>
           <a:prstGeom prst="rect">
@@ -13446,7 +14021,7 @@
           <a:noFill/>
         </p:spPr>
         <p:txBody>
-          <a:bodyPr wrap="none" lIns="0" rIns="0" tIns="0" bIns="0">
+          <a:bodyPr wrap="none" lIns="0" tIns="0" rIns="0" bIns="0">
             <a:spAutoFit/>
           </a:bodyPr>
           <a:lstStyle/>
@@ -13504,7 +14079,7 @@
         </p:nvSpPr>
         <p:spPr>
           <a:xfrm>
-            <a:off x="25871306" y="25378984"/>
+            <a:off x="25871306" y="24099495"/>
             <a:ext cx="3524835" cy="735759"/>
           </a:xfrm>
           <a:prstGeom prst="rect">
@@ -13513,7 +14088,7 @@
           <a:noFill/>
         </p:spPr>
         <p:txBody>
-          <a:bodyPr wrap="none" lIns="0" rIns="0" tIns="0" bIns="0">
+          <a:bodyPr wrap="none" lIns="0" tIns="0" rIns="0" bIns="0">
             <a:spAutoFit/>
           </a:bodyPr>
           <a:lstStyle/>
@@ -13571,7 +14146,7 @@
         </p:nvSpPr>
         <p:spPr>
           <a:xfrm>
-            <a:off x="23211833" y="26160866"/>
+            <a:off x="23211833" y="24881379"/>
             <a:ext cx="1367943" cy="613246"/>
           </a:xfrm>
           <a:prstGeom prst="rect">
@@ -13580,7 +14155,7 @@
           <a:noFill/>
         </p:spPr>
         <p:txBody>
-          <a:bodyPr wrap="none" lIns="0" rIns="0" tIns="0" bIns="0">
+          <a:bodyPr wrap="none" lIns="0" tIns="0" rIns="0" bIns="0">
             <a:spAutoFit/>
           </a:bodyPr>
           <a:lstStyle/>
@@ -13616,7 +14191,7 @@
         </p:nvSpPr>
         <p:spPr>
           <a:xfrm>
-            <a:off x="26619869" y="26160866"/>
+            <a:off x="26619869" y="24881379"/>
             <a:ext cx="1982794" cy="613246"/>
           </a:xfrm>
           <a:prstGeom prst="rect">
@@ -13625,7 +14200,7 @@
           <a:noFill/>
         </p:spPr>
         <p:txBody>
-          <a:bodyPr wrap="none" lIns="0" rIns="0" tIns="0" bIns="0">
+          <a:bodyPr wrap="none" lIns="0" tIns="0" rIns="0" bIns="0">
             <a:spAutoFit/>
           </a:bodyPr>
           <a:lstStyle/>
@@ -13661,7 +14236,7 @@
         </p:nvSpPr>
         <p:spPr>
           <a:xfrm>
-            <a:off x="22164799" y="26765097"/>
+            <a:off x="22164799" y="25485610"/>
             <a:ext cx="3524835" cy="735757"/>
           </a:xfrm>
           <a:prstGeom prst="rect">
@@ -13670,7 +14245,7 @@
           <a:noFill/>
         </p:spPr>
         <p:txBody>
-          <a:bodyPr wrap="none" lIns="0" rIns="0" tIns="0" bIns="0">
+          <a:bodyPr wrap="none" lIns="0" tIns="0" rIns="0" bIns="0">
             <a:spAutoFit/>
           </a:bodyPr>
           <a:lstStyle/>
@@ -13728,7 +14303,7 @@
         </p:nvSpPr>
         <p:spPr>
           <a:xfrm>
-            <a:off x="25871306" y="26765097"/>
+            <a:off x="25871306" y="25485610"/>
             <a:ext cx="3524835" cy="735757"/>
           </a:xfrm>
           <a:prstGeom prst="rect">
@@ -13737,7 +14312,7 @@
           <a:noFill/>
         </p:spPr>
         <p:txBody>
-          <a:bodyPr wrap="none" lIns="0" rIns="0" tIns="0" bIns="0">
+          <a:bodyPr wrap="none" lIns="0" tIns="0" rIns="0" bIns="0">
             <a:spAutoFit/>
           </a:bodyPr>
           <a:lstStyle/>
@@ -13795,8 +14370,8 @@
         </p:nvSpPr>
         <p:spPr>
           <a:xfrm>
-            <a:off x="23431596" y="27546979"/>
-            <a:ext cx="915231" cy="613246"/>
+            <a:off x="23431596" y="26267490"/>
+            <a:ext cx="915231" cy="613248"/>
           </a:xfrm>
           <a:prstGeom prst="rect">
             <a:avLst/>
@@ -13804,7 +14379,7 @@
           <a:noFill/>
         </p:spPr>
         <p:txBody>
-          <a:bodyPr wrap="none" lIns="0" rIns="0" tIns="0" bIns="0">
+          <a:bodyPr wrap="none" lIns="0" tIns="0" rIns="0" bIns="0">
             <a:spAutoFit/>
           </a:bodyPr>
           <a:lstStyle/>
@@ -13840,8 +14415,8 @@
         </p:nvSpPr>
         <p:spPr>
           <a:xfrm>
-            <a:off x="26903612" y="27546979"/>
-            <a:ext cx="1398133" cy="613246"/>
+            <a:off x="26903612" y="26267490"/>
+            <a:ext cx="1398133" cy="613248"/>
           </a:xfrm>
           <a:prstGeom prst="rect">
             <a:avLst/>
@@ -13849,7 +14424,7 @@
           <a:noFill/>
         </p:spPr>
         <p:txBody>
-          <a:bodyPr wrap="none" lIns="0" rIns="0" tIns="0" bIns="0">
+          <a:bodyPr wrap="none" lIns="0" tIns="0" rIns="0" bIns="0">
             <a:spAutoFit/>
           </a:bodyPr>
           <a:lstStyle/>
@@ -13885,8 +14460,8 @@
         </p:nvSpPr>
         <p:spPr>
           <a:xfrm>
-            <a:off x="22164799" y="28151208"/>
-            <a:ext cx="3524835" cy="735759"/>
+            <a:off x="22164799" y="26871719"/>
+            <a:ext cx="3524835" cy="735761"/>
           </a:xfrm>
           <a:prstGeom prst="rect">
             <a:avLst/>
@@ -13894,7 +14469,7 @@
           <a:noFill/>
         </p:spPr>
         <p:txBody>
-          <a:bodyPr wrap="none" lIns="0" rIns="0" tIns="0" bIns="0">
+          <a:bodyPr wrap="none" lIns="0" tIns="0" rIns="0" bIns="0">
             <a:spAutoFit/>
           </a:bodyPr>
           <a:lstStyle/>
@@ -13952,7 +14527,7 @@
         </p:nvSpPr>
         <p:spPr>
           <a:xfrm>
-            <a:off x="25871306" y="28151208"/>
+            <a:off x="25871306" y="26871719"/>
             <a:ext cx="3524835" cy="1103640"/>
           </a:xfrm>
           <a:prstGeom prst="rect">
@@ -13961,7 +14536,7 @@
           <a:noFill/>
         </p:spPr>
         <p:txBody>
-          <a:bodyPr wrap="none" lIns="0" rIns="0" tIns="0" bIns="0">
+          <a:bodyPr wrap="none" lIns="0" tIns="0" rIns="0" bIns="0">
             <a:spAutoFit/>
           </a:bodyPr>
           <a:lstStyle/>
@@ -14041,7 +14616,7 @@
         </p:nvSpPr>
         <p:spPr>
           <a:xfrm>
-            <a:off x="709729" y="31556381"/>
+            <a:off x="709729" y="31136481"/>
             <a:ext cx="6048769" cy="814466"/>
           </a:xfrm>
           <a:prstGeom prst="rect">
@@ -14050,7 +14625,7 @@
           <a:noFill/>
         </p:spPr>
         <p:txBody>
-          <a:bodyPr wrap="none" lIns="110701" rIns="110701" tIns="30996" bIns="30996">
+          <a:bodyPr wrap="none" lIns="110701" tIns="30996" rIns="110701" bIns="30996">
             <a:spAutoFit/>
           </a:bodyPr>
           <a:lstStyle/>
@@ -14095,25 +14670,7 @@
                 </a:solidFill>
                 <a:latin typeface="Arial"/>
               </a:rPr>
-              <a:t>OBSERVATION PATH (</a:t>
-            </a:r>
-            <a:r>
-              <a:rPr sz="1743" b="1" spc="87">
-                <a:solidFill>
-                  <a:srgbClr val="555555"/>
-                </a:solidFill>
-                <a:latin typeface="Arial"/>
-              </a:rPr>
-              <a:t>λ</a:t>
-            </a:r>
-            <a:r>
-              <a:rPr sz="1743" b="1" spc="87">
-                <a:solidFill>
-                  <a:srgbClr val="555555"/>
-                </a:solidFill>
-                <a:latin typeface="Arial"/>
-              </a:rPr>
-              <a:t> = 0.001561)</a:t>
+              <a:t>OBSERVATION PATH (λ = 0.001561)</a:t>
             </a:r>
           </a:p>
         </p:txBody>
@@ -14126,7 +14683,7 @@
         </p:nvSpPr>
         <p:spPr>
           <a:xfrm>
-            <a:off x="6582321" y="31556381"/>
+            <a:off x="6582321" y="31136481"/>
             <a:ext cx="4176469" cy="814466"/>
           </a:xfrm>
           <a:prstGeom prst="rect">
@@ -14135,7 +14692,7 @@
           <a:noFill/>
         </p:spPr>
         <p:txBody>
-          <a:bodyPr wrap="none" lIns="110701" rIns="110701" tIns="30996" bIns="30996">
+          <a:bodyPr wrap="none" lIns="110701" tIns="30996" rIns="110701" bIns="30996">
             <a:spAutoFit/>
           </a:bodyPr>
           <a:lstStyle/>
@@ -14171,7 +14728,7 @@
         </p:nvSpPr>
         <p:spPr>
           <a:xfrm>
-            <a:off x="10637146" y="31556381"/>
+            <a:off x="10637146" y="31136481"/>
             <a:ext cx="4176622" cy="814466"/>
           </a:xfrm>
           <a:prstGeom prst="rect">
@@ -14180,7 +14737,7 @@
           <a:noFill/>
         </p:spPr>
         <p:txBody>
-          <a:bodyPr wrap="none" lIns="110701" rIns="110701" tIns="30996" bIns="30996">
+          <a:bodyPr wrap="none" lIns="110701" tIns="30996" rIns="110701" bIns="30996">
             <a:spAutoFit/>
           </a:bodyPr>
           <a:lstStyle/>
@@ -14216,7 +14773,7 @@
         </p:nvSpPr>
         <p:spPr>
           <a:xfrm>
-            <a:off x="709729" y="32264613"/>
+            <a:off x="709729" y="31844713"/>
             <a:ext cx="6048769" cy="597676"/>
           </a:xfrm>
           <a:prstGeom prst="rect">
@@ -14225,7 +14782,7 @@
           <a:noFill/>
         </p:spPr>
         <p:txBody>
-          <a:bodyPr wrap="square" lIns="147601" rIns="147601" tIns="41328" bIns="41328">
+          <a:bodyPr wrap="square" lIns="147601" tIns="41328" rIns="147601" bIns="41328">
             <a:spAutoFit/>
           </a:bodyPr>
           <a:lstStyle/>
@@ -14261,7 +14818,7 @@
         </p:nvSpPr>
         <p:spPr>
           <a:xfrm>
-            <a:off x="6582321" y="32264613"/>
+            <a:off x="6582321" y="31844713"/>
             <a:ext cx="4176469" cy="597676"/>
           </a:xfrm>
           <a:prstGeom prst="rect">
@@ -14270,7 +14827,7 @@
           <a:noFill/>
         </p:spPr>
         <p:txBody>
-          <a:bodyPr wrap="square" lIns="147601" rIns="147601" tIns="41328" bIns="41328">
+          <a:bodyPr wrap="square" lIns="147601" tIns="41328" rIns="147601" bIns="41328">
             <a:spAutoFit/>
           </a:bodyPr>
           <a:lstStyle/>
@@ -14306,7 +14863,7 @@
         </p:nvSpPr>
         <p:spPr>
           <a:xfrm>
-            <a:off x="10637146" y="32264613"/>
+            <a:off x="10637146" y="31844713"/>
             <a:ext cx="4176622" cy="597676"/>
           </a:xfrm>
           <a:prstGeom prst="rect">
@@ -14315,7 +14872,7 @@
           <a:noFill/>
         </p:spPr>
         <p:txBody>
-          <a:bodyPr wrap="square" lIns="147601" rIns="147601" tIns="41328" bIns="41328">
+          <a:bodyPr wrap="square" lIns="147601" tIns="41328" rIns="147601" bIns="41328">
             <a:spAutoFit/>
           </a:bodyPr>
           <a:lstStyle/>
@@ -14351,7 +14908,7 @@
         </p:nvSpPr>
         <p:spPr>
           <a:xfrm>
-            <a:off x="709729" y="32784332"/>
+            <a:off x="709729" y="32364432"/>
             <a:ext cx="6048769" cy="597673"/>
           </a:xfrm>
           <a:prstGeom prst="rect">
@@ -14360,7 +14917,7 @@
           <a:noFill/>
         </p:spPr>
         <p:txBody>
-          <a:bodyPr wrap="square" lIns="147601" rIns="147601" tIns="41328" bIns="41328">
+          <a:bodyPr wrap="square" lIns="147601" tIns="41328" rIns="147601" bIns="41328">
             <a:spAutoFit/>
           </a:bodyPr>
           <a:lstStyle/>
@@ -14396,7 +14953,7 @@
         </p:nvSpPr>
         <p:spPr>
           <a:xfrm>
-            <a:off x="6582321" y="32784332"/>
+            <a:off x="6582321" y="32364432"/>
             <a:ext cx="4176469" cy="597673"/>
           </a:xfrm>
           <a:prstGeom prst="rect">
@@ -14405,7 +14962,7 @@
           <a:noFill/>
         </p:spPr>
         <p:txBody>
-          <a:bodyPr wrap="square" lIns="147601" rIns="147601" tIns="41328" bIns="41328">
+          <a:bodyPr wrap="square" lIns="147601" tIns="41328" rIns="147601" bIns="41328">
             <a:spAutoFit/>
           </a:bodyPr>
           <a:lstStyle/>
@@ -14441,7 +14998,7 @@
         </p:nvSpPr>
         <p:spPr>
           <a:xfrm>
-            <a:off x="10637146" y="32784332"/>
+            <a:off x="10637146" y="32364432"/>
             <a:ext cx="4176622" cy="597673"/>
           </a:xfrm>
           <a:prstGeom prst="rect">
@@ -14450,7 +15007,7 @@
           <a:noFill/>
         </p:spPr>
         <p:txBody>
-          <a:bodyPr wrap="square" lIns="147601" rIns="147601" tIns="41328" bIns="41328">
+          <a:bodyPr wrap="square" lIns="147601" tIns="41328" rIns="147601" bIns="41328">
             <a:spAutoFit/>
           </a:bodyPr>
           <a:lstStyle/>
@@ -14486,7 +15043,7 @@
         </p:nvSpPr>
         <p:spPr>
           <a:xfrm>
-            <a:off x="709729" y="33304048"/>
+            <a:off x="709729" y="32884148"/>
             <a:ext cx="6048769" cy="597676"/>
           </a:xfrm>
           <a:prstGeom prst="rect">
@@ -14495,7 +15052,7 @@
           <a:noFill/>
         </p:spPr>
         <p:txBody>
-          <a:bodyPr wrap="square" lIns="147601" rIns="147601" tIns="41328" bIns="41328">
+          <a:bodyPr wrap="square" lIns="147601" tIns="41328" rIns="147601" bIns="41328">
             <a:spAutoFit/>
           </a:bodyPr>
           <a:lstStyle/>
@@ -14531,7 +15088,7 @@
         </p:nvSpPr>
         <p:spPr>
           <a:xfrm>
-            <a:off x="6582321" y="33304048"/>
+            <a:off x="6582321" y="32884148"/>
             <a:ext cx="4176469" cy="597676"/>
           </a:xfrm>
           <a:prstGeom prst="rect">
@@ -14540,7 +15097,7 @@
           <a:noFill/>
         </p:spPr>
         <p:txBody>
-          <a:bodyPr wrap="square" lIns="147601" rIns="147601" tIns="41328" bIns="41328">
+          <a:bodyPr wrap="square" lIns="147601" tIns="41328" rIns="147601" bIns="41328">
             <a:spAutoFit/>
           </a:bodyPr>
           <a:lstStyle/>
@@ -14576,7 +15133,7 @@
         </p:nvSpPr>
         <p:spPr>
           <a:xfrm>
-            <a:off x="10637146" y="33304048"/>
+            <a:off x="10637146" y="32884148"/>
             <a:ext cx="4176622" cy="597676"/>
           </a:xfrm>
           <a:prstGeom prst="rect">
@@ -14585,7 +15142,7 @@
           <a:noFill/>
         </p:spPr>
         <p:txBody>
-          <a:bodyPr wrap="square" lIns="147601" rIns="147601" tIns="41328" bIns="41328">
+          <a:bodyPr wrap="square" lIns="147601" tIns="41328" rIns="147601" bIns="41328">
             <a:spAutoFit/>
           </a:bodyPr>
           <a:lstStyle/>
@@ -14621,7 +15178,7 @@
         </p:nvSpPr>
         <p:spPr>
           <a:xfrm>
-            <a:off x="15574443" y="33318331"/>
+            <a:off x="15574443" y="32898431"/>
             <a:ext cx="6211679" cy="469004"/>
           </a:xfrm>
           <a:prstGeom prst="rect">
@@ -14630,7 +15187,7 @@
           <a:noFill/>
         </p:spPr>
         <p:txBody>
-          <a:bodyPr wrap="square" lIns="106700" rIns="106700" tIns="46947" bIns="46947">
+          <a:bodyPr wrap="square" lIns="106700" tIns="46947" rIns="106700" bIns="46947">
             <a:spAutoFit/>
           </a:bodyPr>
           <a:lstStyle/>
@@ -14666,7 +15223,7 @@
         </p:nvSpPr>
         <p:spPr>
           <a:xfrm>
-            <a:off x="21605200" y="33318331"/>
+            <a:off x="21605200" y="32898431"/>
             <a:ext cx="2159649" cy="469004"/>
           </a:xfrm>
           <a:prstGeom prst="rect">
@@ -14675,7 +15232,7 @@
           <a:noFill/>
         </p:spPr>
         <p:txBody>
-          <a:bodyPr wrap="square" lIns="106700" rIns="106700" tIns="46947" bIns="46947">
+          <a:bodyPr wrap="square" lIns="106700" tIns="46947" rIns="106700" bIns="46947">
             <a:spAutoFit/>
           </a:bodyPr>
           <a:lstStyle/>
@@ -14711,7 +15268,7 @@
         </p:nvSpPr>
         <p:spPr>
           <a:xfrm>
-            <a:off x="23701947" y="33318331"/>
+            <a:off x="23701947" y="32898431"/>
             <a:ext cx="3428591" cy="469004"/>
           </a:xfrm>
           <a:prstGeom prst="rect">
@@ -14720,7 +15277,7 @@
           <a:noFill/>
         </p:spPr>
         <p:txBody>
-          <a:bodyPr wrap="square" lIns="106700" rIns="106700" tIns="46947" bIns="46947">
+          <a:bodyPr wrap="square" lIns="106700" tIns="46947" rIns="106700" bIns="46947">
             <a:spAutoFit/>
           </a:bodyPr>
           <a:lstStyle/>
@@ -14756,7 +15313,7 @@
         </p:nvSpPr>
         <p:spPr>
           <a:xfrm>
-            <a:off x="27030677" y="33318331"/>
+            <a:off x="27030677" y="32898431"/>
             <a:ext cx="2601942" cy="469004"/>
           </a:xfrm>
           <a:prstGeom prst="rect">
@@ -14765,7 +15322,7 @@
           <a:noFill/>
         </p:spPr>
         <p:txBody>
-          <a:bodyPr wrap="square" lIns="106700" rIns="106700" tIns="46947" bIns="46947">
+          <a:bodyPr wrap="square" lIns="106700" tIns="46947" rIns="106700" bIns="46947">
             <a:spAutoFit/>
           </a:bodyPr>
           <a:lstStyle/>
@@ -14801,7 +15358,7 @@
         </p:nvSpPr>
         <p:spPr>
           <a:xfrm>
-            <a:off x="15574443" y="33726161"/>
+            <a:off x="15574443" y="33306261"/>
             <a:ext cx="6211679" cy="628647"/>
           </a:xfrm>
           <a:prstGeom prst="rect">
@@ -14810,7 +15367,7 @@
           <a:noFill/>
         </p:spPr>
         <p:txBody>
-          <a:bodyPr wrap="square" lIns="142266" rIns="142266" tIns="62596" bIns="62596">
+          <a:bodyPr wrap="square" lIns="142266" tIns="62596" rIns="142266" bIns="62596">
             <a:spAutoFit/>
           </a:bodyPr>
           <a:lstStyle/>
@@ -14846,7 +15403,7 @@
         </p:nvSpPr>
         <p:spPr>
           <a:xfrm>
-            <a:off x="21605200" y="33726161"/>
+            <a:off x="21605200" y="33306261"/>
             <a:ext cx="2159649" cy="628647"/>
           </a:xfrm>
           <a:prstGeom prst="rect">
@@ -14855,7 +15412,7 @@
           <a:noFill/>
         </p:spPr>
         <p:txBody>
-          <a:bodyPr wrap="none" lIns="142266" rIns="142266" tIns="62596" bIns="62596">
+          <a:bodyPr wrap="none" lIns="142266" tIns="62596" rIns="142266" bIns="62596">
             <a:spAutoFit/>
           </a:bodyPr>
           <a:lstStyle/>
@@ -14891,7 +15448,7 @@
         </p:nvSpPr>
         <p:spPr>
           <a:xfrm>
-            <a:off x="23701947" y="33726161"/>
+            <a:off x="23701947" y="33306261"/>
             <a:ext cx="3428591" cy="628647"/>
           </a:xfrm>
           <a:prstGeom prst="rect">
@@ -14900,7 +15457,7 @@
           <a:noFill/>
         </p:spPr>
         <p:txBody>
-          <a:bodyPr wrap="none" lIns="142266" rIns="142266" tIns="62596" bIns="62596">
+          <a:bodyPr wrap="none" lIns="142266" tIns="62596" rIns="142266" bIns="62596">
             <a:spAutoFit/>
           </a:bodyPr>
           <a:lstStyle/>
@@ -14936,7 +15493,7 @@
         </p:nvSpPr>
         <p:spPr>
           <a:xfrm>
-            <a:off x="27030677" y="33726161"/>
+            <a:off x="27030677" y="33306261"/>
             <a:ext cx="2601942" cy="628647"/>
           </a:xfrm>
           <a:prstGeom prst="rect">
@@ -14945,7 +15502,7 @@
           <a:noFill/>
         </p:spPr>
         <p:txBody>
-          <a:bodyPr wrap="none" lIns="142266" rIns="142266" tIns="62596" bIns="62596">
+          <a:bodyPr wrap="none" lIns="142266" tIns="62596" rIns="142266" bIns="62596">
             <a:spAutoFit/>
           </a:bodyPr>
           <a:lstStyle/>
@@ -14981,7 +15538,7 @@
         </p:nvSpPr>
         <p:spPr>
           <a:xfrm>
-            <a:off x="709729" y="33823767"/>
+            <a:off x="709729" y="33403867"/>
             <a:ext cx="6048769" cy="597674"/>
           </a:xfrm>
           <a:prstGeom prst="rect">
@@ -14990,7 +15547,7 @@
           <a:noFill/>
         </p:spPr>
         <p:txBody>
-          <a:bodyPr wrap="square" lIns="147601" rIns="147601" tIns="41328" bIns="41328">
+          <a:bodyPr wrap="square" lIns="147601" tIns="41328" rIns="147601" bIns="41328">
             <a:spAutoFit/>
           </a:bodyPr>
           <a:lstStyle/>
@@ -15026,7 +15583,7 @@
         </p:nvSpPr>
         <p:spPr>
           <a:xfrm>
-            <a:off x="6582321" y="33823767"/>
+            <a:off x="6582321" y="33403867"/>
             <a:ext cx="4176469" cy="597674"/>
           </a:xfrm>
           <a:prstGeom prst="rect">
@@ -15035,7 +15592,7 @@
           <a:noFill/>
         </p:spPr>
         <p:txBody>
-          <a:bodyPr wrap="square" lIns="147601" rIns="147601" tIns="41328" bIns="41328">
+          <a:bodyPr wrap="square" lIns="147601" tIns="41328" rIns="147601" bIns="41328">
             <a:spAutoFit/>
           </a:bodyPr>
           <a:lstStyle/>
@@ -15071,7 +15628,7 @@
         </p:nvSpPr>
         <p:spPr>
           <a:xfrm>
-            <a:off x="10637146" y="33823767"/>
+            <a:off x="10637146" y="33403867"/>
             <a:ext cx="4176622" cy="597674"/>
           </a:xfrm>
           <a:prstGeom prst="rect">
@@ -15080,7 +15637,7 @@
           <a:noFill/>
         </p:spPr>
         <p:txBody>
-          <a:bodyPr wrap="square" lIns="147601" rIns="147601" tIns="41328" bIns="41328">
+          <a:bodyPr wrap="square" lIns="147601" tIns="41328" rIns="147601" bIns="41328">
             <a:spAutoFit/>
           </a:bodyPr>
           <a:lstStyle/>
@@ -15116,8 +15673,8 @@
         </p:nvSpPr>
         <p:spPr>
           <a:xfrm>
-            <a:off x="15574443" y="34272811"/>
-            <a:ext cx="6211679" cy="628644"/>
+            <a:off x="15574443" y="33852911"/>
+            <a:ext cx="6211679" cy="628646"/>
           </a:xfrm>
           <a:prstGeom prst="rect">
             <a:avLst/>
@@ -15125,7 +15682,7 @@
           <a:noFill/>
         </p:spPr>
         <p:txBody>
-          <a:bodyPr wrap="square" lIns="142266" rIns="142266" tIns="62596" bIns="62596">
+          <a:bodyPr wrap="square" lIns="142266" tIns="62596" rIns="142266" bIns="62596">
             <a:spAutoFit/>
           </a:bodyPr>
           <a:lstStyle/>
@@ -15161,8 +15718,8 @@
         </p:nvSpPr>
         <p:spPr>
           <a:xfrm>
-            <a:off x="21605200" y="34272811"/>
-            <a:ext cx="2159649" cy="628644"/>
+            <a:off x="21605200" y="33852911"/>
+            <a:ext cx="2159649" cy="628646"/>
           </a:xfrm>
           <a:prstGeom prst="rect">
             <a:avLst/>
@@ -15170,7 +15727,7 @@
           <a:noFill/>
         </p:spPr>
         <p:txBody>
-          <a:bodyPr wrap="none" lIns="142266" rIns="142266" tIns="62596" bIns="62596">
+          <a:bodyPr wrap="none" lIns="142266" tIns="62596" rIns="142266" bIns="62596">
             <a:spAutoFit/>
           </a:bodyPr>
           <a:lstStyle/>
@@ -15206,8 +15763,8 @@
         </p:nvSpPr>
         <p:spPr>
           <a:xfrm>
-            <a:off x="23701947" y="34272811"/>
-            <a:ext cx="3428591" cy="628644"/>
+            <a:off x="23701947" y="33852911"/>
+            <a:ext cx="3428591" cy="628646"/>
           </a:xfrm>
           <a:prstGeom prst="rect">
             <a:avLst/>
@@ -15215,7 +15772,7 @@
           <a:noFill/>
         </p:spPr>
         <p:txBody>
-          <a:bodyPr wrap="none" lIns="142266" rIns="142266" tIns="62596" bIns="62596">
+          <a:bodyPr wrap="none" lIns="142266" tIns="62596" rIns="142266" bIns="62596">
             <a:spAutoFit/>
           </a:bodyPr>
           <a:lstStyle/>
@@ -15251,8 +15808,8 @@
         </p:nvSpPr>
         <p:spPr>
           <a:xfrm>
-            <a:off x="27030677" y="34272811"/>
-            <a:ext cx="2601942" cy="628644"/>
+            <a:off x="27030677" y="33852911"/>
+            <a:ext cx="2601942" cy="628646"/>
           </a:xfrm>
           <a:prstGeom prst="rect">
             <a:avLst/>
@@ -15260,7 +15817,7 @@
           <a:noFill/>
         </p:spPr>
         <p:txBody>
-          <a:bodyPr wrap="none" lIns="142266" rIns="142266" tIns="62596" bIns="62596">
+          <a:bodyPr wrap="none" lIns="142266" tIns="62596" rIns="142266" bIns="62596">
             <a:spAutoFit/>
           </a:bodyPr>
           <a:lstStyle/>
@@ -15296,7 +15853,7 @@
         </p:nvSpPr>
         <p:spPr>
           <a:xfrm>
-            <a:off x="709729" y="34343484"/>
+            <a:off x="709729" y="33923584"/>
             <a:ext cx="6048769" cy="597676"/>
           </a:xfrm>
           <a:prstGeom prst="rect">
@@ -15305,7 +15862,7 @@
           <a:noFill/>
         </p:spPr>
         <p:txBody>
-          <a:bodyPr wrap="square" lIns="147601" rIns="147601" tIns="41328" bIns="41328">
+          <a:bodyPr wrap="square" lIns="147601" tIns="41328" rIns="147601" bIns="41328">
             <a:spAutoFit/>
           </a:bodyPr>
           <a:lstStyle/>
@@ -15341,7 +15898,7 @@
         </p:nvSpPr>
         <p:spPr>
           <a:xfrm>
-            <a:off x="6582321" y="34343484"/>
+            <a:off x="6582321" y="33923584"/>
             <a:ext cx="4176469" cy="597676"/>
           </a:xfrm>
           <a:prstGeom prst="rect">
@@ -15350,7 +15907,7 @@
           <a:noFill/>
         </p:spPr>
         <p:txBody>
-          <a:bodyPr wrap="square" lIns="147601" rIns="147601" tIns="41328" bIns="41328">
+          <a:bodyPr wrap="square" lIns="147601" tIns="41328" rIns="147601" bIns="41328">
             <a:spAutoFit/>
           </a:bodyPr>
           <a:lstStyle/>
@@ -15386,7 +15943,7 @@
         </p:nvSpPr>
         <p:spPr>
           <a:xfrm>
-            <a:off x="10637146" y="34343484"/>
+            <a:off x="10637146" y="33923584"/>
             <a:ext cx="4176622" cy="597676"/>
           </a:xfrm>
           <a:prstGeom prst="rect">
@@ -15395,7 +15952,7 @@
           <a:noFill/>
         </p:spPr>
         <p:txBody>
-          <a:bodyPr wrap="square" lIns="147601" rIns="147601" tIns="41328" bIns="41328">
+          <a:bodyPr wrap="square" lIns="147601" tIns="41328" rIns="147601" bIns="41328">
             <a:spAutoFit/>
           </a:bodyPr>
           <a:lstStyle/>
@@ -15431,8 +15988,8 @@
         </p:nvSpPr>
         <p:spPr>
           <a:xfrm>
-            <a:off x="15574443" y="34819458"/>
-            <a:ext cx="6211679" cy="628645"/>
+            <a:off x="15574443" y="34399560"/>
+            <a:ext cx="6211679" cy="628643"/>
           </a:xfrm>
           <a:prstGeom prst="rect">
             <a:avLst/>
@@ -15440,7 +15997,7 @@
           <a:noFill/>
         </p:spPr>
         <p:txBody>
-          <a:bodyPr wrap="square" lIns="142266" rIns="142266" tIns="62596" bIns="62596">
+          <a:bodyPr wrap="square" lIns="142266" tIns="62596" rIns="142266" bIns="62596">
             <a:spAutoFit/>
           </a:bodyPr>
           <a:lstStyle/>
@@ -15476,8 +16033,8 @@
         </p:nvSpPr>
         <p:spPr>
           <a:xfrm>
-            <a:off x="21605200" y="34819458"/>
-            <a:ext cx="2159649" cy="628645"/>
+            <a:off x="21605200" y="34399560"/>
+            <a:ext cx="2159649" cy="628643"/>
           </a:xfrm>
           <a:prstGeom prst="rect">
             <a:avLst/>
@@ -15485,7 +16042,7 @@
           <a:noFill/>
         </p:spPr>
         <p:txBody>
-          <a:bodyPr wrap="none" lIns="142266" rIns="142266" tIns="62596" bIns="62596">
+          <a:bodyPr wrap="none" lIns="142266" tIns="62596" rIns="142266" bIns="62596">
             <a:spAutoFit/>
           </a:bodyPr>
           <a:lstStyle/>
@@ -15521,8 +16078,8 @@
         </p:nvSpPr>
         <p:spPr>
           <a:xfrm>
-            <a:off x="23701947" y="34819458"/>
-            <a:ext cx="3428591" cy="628645"/>
+            <a:off x="23701947" y="34399560"/>
+            <a:ext cx="3428591" cy="628643"/>
           </a:xfrm>
           <a:prstGeom prst="rect">
             <a:avLst/>
@@ -15530,7 +16087,7 @@
           <a:noFill/>
         </p:spPr>
         <p:txBody>
-          <a:bodyPr wrap="none" lIns="142266" rIns="142266" tIns="62596" bIns="62596">
+          <a:bodyPr wrap="none" lIns="142266" tIns="62596" rIns="142266" bIns="62596">
             <a:spAutoFit/>
           </a:bodyPr>
           <a:lstStyle/>
